--- a/ppt/00Apres.pptx
+++ b/ppt/00Apres.pptx
@@ -147,7 +147,7 @@
   </p:defaultTextStyle>
   <p:extLst>
     <p:ext uri="{EFAFB233-063F-42B5-8137-9DF3F51BA10A}">
-      <p15:sldGuideLst xmlns:p15="http://schemas.microsoft.com/office/powerpoint/2012/main" xmlns="">
+      <p15:sldGuideLst xmlns:p15="http://schemas.microsoft.com/office/powerpoint/2012/main">
         <p15:guide id="1" orient="horz" pos="2160">
           <p15:clr>
             <a:srgbClr val="A4A3A4"/>
@@ -162,6 +162,14 @@
     </p:ext>
   </p:extLst>
 </p:presentation>
+</file>
+
+<file path=ppt/revisionInfo.xml><?xml version="1.0" encoding="utf-8"?>
+<p1510:revInfo xmlns:a="http://schemas.openxmlformats.org/drawingml/2006/main" xmlns:r="http://schemas.openxmlformats.org/officeDocument/2006/relationships" xmlns:p1510="http://schemas.microsoft.com/office/powerpoint/2015/10/main">
+  <p1510:revLst>
+    <p1510:client id="{435231E9-EFF7-4B35-A063-2CE70FCF688A}" v="3" dt="2025-06-09T12:42:30.593"/>
+  </p1510:revLst>
+</p1510:revInfo>
 </file>
 
 <file path=ppt/changesInfos/changesInfo1.xml><?xml version="1.0" encoding="utf-8"?>
@@ -179,6 +187,372 @@
           <pc:docMk/>
           <pc:sldMk cId="3928394977" sldId="395"/>
         </pc:sldMkLst>
+      </pc:sldChg>
+    </pc:docChg>
+  </pc:docChgLst>
+  <pc:docChgLst>
+    <pc:chgData name="Camilo Daleles Rennó" userId="eac9aab033b2f962" providerId="LiveId" clId="{435231E9-EFF7-4B35-A063-2CE70FCF688A}"/>
+    <pc:docChg chg="modSld">
+      <pc:chgData name="Camilo Daleles Rennó" userId="eac9aab033b2f962" providerId="LiveId" clId="{435231E9-EFF7-4B35-A063-2CE70FCF688A}" dt="2025-06-09T13:00:50.505" v="12" actId="6549"/>
+      <pc:docMkLst>
+        <pc:docMk/>
+      </pc:docMkLst>
+      <pc:sldChg chg="addSp delSp modSp mod modTransition modAnim">
+        <pc:chgData name="Camilo Daleles Rennó" userId="eac9aab033b2f962" providerId="LiveId" clId="{435231E9-EFF7-4B35-A063-2CE70FCF688A}" dt="2025-06-09T13:00:50.505" v="12" actId="6549"/>
+        <pc:sldMkLst>
+          <pc:docMk/>
+          <pc:sldMk cId="0" sldId="345"/>
+        </pc:sldMkLst>
+        <pc:spChg chg="mod">
+          <ac:chgData name="Camilo Daleles Rennó" userId="eac9aab033b2f962" providerId="LiveId" clId="{435231E9-EFF7-4B35-A063-2CE70FCF688A}" dt="2025-06-09T13:00:50.505" v="12" actId="6549"/>
+          <ac:spMkLst>
+            <pc:docMk/>
+            <pc:sldMk cId="0" sldId="345"/>
+            <ac:spMk id="3074" creationId="{00000000-0000-0000-0000-000000000000}"/>
+          </ac:spMkLst>
+        </pc:spChg>
+        <pc:picChg chg="add del mod">
+          <ac:chgData name="Camilo Daleles Rennó" userId="eac9aab033b2f962" providerId="LiveId" clId="{435231E9-EFF7-4B35-A063-2CE70FCF688A}" dt="2025-06-09T12:41:56.159" v="10"/>
+          <ac:picMkLst>
+            <pc:docMk/>
+            <pc:sldMk cId="0" sldId="345"/>
+            <ac:picMk id="8" creationId="{D286D80D-6621-4F5B-C06A-73B862E84597}"/>
+          </ac:picMkLst>
+        </pc:picChg>
+        <pc:picChg chg="add del mod ord">
+          <ac:chgData name="Camilo Daleles Rennó" userId="eac9aab033b2f962" providerId="LiveId" clId="{435231E9-EFF7-4B35-A063-2CE70FCF688A}" dt="2025-06-09T12:42:30.593" v="11"/>
+          <ac:picMkLst>
+            <pc:docMk/>
+            <pc:sldMk cId="0" sldId="345"/>
+            <ac:picMk id="10" creationId="{70ABD6FB-B281-E700-6D16-D523D81C1859}"/>
+          </ac:picMkLst>
+        </pc:picChg>
+        <pc:picChg chg="add mod">
+          <ac:chgData name="Camilo Daleles Rennó" userId="eac9aab033b2f962" providerId="LiveId" clId="{435231E9-EFF7-4B35-A063-2CE70FCF688A}" dt="2025-06-09T12:42:30.593" v="11"/>
+          <ac:picMkLst>
+            <pc:docMk/>
+            <pc:sldMk cId="0" sldId="345"/>
+            <ac:picMk id="11" creationId="{7BC73855-528A-64EC-1889-FC03BB10769B}"/>
+          </ac:picMkLst>
+        </pc:picChg>
+      </pc:sldChg>
+      <pc:sldChg chg="addSp delSp modSp mod modTransition modAnim">
+        <pc:chgData name="Camilo Daleles Rennó" userId="eac9aab033b2f962" providerId="LiveId" clId="{435231E9-EFF7-4B35-A063-2CE70FCF688A}" dt="2025-06-09T12:42:30.593" v="11"/>
+        <pc:sldMkLst>
+          <pc:docMk/>
+          <pc:sldMk cId="0" sldId="366"/>
+        </pc:sldMkLst>
+        <pc:picChg chg="add del mod">
+          <ac:chgData name="Camilo Daleles Rennó" userId="eac9aab033b2f962" providerId="LiveId" clId="{435231E9-EFF7-4B35-A063-2CE70FCF688A}" dt="2025-06-09T12:41:56.159" v="10"/>
+          <ac:picMkLst>
+            <pc:docMk/>
+            <pc:sldMk cId="0" sldId="366"/>
+            <ac:picMk id="5" creationId="{7B531300-187C-47EE-0127-8A4BF0F7A55A}"/>
+          </ac:picMkLst>
+        </pc:picChg>
+        <pc:picChg chg="add del mod ord">
+          <ac:chgData name="Camilo Daleles Rennó" userId="eac9aab033b2f962" providerId="LiveId" clId="{435231E9-EFF7-4B35-A063-2CE70FCF688A}" dt="2025-06-09T12:42:30.593" v="11"/>
+          <ac:picMkLst>
+            <pc:docMk/>
+            <pc:sldMk cId="0" sldId="366"/>
+            <ac:picMk id="6" creationId="{D68B8141-BC9D-7B68-7620-797A4AC25EE9}"/>
+          </ac:picMkLst>
+        </pc:picChg>
+        <pc:picChg chg="add mod">
+          <ac:chgData name="Camilo Daleles Rennó" userId="eac9aab033b2f962" providerId="LiveId" clId="{435231E9-EFF7-4B35-A063-2CE70FCF688A}" dt="2025-06-09T12:42:30.593" v="11"/>
+          <ac:picMkLst>
+            <pc:docMk/>
+            <pc:sldMk cId="0" sldId="366"/>
+            <ac:picMk id="7" creationId="{D000FDAB-8734-1D51-1D9A-3F3440C2A53A}"/>
+          </ac:picMkLst>
+        </pc:picChg>
+      </pc:sldChg>
+      <pc:sldChg chg="addSp delSp modSp mod modTransition modAnim">
+        <pc:chgData name="Camilo Daleles Rennó" userId="eac9aab033b2f962" providerId="LiveId" clId="{435231E9-EFF7-4B35-A063-2CE70FCF688A}" dt="2025-06-09T12:42:30.593" v="11"/>
+        <pc:sldMkLst>
+          <pc:docMk/>
+          <pc:sldMk cId="33346296" sldId="374"/>
+        </pc:sldMkLst>
+        <pc:picChg chg="add del mod">
+          <ac:chgData name="Camilo Daleles Rennó" userId="eac9aab033b2f962" providerId="LiveId" clId="{435231E9-EFF7-4B35-A063-2CE70FCF688A}" dt="2025-06-09T12:41:56.159" v="10"/>
+          <ac:picMkLst>
+            <pc:docMk/>
+            <pc:sldMk cId="33346296" sldId="374"/>
+            <ac:picMk id="8" creationId="{8077F5D0-7FF3-7C3B-93E5-AB355AB072F8}"/>
+          </ac:picMkLst>
+        </pc:picChg>
+        <pc:picChg chg="add del mod ord">
+          <ac:chgData name="Camilo Daleles Rennó" userId="eac9aab033b2f962" providerId="LiveId" clId="{435231E9-EFF7-4B35-A063-2CE70FCF688A}" dt="2025-06-09T12:42:30.593" v="11"/>
+          <ac:picMkLst>
+            <pc:docMk/>
+            <pc:sldMk cId="33346296" sldId="374"/>
+            <ac:picMk id="10" creationId="{9F8761B9-D9AD-5B7C-E239-4B29AEC42F95}"/>
+          </ac:picMkLst>
+        </pc:picChg>
+        <pc:picChg chg="add mod">
+          <ac:chgData name="Camilo Daleles Rennó" userId="eac9aab033b2f962" providerId="LiveId" clId="{435231E9-EFF7-4B35-A063-2CE70FCF688A}" dt="2025-06-09T12:42:30.593" v="11"/>
+          <ac:picMkLst>
+            <pc:docMk/>
+            <pc:sldMk cId="33346296" sldId="374"/>
+            <ac:picMk id="11" creationId="{FB357070-E09F-48FA-B3EF-666CF1D0134C}"/>
+          </ac:picMkLst>
+        </pc:picChg>
+      </pc:sldChg>
+      <pc:sldChg chg="addSp delSp modSp mod modTransition modAnim">
+        <pc:chgData name="Camilo Daleles Rennó" userId="eac9aab033b2f962" providerId="LiveId" clId="{435231E9-EFF7-4B35-A063-2CE70FCF688A}" dt="2025-06-09T12:42:30.593" v="11"/>
+        <pc:sldMkLst>
+          <pc:docMk/>
+          <pc:sldMk cId="1916879497" sldId="375"/>
+        </pc:sldMkLst>
+        <pc:picChg chg="add del mod">
+          <ac:chgData name="Camilo Daleles Rennó" userId="eac9aab033b2f962" providerId="LiveId" clId="{435231E9-EFF7-4B35-A063-2CE70FCF688A}" dt="2025-06-09T12:41:56.159" v="10"/>
+          <ac:picMkLst>
+            <pc:docMk/>
+            <pc:sldMk cId="1916879497" sldId="375"/>
+            <ac:picMk id="79" creationId="{D568EDE2-3457-B433-030C-DA8566EF2575}"/>
+          </ac:picMkLst>
+        </pc:picChg>
+        <pc:picChg chg="add del mod ord">
+          <ac:chgData name="Camilo Daleles Rennó" userId="eac9aab033b2f962" providerId="LiveId" clId="{435231E9-EFF7-4B35-A063-2CE70FCF688A}" dt="2025-06-09T12:42:30.593" v="11"/>
+          <ac:picMkLst>
+            <pc:docMk/>
+            <pc:sldMk cId="1916879497" sldId="375"/>
+            <ac:picMk id="80" creationId="{C7A7DD8F-E39D-2ACA-8BC5-C8E6BB74409E}"/>
+          </ac:picMkLst>
+        </pc:picChg>
+        <pc:picChg chg="add mod">
+          <ac:chgData name="Camilo Daleles Rennó" userId="eac9aab033b2f962" providerId="LiveId" clId="{435231E9-EFF7-4B35-A063-2CE70FCF688A}" dt="2025-06-09T12:42:30.593" v="11"/>
+          <ac:picMkLst>
+            <pc:docMk/>
+            <pc:sldMk cId="1916879497" sldId="375"/>
+            <ac:picMk id="81" creationId="{B0DE8F5F-567A-BF98-7BE6-8F0B77209FB4}"/>
+          </ac:picMkLst>
+        </pc:picChg>
+      </pc:sldChg>
+      <pc:sldChg chg="addSp delSp modSp mod modTransition modAnim">
+        <pc:chgData name="Camilo Daleles Rennó" userId="eac9aab033b2f962" providerId="LiveId" clId="{435231E9-EFF7-4B35-A063-2CE70FCF688A}" dt="2025-06-09T12:42:30.593" v="11"/>
+        <pc:sldMkLst>
+          <pc:docMk/>
+          <pc:sldMk cId="2239123633" sldId="377"/>
+        </pc:sldMkLst>
+        <pc:picChg chg="add del mod">
+          <ac:chgData name="Camilo Daleles Rennó" userId="eac9aab033b2f962" providerId="LiveId" clId="{435231E9-EFF7-4B35-A063-2CE70FCF688A}" dt="2025-06-09T12:41:56.159" v="10"/>
+          <ac:picMkLst>
+            <pc:docMk/>
+            <pc:sldMk cId="2239123633" sldId="377"/>
+            <ac:picMk id="6" creationId="{974318C2-49BA-500A-EA70-973BA755C982}"/>
+          </ac:picMkLst>
+        </pc:picChg>
+        <pc:picChg chg="add del mod ord">
+          <ac:chgData name="Camilo Daleles Rennó" userId="eac9aab033b2f962" providerId="LiveId" clId="{435231E9-EFF7-4B35-A063-2CE70FCF688A}" dt="2025-06-09T12:42:30.593" v="11"/>
+          <ac:picMkLst>
+            <pc:docMk/>
+            <pc:sldMk cId="2239123633" sldId="377"/>
+            <ac:picMk id="7" creationId="{27C5C9FB-370E-B26D-E7D4-979BF5DBA281}"/>
+          </ac:picMkLst>
+        </pc:picChg>
+        <pc:picChg chg="add mod">
+          <ac:chgData name="Camilo Daleles Rennó" userId="eac9aab033b2f962" providerId="LiveId" clId="{435231E9-EFF7-4B35-A063-2CE70FCF688A}" dt="2025-06-09T12:42:30.593" v="11"/>
+          <ac:picMkLst>
+            <pc:docMk/>
+            <pc:sldMk cId="2239123633" sldId="377"/>
+            <ac:picMk id="8" creationId="{C116E63C-A925-7AE5-14FF-BE1E92DB89DD}"/>
+          </ac:picMkLst>
+        </pc:picChg>
+      </pc:sldChg>
+      <pc:sldChg chg="addSp delSp modSp mod modTransition modAnim">
+        <pc:chgData name="Camilo Daleles Rennó" userId="eac9aab033b2f962" providerId="LiveId" clId="{435231E9-EFF7-4B35-A063-2CE70FCF688A}" dt="2025-06-09T12:42:30.593" v="11"/>
+        <pc:sldMkLst>
+          <pc:docMk/>
+          <pc:sldMk cId="983261099" sldId="388"/>
+        </pc:sldMkLst>
+        <pc:picChg chg="add del mod">
+          <ac:chgData name="Camilo Daleles Rennó" userId="eac9aab033b2f962" providerId="LiveId" clId="{435231E9-EFF7-4B35-A063-2CE70FCF688A}" dt="2025-06-09T12:41:56.159" v="10"/>
+          <ac:picMkLst>
+            <pc:docMk/>
+            <pc:sldMk cId="983261099" sldId="388"/>
+            <ac:picMk id="5" creationId="{9C146D13-C44A-81AE-7380-149D2EB06AE2}"/>
+          </ac:picMkLst>
+        </pc:picChg>
+        <pc:picChg chg="add del mod ord">
+          <ac:chgData name="Camilo Daleles Rennó" userId="eac9aab033b2f962" providerId="LiveId" clId="{435231E9-EFF7-4B35-A063-2CE70FCF688A}" dt="2025-06-09T12:42:30.593" v="11"/>
+          <ac:picMkLst>
+            <pc:docMk/>
+            <pc:sldMk cId="983261099" sldId="388"/>
+            <ac:picMk id="6" creationId="{81281036-E549-94A8-66E9-73EEC75005BC}"/>
+          </ac:picMkLst>
+        </pc:picChg>
+        <pc:picChg chg="add mod">
+          <ac:chgData name="Camilo Daleles Rennó" userId="eac9aab033b2f962" providerId="LiveId" clId="{435231E9-EFF7-4B35-A063-2CE70FCF688A}" dt="2025-06-09T12:42:30.593" v="11"/>
+          <ac:picMkLst>
+            <pc:docMk/>
+            <pc:sldMk cId="983261099" sldId="388"/>
+            <ac:picMk id="7" creationId="{16CFF5A2-BEC4-70E1-ECCC-A33817FE0F69}"/>
+          </ac:picMkLst>
+        </pc:picChg>
+      </pc:sldChg>
+      <pc:sldChg chg="addSp delSp modSp mod modTransition modAnim">
+        <pc:chgData name="Camilo Daleles Rennó" userId="eac9aab033b2f962" providerId="LiveId" clId="{435231E9-EFF7-4B35-A063-2CE70FCF688A}" dt="2025-06-09T12:42:30.593" v="11"/>
+        <pc:sldMkLst>
+          <pc:docMk/>
+          <pc:sldMk cId="1877254047" sldId="393"/>
+        </pc:sldMkLst>
+        <pc:picChg chg="add del mod">
+          <ac:chgData name="Camilo Daleles Rennó" userId="eac9aab033b2f962" providerId="LiveId" clId="{435231E9-EFF7-4B35-A063-2CE70FCF688A}" dt="2025-06-09T12:41:56.159" v="10"/>
+          <ac:picMkLst>
+            <pc:docMk/>
+            <pc:sldMk cId="1877254047" sldId="393"/>
+            <ac:picMk id="5" creationId="{AF87929F-C015-ED89-673B-9A31C683B7D1}"/>
+          </ac:picMkLst>
+        </pc:picChg>
+        <pc:picChg chg="add del mod ord">
+          <ac:chgData name="Camilo Daleles Rennó" userId="eac9aab033b2f962" providerId="LiveId" clId="{435231E9-EFF7-4B35-A063-2CE70FCF688A}" dt="2025-06-09T12:42:30.593" v="11"/>
+          <ac:picMkLst>
+            <pc:docMk/>
+            <pc:sldMk cId="1877254047" sldId="393"/>
+            <ac:picMk id="6" creationId="{B01CFB83-8109-3A28-C96B-86C1ABB73688}"/>
+          </ac:picMkLst>
+        </pc:picChg>
+        <pc:picChg chg="add mod">
+          <ac:chgData name="Camilo Daleles Rennó" userId="eac9aab033b2f962" providerId="LiveId" clId="{435231E9-EFF7-4B35-A063-2CE70FCF688A}" dt="2025-06-09T12:42:30.593" v="11"/>
+          <ac:picMkLst>
+            <pc:docMk/>
+            <pc:sldMk cId="1877254047" sldId="393"/>
+            <ac:picMk id="7" creationId="{5027E456-2CF7-1AB7-D60D-16D56DB9E74B}"/>
+          </ac:picMkLst>
+        </pc:picChg>
+      </pc:sldChg>
+      <pc:sldChg chg="addSp delSp modSp mod modTransition modAnim">
+        <pc:chgData name="Camilo Daleles Rennó" userId="eac9aab033b2f962" providerId="LiveId" clId="{435231E9-EFF7-4B35-A063-2CE70FCF688A}" dt="2025-06-09T12:42:30.593" v="11"/>
+        <pc:sldMkLst>
+          <pc:docMk/>
+          <pc:sldMk cId="2956632756" sldId="394"/>
+        </pc:sldMkLst>
+        <pc:picChg chg="add del mod">
+          <ac:chgData name="Camilo Daleles Rennó" userId="eac9aab033b2f962" providerId="LiveId" clId="{435231E9-EFF7-4B35-A063-2CE70FCF688A}" dt="2025-06-09T12:41:56.159" v="10"/>
+          <ac:picMkLst>
+            <pc:docMk/>
+            <pc:sldMk cId="2956632756" sldId="394"/>
+            <ac:picMk id="6" creationId="{44094A92-B9DA-11F2-40EE-F2C66DFE4246}"/>
+          </ac:picMkLst>
+        </pc:picChg>
+        <pc:picChg chg="add del mod ord">
+          <ac:chgData name="Camilo Daleles Rennó" userId="eac9aab033b2f962" providerId="LiveId" clId="{435231E9-EFF7-4B35-A063-2CE70FCF688A}" dt="2025-06-09T12:42:30.593" v="11"/>
+          <ac:picMkLst>
+            <pc:docMk/>
+            <pc:sldMk cId="2956632756" sldId="394"/>
+            <ac:picMk id="8" creationId="{67AFB0FD-9F3F-C085-3055-467CA2BF9898}"/>
+          </ac:picMkLst>
+        </pc:picChg>
+        <pc:picChg chg="add mod">
+          <ac:chgData name="Camilo Daleles Rennó" userId="eac9aab033b2f962" providerId="LiveId" clId="{435231E9-EFF7-4B35-A063-2CE70FCF688A}" dt="2025-06-09T12:42:30.593" v="11"/>
+          <ac:picMkLst>
+            <pc:docMk/>
+            <pc:sldMk cId="2956632756" sldId="394"/>
+            <ac:picMk id="9" creationId="{E3A7E23F-2F3C-AAF2-CA7E-D1FD75B53958}"/>
+          </ac:picMkLst>
+        </pc:picChg>
+      </pc:sldChg>
+      <pc:sldChg chg="addSp delSp modSp mod modTransition modAnim">
+        <pc:chgData name="Camilo Daleles Rennó" userId="eac9aab033b2f962" providerId="LiveId" clId="{435231E9-EFF7-4B35-A063-2CE70FCF688A}" dt="2025-06-09T12:42:30.593" v="11"/>
+        <pc:sldMkLst>
+          <pc:docMk/>
+          <pc:sldMk cId="3928394977" sldId="395"/>
+        </pc:sldMkLst>
+        <pc:picChg chg="add del mod">
+          <ac:chgData name="Camilo Daleles Rennó" userId="eac9aab033b2f962" providerId="LiveId" clId="{435231E9-EFF7-4B35-A063-2CE70FCF688A}" dt="2025-06-09T12:41:56.159" v="10"/>
+          <ac:picMkLst>
+            <pc:docMk/>
+            <pc:sldMk cId="3928394977" sldId="395"/>
+            <ac:picMk id="14" creationId="{8C57CF06-4DC5-C092-4656-09B14D0198E3}"/>
+          </ac:picMkLst>
+        </pc:picChg>
+        <pc:picChg chg="add del mod ord">
+          <ac:chgData name="Camilo Daleles Rennó" userId="eac9aab033b2f962" providerId="LiveId" clId="{435231E9-EFF7-4B35-A063-2CE70FCF688A}" dt="2025-06-09T12:42:30.593" v="11"/>
+          <ac:picMkLst>
+            <pc:docMk/>
+            <pc:sldMk cId="3928394977" sldId="395"/>
+            <ac:picMk id="17" creationId="{17E7F14A-850A-1699-6B71-16D6DB4B93B3}"/>
+          </ac:picMkLst>
+        </pc:picChg>
+        <pc:picChg chg="add mod">
+          <ac:chgData name="Camilo Daleles Rennó" userId="eac9aab033b2f962" providerId="LiveId" clId="{435231E9-EFF7-4B35-A063-2CE70FCF688A}" dt="2025-06-09T12:42:30.593" v="11"/>
+          <ac:picMkLst>
+            <pc:docMk/>
+            <pc:sldMk cId="3928394977" sldId="395"/>
+            <ac:picMk id="18" creationId="{B4D12F94-1633-C5AD-54A8-5B22A2EF6E43}"/>
+          </ac:picMkLst>
+        </pc:picChg>
+      </pc:sldChg>
+    </pc:docChg>
+  </pc:docChgLst>
+  <pc:docChgLst>
+    <pc:chgData name="Camilo Daleles Rennó" userId="eac9aab033b2f962" providerId="LiveId" clId="{ADCD9CA3-E248-4E12-A9F9-5574C4A5A6AF}"/>
+    <pc:docChg chg="custSel modSld">
+      <pc:chgData name="Camilo Daleles Rennó" userId="eac9aab033b2f962" providerId="LiveId" clId="{ADCD9CA3-E248-4E12-A9F9-5574C4A5A6AF}" dt="2025-05-08T13:26:00.041" v="19"/>
+      <pc:docMkLst>
+        <pc:docMk/>
+      </pc:docMkLst>
+      <pc:sldChg chg="addSp delSp modSp mod">
+        <pc:chgData name="Camilo Daleles Rennó" userId="eac9aab033b2f962" providerId="LiveId" clId="{ADCD9CA3-E248-4E12-A9F9-5574C4A5A6AF}" dt="2025-05-08T13:26:00.041" v="19"/>
+        <pc:sldMkLst>
+          <pc:docMk/>
+          <pc:sldMk cId="0" sldId="345"/>
+        </pc:sldMkLst>
+        <pc:spChg chg="add mod">
+          <ac:chgData name="Camilo Daleles Rennó" userId="eac9aab033b2f962" providerId="LiveId" clId="{ADCD9CA3-E248-4E12-A9F9-5574C4A5A6AF}" dt="2025-05-08T13:26:00.041" v="19"/>
+          <ac:spMkLst>
+            <pc:docMk/>
+            <pc:sldMk cId="0" sldId="345"/>
+            <ac:spMk id="3" creationId="{E6E7F81D-312B-50C8-5DBB-78A2CB6ECA06}"/>
+          </ac:spMkLst>
+        </pc:spChg>
+        <pc:spChg chg="mod">
+          <ac:chgData name="Camilo Daleles Rennó" userId="eac9aab033b2f962" providerId="LiveId" clId="{ADCD9CA3-E248-4E12-A9F9-5574C4A5A6AF}" dt="2025-05-07T16:15:26.324" v="1" actId="20577"/>
+          <ac:spMkLst>
+            <pc:docMk/>
+            <pc:sldMk cId="0" sldId="345"/>
+            <ac:spMk id="3074" creationId="{00000000-0000-0000-0000-000000000000}"/>
+          </ac:spMkLst>
+        </pc:spChg>
+      </pc:sldChg>
+      <pc:sldChg chg="modSp mod">
+        <pc:chgData name="Camilo Daleles Rennó" userId="eac9aab033b2f962" providerId="LiveId" clId="{ADCD9CA3-E248-4E12-A9F9-5574C4A5A6AF}" dt="2025-05-08T13:07:07.410" v="15" actId="20577"/>
+        <pc:sldMkLst>
+          <pc:docMk/>
+          <pc:sldMk cId="33346296" sldId="374"/>
+        </pc:sldMkLst>
+        <pc:spChg chg="mod">
+          <ac:chgData name="Camilo Daleles Rennó" userId="eac9aab033b2f962" providerId="LiveId" clId="{ADCD9CA3-E248-4E12-A9F9-5574C4A5A6AF}" dt="2025-05-08T13:07:07.410" v="15" actId="20577"/>
+          <ac:spMkLst>
+            <pc:docMk/>
+            <pc:sldMk cId="33346296" sldId="374"/>
+            <ac:spMk id="5" creationId="{00000000-0000-0000-0000-000000000000}"/>
+          </ac:spMkLst>
+        </pc:spChg>
+      </pc:sldChg>
+      <pc:sldChg chg="modSp mod">
+        <pc:chgData name="Camilo Daleles Rennó" userId="eac9aab033b2f962" providerId="LiveId" clId="{ADCD9CA3-E248-4E12-A9F9-5574C4A5A6AF}" dt="2025-05-08T13:09:53.444" v="17" actId="732"/>
+        <pc:sldMkLst>
+          <pc:docMk/>
+          <pc:sldMk cId="2956632756" sldId="394"/>
+        </pc:sldMkLst>
+        <pc:spChg chg="mod">
+          <ac:chgData name="Camilo Daleles Rennó" userId="eac9aab033b2f962" providerId="LiveId" clId="{ADCD9CA3-E248-4E12-A9F9-5574C4A5A6AF}" dt="2025-05-08T13:09:36.502" v="16"/>
+          <ac:spMkLst>
+            <pc:docMk/>
+            <pc:sldMk cId="2956632756" sldId="394"/>
+            <ac:spMk id="2" creationId="{00000000-0000-0000-0000-000000000000}"/>
+          </ac:spMkLst>
+        </pc:spChg>
+        <pc:picChg chg="mod modCrop">
+          <ac:chgData name="Camilo Daleles Rennó" userId="eac9aab033b2f962" providerId="LiveId" clId="{ADCD9CA3-E248-4E12-A9F9-5574C4A5A6AF}" dt="2025-05-08T13:09:53.444" v="17" actId="732"/>
+          <ac:picMkLst>
+            <pc:docMk/>
+            <pc:sldMk cId="2956632756" sldId="394"/>
+            <ac:picMk id="4" creationId="{00000000-0000-0000-0000-000000000000}"/>
+          </ac:picMkLst>
+        </pc:picChg>
       </pc:sldChg>
     </pc:docChg>
   </pc:docChgLst>
@@ -233,14 +607,16 @@
           <a:bodyPr vert="horz" lIns="91440" tIns="45720" rIns="91440" bIns="45720" rtlCol="0"/>
           <a:lstStyle>
             <a:lvl1pPr algn="l">
-              <a:defRPr sz="1200"/>
+              <a:defRPr sz="1200">
+                <a:latin typeface="Tahoma" panose="020B0604030504040204" pitchFamily="34" charset="0"/>
+              </a:defRPr>
             </a:lvl1pPr>
           </a:lstStyle>
           <a:p>
             <a:pPr>
               <a:defRPr/>
             </a:pPr>
-            <a:endParaRPr lang="pt-BR"/>
+            <a:endParaRPr lang="pt-BR" dirty="0"/>
           </a:p>
         </p:txBody>
       </p:sp>
@@ -267,7 +643,9 @@
           <a:bodyPr vert="horz" lIns="91440" tIns="45720" rIns="91440" bIns="45720" rtlCol="0"/>
           <a:lstStyle>
             <a:lvl1pPr algn="r">
-              <a:defRPr sz="1200"/>
+              <a:defRPr sz="1200">
+                <a:latin typeface="Tahoma" panose="020B0604030504040204" pitchFamily="34" charset="0"/>
+              </a:defRPr>
             </a:lvl1pPr>
           </a:lstStyle>
           <a:p>
@@ -275,13 +653,13 @@
               <a:defRPr/>
             </a:pPr>
             <a:fld id="{13D13E68-3F65-4956-B623-CDA8FD0840EC}" type="datetimeFigureOut">
-              <a:rPr lang="pt-BR"/>
+              <a:rPr lang="pt-BR" smtClean="0"/>
               <a:pPr>
                 <a:defRPr/>
               </a:pPr>
-              <a:t>10/06/2024</a:t>
+              <a:t>09/06/2025</a:t>
             </a:fld>
-            <a:endParaRPr lang="pt-BR"/>
+            <a:endParaRPr lang="pt-BR" dirty="0"/>
           </a:p>
         </p:txBody>
       </p:sp>
@@ -401,14 +779,16 @@
           <a:bodyPr vert="horz" lIns="91440" tIns="45720" rIns="91440" bIns="45720" rtlCol="0" anchor="b"/>
           <a:lstStyle>
             <a:lvl1pPr algn="l">
-              <a:defRPr sz="1200"/>
+              <a:defRPr sz="1200">
+                <a:latin typeface="Tahoma" panose="020B0604030504040204" pitchFamily="34" charset="0"/>
+              </a:defRPr>
             </a:lvl1pPr>
           </a:lstStyle>
           <a:p>
             <a:pPr>
               <a:defRPr/>
             </a:pPr>
-            <a:endParaRPr lang="pt-BR"/>
+            <a:endParaRPr lang="pt-BR" dirty="0"/>
           </a:p>
         </p:txBody>
       </p:sp>
@@ -435,7 +815,9 @@
           <a:bodyPr vert="horz" lIns="91440" tIns="45720" rIns="91440" bIns="45720" rtlCol="0" anchor="b"/>
           <a:lstStyle>
             <a:lvl1pPr algn="r">
-              <a:defRPr sz="1200"/>
+              <a:defRPr sz="1200">
+                <a:latin typeface="Tahoma" panose="020B0604030504040204" pitchFamily="34" charset="0"/>
+              </a:defRPr>
             </a:lvl1pPr>
           </a:lstStyle>
           <a:p>
@@ -443,20 +825,20 @@
               <a:defRPr/>
             </a:pPr>
             <a:fld id="{B282321D-B8BF-4AD2-B522-67950E411EA1}" type="slidenum">
-              <a:rPr lang="pt-BR"/>
+              <a:rPr lang="pt-BR" smtClean="0"/>
               <a:pPr>
                 <a:defRPr/>
               </a:pPr>
               <a:t>‹nº›</a:t>
             </a:fld>
-            <a:endParaRPr lang="pt-BR"/>
+            <a:endParaRPr lang="pt-BR" dirty="0"/>
           </a:p>
         </p:txBody>
       </p:sp>
     </p:spTree>
     <p:extLst>
       <p:ext uri="{BB962C8B-B14F-4D97-AF65-F5344CB8AC3E}">
-        <p14:creationId xmlns:p14="http://schemas.microsoft.com/office/powerpoint/2010/main" xmlns="" val="3225646320"/>
+        <p14:creationId xmlns:p14="http://schemas.microsoft.com/office/powerpoint/2010/main" val="3225646320"/>
       </p:ext>
     </p:extLst>
   </p:cSld>
@@ -788,7 +1170,7 @@
     </p:spTree>
     <p:extLst>
       <p:ext uri="{BB962C8B-B14F-4D97-AF65-F5344CB8AC3E}">
-        <p14:creationId xmlns:p14="http://schemas.microsoft.com/office/powerpoint/2010/main" xmlns="" val="1516119936"/>
+        <p14:creationId xmlns:p14="http://schemas.microsoft.com/office/powerpoint/2010/main" val="1516119936"/>
       </p:ext>
     </p:extLst>
   </p:cSld>
@@ -982,7 +1364,7 @@
     </p:spTree>
     <p:extLst>
       <p:ext uri="{BB962C8B-B14F-4D97-AF65-F5344CB8AC3E}">
-        <p14:creationId xmlns:p14="http://schemas.microsoft.com/office/powerpoint/2010/main" xmlns="" val="2453503632"/>
+        <p14:creationId xmlns:p14="http://schemas.microsoft.com/office/powerpoint/2010/main" val="2453503632"/>
       </p:ext>
     </p:extLst>
   </p:cSld>
@@ -1186,7 +1568,7 @@
     </p:spTree>
     <p:extLst>
       <p:ext uri="{BB962C8B-B14F-4D97-AF65-F5344CB8AC3E}">
-        <p14:creationId xmlns:p14="http://schemas.microsoft.com/office/powerpoint/2010/main" xmlns="" val="339148733"/>
+        <p14:creationId xmlns:p14="http://schemas.microsoft.com/office/powerpoint/2010/main" val="339148733"/>
       </p:ext>
     </p:extLst>
   </p:cSld>
@@ -1359,7 +1741,7 @@
           <a:lstStyle>
             <a:lvl1pPr>
               <a:defRPr>
-                <a:latin typeface="+mn-lt"/>
+                <a:latin typeface="Tahoma" panose="020B0604030504040204" pitchFamily="34" charset="0"/>
               </a:defRPr>
             </a:lvl1pPr>
           </a:lstStyle>
@@ -1368,20 +1750,20 @@
               <a:defRPr/>
             </a:pPr>
             <a:fld id="{B75E3667-2AED-4289-B46A-D8A255B210A4}" type="slidenum">
-              <a:rPr lang="pt-BR"/>
+              <a:rPr lang="pt-BR" smtClean="0"/>
               <a:pPr>
                 <a:defRPr/>
               </a:pPr>
               <a:t>‹nº›</a:t>
             </a:fld>
-            <a:endParaRPr lang="pt-BR"/>
+            <a:endParaRPr lang="pt-BR" dirty="0"/>
           </a:p>
         </p:txBody>
       </p:sp>
     </p:spTree>
     <p:extLst>
       <p:ext uri="{BB962C8B-B14F-4D97-AF65-F5344CB8AC3E}">
-        <p14:creationId xmlns:p14="http://schemas.microsoft.com/office/powerpoint/2010/main" xmlns="" val="1275309938"/>
+        <p14:creationId xmlns:p14="http://schemas.microsoft.com/office/powerpoint/2010/main" val="1275309938"/>
       </p:ext>
     </p:extLst>
   </p:cSld>
@@ -1598,7 +1980,7 @@
     </p:spTree>
     <p:extLst>
       <p:ext uri="{BB962C8B-B14F-4D97-AF65-F5344CB8AC3E}">
-        <p14:creationId xmlns:p14="http://schemas.microsoft.com/office/powerpoint/2010/main" xmlns="" val="3797247720"/>
+        <p14:creationId xmlns:p14="http://schemas.microsoft.com/office/powerpoint/2010/main" val="3797247720"/>
       </p:ext>
     </p:extLst>
   </p:cSld>
@@ -1909,7 +2291,7 @@
     </p:spTree>
     <p:extLst>
       <p:ext uri="{BB962C8B-B14F-4D97-AF65-F5344CB8AC3E}">
-        <p14:creationId xmlns:p14="http://schemas.microsoft.com/office/powerpoint/2010/main" xmlns="" val="27053219"/>
+        <p14:creationId xmlns:p14="http://schemas.microsoft.com/office/powerpoint/2010/main" val="27053219"/>
       </p:ext>
     </p:extLst>
   </p:cSld>
@@ -2359,7 +2741,7 @@
     </p:spTree>
     <p:extLst>
       <p:ext uri="{BB962C8B-B14F-4D97-AF65-F5344CB8AC3E}">
-        <p14:creationId xmlns:p14="http://schemas.microsoft.com/office/powerpoint/2010/main" xmlns="" val="60448209"/>
+        <p14:creationId xmlns:p14="http://schemas.microsoft.com/office/powerpoint/2010/main" val="60448209"/>
       </p:ext>
     </p:extLst>
   </p:cSld>
@@ -2502,7 +2884,7 @@
     </p:spTree>
     <p:extLst>
       <p:ext uri="{BB962C8B-B14F-4D97-AF65-F5344CB8AC3E}">
-        <p14:creationId xmlns:p14="http://schemas.microsoft.com/office/powerpoint/2010/main" xmlns="" val="488974523"/>
+        <p14:creationId xmlns:p14="http://schemas.microsoft.com/office/powerpoint/2010/main" val="488974523"/>
       </p:ext>
     </p:extLst>
   </p:cSld>
@@ -2623,7 +3005,7 @@
     </p:spTree>
     <p:extLst>
       <p:ext uri="{BB962C8B-B14F-4D97-AF65-F5344CB8AC3E}">
-        <p14:creationId xmlns:p14="http://schemas.microsoft.com/office/powerpoint/2010/main" xmlns="" val="1571094633"/>
+        <p14:creationId xmlns:p14="http://schemas.microsoft.com/office/powerpoint/2010/main" val="1571094633"/>
       </p:ext>
     </p:extLst>
   </p:cSld>
@@ -2924,7 +3306,7 @@
     </p:spTree>
     <p:extLst>
       <p:ext uri="{BB962C8B-B14F-4D97-AF65-F5344CB8AC3E}">
-        <p14:creationId xmlns:p14="http://schemas.microsoft.com/office/powerpoint/2010/main" xmlns="" val="3920368891"/>
+        <p14:creationId xmlns:p14="http://schemas.microsoft.com/office/powerpoint/2010/main" val="3920368891"/>
       </p:ext>
     </p:extLst>
   </p:cSld>
@@ -3203,7 +3585,7 @@
     </p:spTree>
     <p:extLst>
       <p:ext uri="{BB962C8B-B14F-4D97-AF65-F5344CB8AC3E}">
-        <p14:creationId xmlns:p14="http://schemas.microsoft.com/office/powerpoint/2010/main" xmlns="" val="1341253695"/>
+        <p14:creationId xmlns:p14="http://schemas.microsoft.com/office/powerpoint/2010/main" val="1341253695"/>
       </p:ext>
     </p:extLst>
   </p:cSld>
@@ -3275,7 +3657,7 @@
           <a:p>
             <a:pPr lvl="0"/>
             <a:r>
-              <a:rPr lang="pt-BR"/>
+              <a:rPr lang="pt-BR" dirty="0"/>
               <a:t>Clique para editar o estilo do título mestre</a:t>
             </a:r>
           </a:p>
@@ -3305,14 +3687,14 @@
           </a:ln>
           <a:extLst>
             <a:ext uri="{909E8E84-426E-40DD-AFC4-6F175D3DCCD1}">
-              <a14:hiddenFill xmlns:a14="http://schemas.microsoft.com/office/drawing/2010/main" xmlns="">
+              <a14:hiddenFill xmlns:a14="http://schemas.microsoft.com/office/drawing/2010/main">
                 <a:solidFill>
                   <a:srgbClr val="FFFFFF"/>
                 </a:solidFill>
               </a14:hiddenFill>
             </a:ext>
             <a:ext uri="{91240B29-F687-4F45-9708-019B960494DF}">
-              <a14:hiddenLine xmlns:a14="http://schemas.microsoft.com/office/drawing/2010/main" xmlns="" w="9525">
+              <a14:hiddenLine xmlns:a14="http://schemas.microsoft.com/office/drawing/2010/main" w="9525">
                 <a:solidFill>
                   <a:srgbClr val="000000"/>
                 </a:solidFill>
@@ -3333,35 +3715,35 @@
           <a:p>
             <a:pPr lvl="0"/>
             <a:r>
-              <a:rPr lang="pt-BR" altLang="pt-BR"/>
+              <a:rPr lang="pt-BR" altLang="pt-BR" dirty="0"/>
               <a:t>Clique para editar os estilos do texto mestre</a:t>
             </a:r>
           </a:p>
           <a:p>
             <a:pPr lvl="1"/>
             <a:r>
-              <a:rPr lang="pt-BR" altLang="pt-BR"/>
+              <a:rPr lang="pt-BR" altLang="pt-BR" dirty="0"/>
               <a:t>Segundo nível</a:t>
             </a:r>
           </a:p>
           <a:p>
             <a:pPr lvl="2"/>
             <a:r>
-              <a:rPr lang="pt-BR" altLang="pt-BR"/>
+              <a:rPr lang="pt-BR" altLang="pt-BR" dirty="0"/>
               <a:t>Terceiro nível</a:t>
             </a:r>
           </a:p>
           <a:p>
             <a:pPr lvl="3"/>
             <a:r>
-              <a:rPr lang="pt-BR" altLang="pt-BR"/>
+              <a:rPr lang="pt-BR" altLang="pt-BR" dirty="0"/>
               <a:t>Quarto nível</a:t>
             </a:r>
           </a:p>
           <a:p>
             <a:pPr lvl="4"/>
             <a:r>
-              <a:rPr lang="pt-BR" altLang="pt-BR"/>
+              <a:rPr lang="pt-BR" altLang="pt-BR" dirty="0"/>
               <a:t>Quinto nível</a:t>
             </a:r>
           </a:p>
@@ -3574,7 +3956,8 @@
             <a:pPr>
               <a:defRPr/>
             </a:pPr>
-            <a:endParaRPr lang="pt-BR">
+            <a:endParaRPr lang="pt-BR" dirty="0">
+              <a:latin typeface="Tahoma" panose="020B0604030504040204" pitchFamily="34" charset="0"/>
               <a:cs typeface="+mn-cs"/>
             </a:endParaRPr>
           </a:p>
@@ -3615,7 +3998,7 @@
               <a:srgbClr val="C0C0C0"/>
             </a:outerShdw>
           </a:effectLst>
-          <a:latin typeface="+mj-lt"/>
+          <a:latin typeface="Tahoma" panose="020B0604030504040204" pitchFamily="34" charset="0"/>
           <a:ea typeface="+mj-ea"/>
           <a:cs typeface="+mj-cs"/>
         </a:defRPr>
@@ -3786,7 +4169,7 @@
           <a:solidFill>
             <a:schemeClr val="tx1"/>
           </a:solidFill>
-          <a:latin typeface="+mn-lt"/>
+          <a:latin typeface="Tahoma" panose="020B0604030504040204" pitchFamily="34" charset="0"/>
           <a:ea typeface="+mn-ea"/>
           <a:cs typeface="+mn-cs"/>
         </a:defRPr>
@@ -3803,7 +4186,7 @@
           <a:solidFill>
             <a:schemeClr val="tx1"/>
           </a:solidFill>
-          <a:latin typeface="+mn-lt"/>
+          <a:latin typeface="Tahoma" panose="020B0604030504040204" pitchFamily="34" charset="0"/>
         </a:defRPr>
       </a:lvl2pPr>
       <a:lvl3pPr marL="1143000" indent="-228600" algn="l" rtl="0" eaLnBrk="0" fontAlgn="base" hangingPunct="0">
@@ -3818,7 +4201,7 @@
           <a:solidFill>
             <a:schemeClr val="tx1"/>
           </a:solidFill>
-          <a:latin typeface="+mn-lt"/>
+          <a:latin typeface="Tahoma" panose="020B0604030504040204" pitchFamily="34" charset="0"/>
         </a:defRPr>
       </a:lvl3pPr>
       <a:lvl4pPr marL="1600200" indent="-228600" algn="l" rtl="0" eaLnBrk="0" fontAlgn="base" hangingPunct="0">
@@ -3833,7 +4216,7 @@
           <a:solidFill>
             <a:schemeClr val="tx1"/>
           </a:solidFill>
-          <a:latin typeface="+mn-lt"/>
+          <a:latin typeface="Tahoma" panose="020B0604030504040204" pitchFamily="34" charset="0"/>
         </a:defRPr>
       </a:lvl4pPr>
       <a:lvl5pPr marL="2057400" indent="-228600" algn="l" rtl="0" eaLnBrk="0" fontAlgn="base" hangingPunct="0">
@@ -3848,7 +4231,7 @@
           <a:solidFill>
             <a:schemeClr val="tx1"/>
           </a:solidFill>
-          <a:latin typeface="+mn-lt"/>
+          <a:latin typeface="Tahoma" panose="020B0604030504040204" pitchFamily="34" charset="0"/>
         </a:defRPr>
       </a:lvl5pPr>
       <a:lvl6pPr marL="2514600" indent="-228600" algn="l" rtl="0" fontAlgn="base">
@@ -4058,32 +4441,16 @@
             <a:br>
               <a:rPr lang="pt-BR" sz="2400" dirty="0"/>
             </a:br>
-            <a:r>
-              <a:rPr lang="pt-BR" sz="2400" dirty="0"/>
-              <a:t/>
-            </a:r>
             <a:br>
               <a:rPr lang="pt-BR" sz="2400" dirty="0"/>
             </a:br>
             <a:r>
               <a:rPr lang="pt-BR" sz="2400" dirty="0"/>
-              <a:t>SER 204 - </a:t>
-            </a:r>
-            <a:r>
-              <a:rPr lang="pt-BR" sz="2400"/>
-              <a:t>ANO  2024</a:t>
-            </a:r>
-            <a:r>
-              <a:rPr lang="pt-BR" sz="2400" dirty="0"/>
-              <a:t/>
+              <a:t>SER 204</a:t>
             </a:r>
             <a:br>
               <a:rPr lang="pt-BR" sz="2400" dirty="0"/>
             </a:br>
-            <a:r>
-              <a:rPr lang="pt-BR" sz="2400" dirty="0"/>
-              <a:t/>
-            </a:r>
             <a:br>
               <a:rPr lang="pt-BR" sz="2400" dirty="0"/>
             </a:br>
@@ -4096,7 +4463,13 @@
       </p:sp>
       <p:sp>
         <p:nvSpPr>
-          <p:cNvPr id="3" name="Rectangle 3"/>
+          <p:cNvPr id="3" name="Rectangle 3">
+            <a:extLst>
+              <a:ext uri="{FF2B5EF4-FFF2-40B4-BE49-F238E27FC236}">
+                <a16:creationId xmlns:a16="http://schemas.microsoft.com/office/drawing/2014/main" id="{E6E7F81D-312B-50C8-5DBB-78A2CB6ECA06}"/>
+              </a:ext>
+            </a:extLst>
+          </p:cNvPr>
           <p:cNvSpPr txBox="1">
             <a:spLocks noChangeArrowheads="1"/>
           </p:cNvSpPr>
@@ -4104,8 +4477,8 @@
         </p:nvSpPr>
         <p:spPr bwMode="auto">
           <a:xfrm>
-            <a:off x="5500688" y="5903913"/>
-            <a:ext cx="3414712" cy="838200"/>
+            <a:off x="4427984" y="5903913"/>
+            <a:ext cx="4487416" cy="838200"/>
           </a:xfrm>
           <a:prstGeom prst="rect">
             <a:avLst/>
@@ -4133,34 +4506,34 @@
             </a:pPr>
             <a:r>
               <a:rPr lang="pt-BR" sz="1800" kern="0" dirty="0">
-                <a:latin typeface="+mn-lt"/>
+                <a:latin typeface="Tahoma" panose="020B0604030504040204" pitchFamily="34" charset="0"/>
                 <a:cs typeface="+mn-cs"/>
               </a:rPr>
               <a:t>Camilo </a:t>
             </a:r>
             <a:r>
               <a:rPr lang="pt-BR" sz="1800" kern="0" dirty="0" err="1">
-                <a:latin typeface="+mn-lt"/>
+                <a:latin typeface="Tahoma" panose="020B0604030504040204" pitchFamily="34" charset="0"/>
                 <a:cs typeface="+mn-cs"/>
               </a:rPr>
               <a:t>Daleles</a:t>
             </a:r>
             <a:r>
               <a:rPr lang="pt-BR" sz="1800" kern="0" dirty="0">
-                <a:latin typeface="+mn-lt"/>
+                <a:latin typeface="Tahoma" panose="020B0604030504040204" pitchFamily="34" charset="0"/>
                 <a:cs typeface="+mn-cs"/>
               </a:rPr>
               <a:t> </a:t>
             </a:r>
             <a:r>
               <a:rPr lang="pt-BR" sz="1800" kern="0" dirty="0" err="1">
-                <a:latin typeface="+mn-lt"/>
+                <a:latin typeface="Tahoma" panose="020B0604030504040204" pitchFamily="34" charset="0"/>
                 <a:cs typeface="+mn-cs"/>
               </a:rPr>
               <a:t>Rennó</a:t>
             </a:r>
             <a:endParaRPr lang="pt-BR" sz="1800" kern="0" dirty="0">
-              <a:latin typeface="+mn-lt"/>
+              <a:latin typeface="Tahoma" panose="020B0604030504040204" pitchFamily="34" charset="0"/>
               <a:cs typeface="+mn-cs"/>
             </a:endParaRPr>
           </a:p>
@@ -4177,7 +4550,6 @@
             <a:r>
               <a:rPr lang="pt-BR" sz="1200" kern="0" dirty="0">
                 <a:latin typeface="Arial Unicode MS" pitchFamily="34" charset="-128"/>
-                <a:cs typeface="+mn-cs"/>
               </a:rPr>
               <a:t>camilo.renno@inpe.br</a:t>
             </a:r>
@@ -4195,18 +4567,380 @@
             <a:r>
               <a:rPr lang="pt-BR" sz="1200" kern="0" dirty="0">
                 <a:latin typeface="Arial Unicode MS" pitchFamily="34" charset="-128"/>
-                <a:cs typeface="+mn-cs"/>
               </a:rPr>
-              <a:t>http://www.dpi.inpe.br/~camilo/estatistica/</a:t>
-            </a:r>
+              <a:t>acesso do conteúdo do curso em </a:t>
+            </a:r>
+            <a:r>
+              <a:rPr lang="pt-BR" sz="1200" kern="0" dirty="0" err="1">
+                <a:solidFill>
+                  <a:schemeClr val="accent2"/>
+                </a:solidFill>
+                <a:latin typeface="Arial Unicode MS" pitchFamily="34" charset="-128"/>
+                <a:hlinkClick r:id="rId4">
+                  <a:extLst>
+                    <a:ext uri="{A12FA001-AC4F-418D-AE19-62706E023703}">
+                      <ahyp:hlinkClr xmlns:ahyp="http://schemas.microsoft.com/office/drawing/2018/hyperlinkcolor" val="tx"/>
+                    </a:ext>
+                  </a:extLst>
+                </a:hlinkClick>
+              </a:rPr>
+              <a:t>Bibdigital</a:t>
+            </a:r>
+            <a:r>
+              <a:rPr lang="pt-BR" sz="1200" kern="0" dirty="0">
+                <a:solidFill>
+                  <a:schemeClr val="accent2"/>
+                </a:solidFill>
+                <a:latin typeface="Arial Unicode MS" pitchFamily="34" charset="-128"/>
+                <a:hlinkClick r:id="rId4">
+                  <a:extLst>
+                    <a:ext uri="{A12FA001-AC4F-418D-AE19-62706E023703}">
+                      <ahyp:hlinkClr xmlns:ahyp="http://schemas.microsoft.com/office/drawing/2018/hyperlinkcolor" val="tx"/>
+                    </a:ext>
+                  </a:extLst>
+                </a:hlinkClick>
+              </a:rPr>
+              <a:t> do INPE</a:t>
+            </a:r>
+            <a:r>
+              <a:rPr lang="pt-BR" sz="1200" kern="0" dirty="0">
+                <a:latin typeface="Arial Unicode MS" pitchFamily="34" charset="-128"/>
+              </a:rPr>
+              <a:t> ou </a:t>
+            </a:r>
+            <a:r>
+              <a:rPr lang="pt-BR" sz="1200" kern="0" dirty="0">
+                <a:solidFill>
+                  <a:schemeClr val="accent2"/>
+                </a:solidFill>
+                <a:latin typeface="Arial Unicode MS" pitchFamily="34" charset="-128"/>
+                <a:hlinkClick r:id="rId5">
+                  <a:extLst>
+                    <a:ext uri="{A12FA001-AC4F-418D-AE19-62706E023703}">
+                      <ahyp:hlinkClr xmlns:ahyp="http://schemas.microsoft.com/office/drawing/2018/hyperlinkcolor" val="tx"/>
+                    </a:ext>
+                  </a:extLst>
+                </a:hlinkClick>
+              </a:rPr>
+              <a:t>GitHub</a:t>
+            </a:r>
+            <a:endParaRPr lang="pt-BR" sz="1200" kern="0" dirty="0">
+              <a:solidFill>
+                <a:schemeClr val="accent2"/>
+              </a:solidFill>
+              <a:latin typeface="Arial Unicode MS" pitchFamily="34" charset="-128"/>
+            </a:endParaRPr>
           </a:p>
         </p:txBody>
       </p:sp>
+      <p:pic>
+        <p:nvPicPr>
+          <p:cNvPr id="11" name="Áudio 10">
+            <a:hlinkClick r:id="" action="ppaction://media"/>
+            <a:extLst>
+              <a:ext uri="{FF2B5EF4-FFF2-40B4-BE49-F238E27FC236}">
+                <a16:creationId xmlns:a16="http://schemas.microsoft.com/office/drawing/2014/main" id="{7BC73855-528A-64EC-1889-FC03BB10769B}"/>
+              </a:ext>
+            </a:extLst>
+          </p:cNvPr>
+          <p:cNvPicPr>
+            <a:picLocks noChangeAspect="1"/>
+          </p:cNvPicPr>
+          <p:nvPr>
+            <a:audioFile r:link="rId2"/>
+            <p:extLst>
+              <p:ext uri="{DAA4B4D4-6D71-4841-9C94-3DE7FCFB9230}">
+                <p14:media xmlns:p14="http://schemas.microsoft.com/office/powerpoint/2010/main" r:embed="rId1"/>
+              </p:ext>
+            </p:extLst>
+          </p:nvPr>
+        </p:nvPicPr>
+        <p:blipFill>
+          <a:blip r:embed="rId6"/>
+          <a:srcRect l="-118750" t="-118750" r="-118750" b="-118750"/>
+          <a:stretch>
+            <a:fillRect/>
+          </a:stretch>
+        </p:blipFill>
+        <p:spPr>
+          <a:xfrm>
+            <a:off x="7004304" y="4718304"/>
+            <a:ext cx="2057400" cy="2057400"/>
+          </a:xfrm>
+          <a:prstGeom prst="ellipse">
+            <a:avLst/>
+          </a:prstGeom>
+        </p:spPr>
+      </p:pic>
     </p:spTree>
   </p:cSld>
   <p:clrMapOvr>
     <a:masterClrMapping/>
   </p:clrMapOvr>
+  <mc:AlternateContent xmlns:mc="http://schemas.openxmlformats.org/markup-compatibility/2006">
+    <mc:Choice xmlns:p14="http://schemas.microsoft.com/office/powerpoint/2010/main" Requires="p14">
+      <p:transition spd="slow" p14:dur="2000" advTm="14414"/>
+    </mc:Choice>
+    <mc:Fallback>
+      <p:transition spd="slow" advTm="14414"/>
+    </mc:Fallback>
+  </mc:AlternateContent>
+  <p:timing>
+    <p:tnLst>
+      <p:par>
+        <p:cTn id="1" dur="indefinite" restart="never" nodeType="tmRoot">
+          <p:childTnLst>
+            <p:seq concurrent="1" nextAc="seek">
+              <p:cTn id="2" dur="indefinite" nodeType="mainSeq">
+                <p:childTnLst>
+                  <p:par>
+                    <p:cTn id="3" fill="hold">
+                      <p:stCondLst>
+                        <p:cond delay="indefinite"/>
+                        <p:cond evt="onBegin" delay="0">
+                          <p:tn val="2"/>
+                        </p:cond>
+                      </p:stCondLst>
+                      <p:childTnLst>
+                        <p:par>
+                          <p:cTn id="4" fill="hold">
+                            <p:stCondLst>
+                              <p:cond delay="0"/>
+                            </p:stCondLst>
+                            <p:childTnLst>
+                              <p:par>
+                                <p:cTn id="5" presetID="1" presetClass="mediacall" presetSubtype="0" fill="hold" nodeType="afterEffect">
+                                  <p:stCondLst>
+                                    <p:cond delay="0"/>
+                                  </p:stCondLst>
+                                  <p:childTnLst>
+                                    <p:cmd type="call" cmd="playFrom(0.0)">
+                                      <p:cBhvr>
+                                        <p:cTn id="6" dur="1" fill="hold"/>
+                                        <p:tgtEl>
+                                          <p:spTgt spid="11"/>
+                                        </p:tgtEl>
+                                      </p:cBhvr>
+                                    </p:cmd>
+                                  </p:childTnLst>
+                                </p:cTn>
+                              </p:par>
+                            </p:childTnLst>
+                          </p:cTn>
+                        </p:par>
+                      </p:childTnLst>
+                    </p:cTn>
+                  </p:par>
+                </p:childTnLst>
+              </p:cTn>
+              <p:prevCondLst>
+                <p:cond evt="onPrev" delay="0">
+                  <p:tgtEl>
+                    <p:sldTgt/>
+                  </p:tgtEl>
+                </p:cond>
+              </p:prevCondLst>
+              <p:nextCondLst>
+                <p:cond evt="onNext" delay="0">
+                  <p:tgtEl>
+                    <p:sldTgt/>
+                  </p:tgtEl>
+                </p:cond>
+              </p:nextCondLst>
+            </p:seq>
+            <p:audio isNarration="1">
+              <p:cMediaNode vol="80000" showWhenStopped="0">
+                <p:cTn id="7" fill="hold" display="0">
+                  <p:stCondLst>
+                    <p:cond delay="indefinite"/>
+                  </p:stCondLst>
+                  <p:endCondLst>
+                    <p:cond evt="onStopAudio" delay="0">
+                      <p:tgtEl>
+                        <p:sldTgt/>
+                      </p:tgtEl>
+                    </p:cond>
+                  </p:endCondLst>
+                </p:cTn>
+                <p:tgtEl>
+                  <p:spTgt spid="11"/>
+                </p:tgtEl>
+              </p:cMediaNode>
+            </p:audio>
+          </p:childTnLst>
+        </p:cTn>
+      </p:par>
+    </p:tnLst>
+  </p:timing>
+  <p:extLst>
+    <p:ext uri="{3A86A75C-4F4B-4683-9AE1-C65F6400EC91}">
+      <p14:laserTraceLst xmlns:p14="http://schemas.microsoft.com/office/powerpoint/2010/main">
+        <p14:tracePtLst>
+          <p14:tracePt t="9776" x="3473450" y="6573838"/>
+          <p14:tracePt t="9782" x="3563938" y="6345238"/>
+          <p14:tracePt t="9798" x="3694113" y="5775325"/>
+          <p14:tracePt t="9815" x="3749675" y="5084763"/>
+          <p14:tracePt t="9831" x="3856038" y="4392613"/>
+          <p14:tracePt t="9848" x="3970338" y="3790950"/>
+          <p14:tracePt t="9865" x="4132263" y="3335338"/>
+          <p14:tracePt t="9882" x="4344988" y="3140075"/>
+          <p14:tracePt t="9899" x="4652963" y="3001963"/>
+          <p14:tracePt t="9915" x="5011738" y="2952750"/>
+          <p14:tracePt t="9931" x="5394325" y="2968625"/>
+          <p14:tracePt t="9950" x="5970588" y="3074988"/>
+          <p14:tracePt t="9965" x="6191250" y="3148013"/>
+          <p14:tracePt t="9982" x="6321425" y="3205163"/>
+          <p14:tracePt t="9998" x="6378575" y="3246438"/>
+          <p14:tracePt t="10015" x="6402388" y="3270250"/>
+          <p14:tracePt t="10031" x="6410325" y="3294063"/>
+          <p14:tracePt t="10048" x="6410325" y="3303588"/>
+          <p14:tracePt t="10065" x="6353175" y="3319463"/>
+          <p14:tracePt t="10081" x="6191250" y="3327400"/>
+          <p14:tracePt t="10098" x="5954713" y="3327400"/>
+          <p14:tracePt t="10115" x="5662613" y="3327400"/>
+          <p14:tracePt t="10132" x="5483225" y="3319463"/>
+          <p14:tracePt t="10133" x="5441950" y="3311525"/>
+          <p14:tracePt t="10149" x="5384800" y="3311525"/>
+          <p14:tracePt t="10165" x="5295900" y="3319463"/>
+          <p14:tracePt t="10182" x="5165725" y="3408363"/>
+          <p14:tracePt t="10198" x="5027613" y="3619500"/>
+          <p14:tracePt t="10215" x="4962525" y="3986213"/>
+          <p14:tracePt t="10231" x="4994275" y="4303713"/>
+          <p14:tracePt t="10248" x="5133975" y="4522788"/>
+          <p14:tracePt t="10265" x="5303838" y="4629150"/>
+          <p14:tracePt t="10282" x="5483225" y="4645025"/>
+          <p14:tracePt t="10298" x="5719763" y="4530725"/>
+          <p14:tracePt t="10315" x="5954713" y="4214813"/>
+          <p14:tracePt t="10332" x="6003925" y="3840163"/>
+          <p14:tracePt t="10333" x="5954713" y="3603625"/>
+          <p14:tracePt t="10350" x="5702300" y="3189288"/>
+          <p14:tracePt t="10365" x="5491163" y="3009900"/>
+          <p14:tracePt t="10382" x="5345113" y="2944813"/>
+          <p14:tracePt t="10398" x="5149850" y="2944813"/>
+          <p14:tracePt t="10415" x="4897438" y="3082925"/>
+          <p14:tracePt t="10431" x="4686300" y="3343275"/>
+          <p14:tracePt t="10448" x="4491038" y="3684588"/>
+          <p14:tracePt t="10465" x="4441825" y="3897313"/>
+          <p14:tracePt t="10482" x="4457700" y="4043363"/>
+          <p14:tracePt t="10499" x="4548188" y="4116388"/>
+          <p14:tracePt t="10515" x="4759325" y="4132263"/>
+          <p14:tracePt t="10532" x="5141913" y="4010025"/>
+          <p14:tracePt t="10533" x="5368925" y="3897313"/>
+          <p14:tracePt t="10550" x="5727700" y="3660775"/>
+          <p14:tracePt t="10565" x="5824538" y="3465513"/>
+          <p14:tracePt t="10582" x="5767388" y="3327400"/>
+          <p14:tracePt t="10598" x="5589588" y="3246438"/>
+          <p14:tracePt t="10615" x="5272088" y="3221038"/>
+          <p14:tracePt t="10631" x="4994275" y="3228975"/>
+          <p14:tracePt t="10648" x="4929188" y="3270250"/>
+          <p14:tracePt t="10665" x="4832350" y="3376613"/>
+          <p14:tracePt t="10681" x="4808538" y="3473450"/>
+          <p14:tracePt t="10698" x="4840288" y="3579813"/>
+          <p14:tracePt t="10715" x="5003800" y="3668713"/>
+          <p14:tracePt t="10732" x="5353050" y="3749675"/>
+          <p14:tracePt t="10733" x="5605463" y="3759200"/>
+          <p14:tracePt t="10749" x="6061075" y="3733800"/>
+          <p14:tracePt t="10765" x="6280150" y="3676650"/>
+          <p14:tracePt t="10781" x="6321425" y="3644900"/>
+          <p14:tracePt t="10798" x="6264275" y="3603625"/>
+          <p14:tracePt t="10814" x="6061075" y="3571875"/>
+          <p14:tracePt t="10831" x="5816600" y="3579813"/>
+          <p14:tracePt t="10848" x="5629275" y="3619500"/>
+          <p14:tracePt t="10865" x="5524500" y="3668713"/>
+          <p14:tracePt t="10881" x="5483225" y="3725863"/>
+          <p14:tracePt t="10898" x="5491163" y="3783013"/>
+          <p14:tracePt t="10915" x="5605463" y="3889375"/>
+          <p14:tracePt t="10931" x="5832475" y="3962400"/>
+          <p14:tracePt t="10949" x="6370638" y="4067175"/>
+          <p14:tracePt t="10965" x="6646863" y="4100513"/>
+          <p14:tracePt t="10981" x="6743700" y="4108450"/>
+          <p14:tracePt t="10998" x="6769100" y="4116388"/>
+          <p14:tracePt t="11015" x="6784975" y="4116388"/>
+          <p14:tracePt t="11031" x="6800850" y="4132263"/>
+          <p14:tracePt t="11048" x="6826250" y="4157663"/>
+          <p14:tracePt t="11065" x="6850063" y="4165600"/>
+          <p14:tracePt t="11082" x="6907213" y="4181475"/>
+          <p14:tracePt t="11098" x="6954838" y="4197350"/>
+          <p14:tracePt t="11115" x="7011988" y="4214813"/>
+          <p14:tracePt t="11132" x="7061200" y="4214813"/>
+          <p14:tracePt t="11133" x="7085013" y="4214813"/>
+          <p14:tracePt t="11149" x="7134225" y="4222750"/>
+          <p14:tracePt t="11165" x="7159625" y="4222750"/>
+          <p14:tracePt t="11181" x="7183438" y="4222750"/>
+          <p14:tracePt t="11198" x="7199313" y="4222750"/>
+          <p14:tracePt t="11221" x="7199313" y="4230688"/>
+          <p14:tracePt t="11232" x="7167563" y="4246563"/>
+          <p14:tracePt t="11248" x="7029450" y="4295775"/>
+          <p14:tracePt t="11265" x="6850063" y="4368800"/>
+          <p14:tracePt t="11282" x="6670675" y="4441825"/>
+          <p14:tracePt t="11298" x="6540500" y="4491038"/>
+          <p14:tracePt t="11315" x="6451600" y="4514850"/>
+          <p14:tracePt t="11332" x="6394450" y="4514850"/>
+          <p14:tracePt t="11333" x="6378575" y="4506913"/>
+          <p14:tracePt t="11350" x="6321425" y="4433888"/>
+          <p14:tracePt t="11365" x="6215063" y="4279900"/>
+          <p14:tracePt t="11381" x="6069013" y="4043363"/>
+          <p14:tracePt t="11398" x="6011863" y="3832225"/>
+          <p14:tracePt t="11415" x="6019800" y="3684588"/>
+          <p14:tracePt t="11431" x="6134100" y="3603625"/>
+          <p14:tracePt t="11448" x="6321425" y="3563938"/>
+          <p14:tracePt t="11465" x="6686550" y="3611563"/>
+          <p14:tracePt t="11481" x="7232650" y="3832225"/>
+          <p14:tracePt t="11498" x="7639050" y="4051300"/>
+          <p14:tracePt t="11515" x="7777163" y="4197350"/>
+          <p14:tracePt t="11531" x="7793038" y="4287838"/>
+          <p14:tracePt t="11533" x="7785100" y="4327525"/>
+          <p14:tracePt t="11550" x="7670800" y="4410075"/>
+          <p14:tracePt t="11565" x="7524750" y="4449763"/>
+          <p14:tracePt t="11581" x="7402513" y="4475163"/>
+          <p14:tracePt t="11598" x="7354888" y="4475163"/>
+          <p14:tracePt t="11615" x="7313613" y="4475163"/>
+          <p14:tracePt t="11632" x="7280275" y="4457700"/>
+          <p14:tracePt t="11648" x="7240588" y="4425950"/>
+          <p14:tracePt t="11665" x="7215188" y="4352925"/>
+          <p14:tracePt t="11682" x="7207250" y="4303713"/>
+          <p14:tracePt t="11698" x="7215188" y="4246563"/>
+          <p14:tracePt t="11715" x="7297738" y="4197350"/>
+          <p14:tracePt t="11731" x="7386638" y="4165600"/>
+          <p14:tracePt t="11749" x="7516813" y="4149725"/>
+          <p14:tracePt t="11765" x="7631113" y="4149725"/>
+          <p14:tracePt t="11781" x="7727950" y="4149725"/>
+          <p14:tracePt t="11798" x="7735888" y="4149725"/>
+          <p14:tracePt t="11815" x="7745413" y="4149725"/>
+          <p14:tracePt t="11831" x="7735888" y="4165600"/>
+          <p14:tracePt t="11848" x="7654925" y="4181475"/>
+          <p14:tracePt t="11865" x="7532688" y="4222750"/>
+          <p14:tracePt t="11881" x="7386638" y="4246563"/>
+          <p14:tracePt t="11898" x="7240588" y="4279900"/>
+          <p14:tracePt t="11915" x="7118350" y="4295775"/>
+          <p14:tracePt t="11931" x="7037388" y="4319588"/>
+          <p14:tracePt t="11949" x="7011988" y="4319588"/>
+          <p14:tracePt t="11965" x="7004050" y="4319588"/>
+          <p14:tracePt t="12013" x="7037388" y="4311650"/>
+          <p14:tracePt t="12021" x="7102475" y="4295775"/>
+          <p14:tracePt t="12031" x="7175500" y="4270375"/>
+          <p14:tracePt t="12048" x="7378700" y="4222750"/>
+          <p14:tracePt t="12065" x="7485063" y="4197350"/>
+          <p14:tracePt t="12081" x="7508875" y="4197350"/>
+          <p14:tracePt t="12117" x="7500938" y="4181475"/>
+          <p14:tracePt t="12126" x="7475538" y="4173538"/>
+          <p14:tracePt t="12133" x="7402513" y="4165600"/>
+          <p14:tracePt t="12150" x="7199313" y="4116388"/>
+          <p14:tracePt t="12165" x="7069138" y="4092575"/>
+          <p14:tracePt t="12181" x="7011988" y="4075113"/>
+          <p14:tracePt t="12198" x="6996113" y="4067175"/>
+          <p14:tracePt t="12215" x="6980238" y="4051300"/>
+          <p14:tracePt t="12231" x="6972300" y="4051300"/>
+          <p14:tracePt t="12248" x="6964363" y="4051300"/>
+          <p14:tracePt t="12265" x="6964363" y="4035425"/>
+          <p14:tracePt t="12281" x="6964363" y="4010025"/>
+          <p14:tracePt t="12298" x="6988175" y="3978275"/>
+          <p14:tracePt t="12315" x="7011988" y="3954463"/>
+          <p14:tracePt t="12331" x="7019925" y="3954463"/>
+        </p14:tracePtLst>
+      </p14:laserTraceLst>
+    </p:ext>
+  </p:extLst>
 </p:sld>
 </file>
 
@@ -4484,47 +5218,189 @@
               <a:buNone/>
             </a:pPr>
             <a:r>
-              <a:rPr lang="pt-BR" altLang="pt-BR" sz="2000" kern="0" dirty="0"/>
+              <a:rPr lang="pt-BR" altLang="pt-BR" sz="2000" kern="0" dirty="0">
+                <a:latin typeface="Tahoma" panose="020B0604030504040204" pitchFamily="34" charset="0"/>
+              </a:rPr>
               <a:t>Todo o conteúdo da disciplina está disponível em:</a:t>
             </a:r>
             <a:br>
-              <a:rPr lang="pt-BR" altLang="pt-BR" sz="2000" kern="0" dirty="0"/>
+              <a:rPr lang="pt-BR" altLang="pt-BR" sz="2000" kern="0" dirty="0">
+                <a:latin typeface="Tahoma" panose="020B0604030504040204" pitchFamily="34" charset="0"/>
+              </a:rPr>
             </a:br>
-            <a:r>
-              <a:rPr lang="pt-BR" altLang="pt-BR" sz="2000" kern="0" dirty="0"/>
-              <a:t/>
-            </a:r>
             <a:br>
-              <a:rPr lang="pt-BR" altLang="pt-BR" sz="2000" kern="0" dirty="0"/>
+              <a:rPr lang="pt-BR" altLang="pt-BR" sz="2000" kern="0" dirty="0">
+                <a:latin typeface="Tahoma" panose="020B0604030504040204" pitchFamily="34" charset="0"/>
+              </a:rPr>
             </a:br>
             <a:r>
-              <a:rPr lang="pt-BR" altLang="pt-BR" sz="2000" kern="0" dirty="0"/>
-              <a:t>							</a:t>
-            </a:r>
-            <a:r>
-              <a:rPr lang="pt-BR" sz="1800" kern="0" dirty="0">
-                <a:latin typeface="Arial" panose="020B0604020202020204" pitchFamily="34" charset="0"/>
-                <a:cs typeface="Arial" panose="020B0604020202020204" pitchFamily="34" charset="0"/>
+              <a:rPr lang="pt-BR" altLang="pt-BR" sz="2000" kern="0" dirty="0">
+                <a:latin typeface="Tahoma" panose="020B0604030504040204" pitchFamily="34" charset="0"/>
               </a:rPr>
-              <a:t>http://www.dpi.inpe.br/~camilo/estatistica</a:t>
-            </a:r>
-            <a:endParaRPr lang="pt-BR" altLang="pt-BR" sz="1800" kern="0" dirty="0">
-              <a:latin typeface="Arial" panose="020B0604020202020204" pitchFamily="34" charset="0"/>
-              <a:cs typeface="Arial" panose="020B0604020202020204" pitchFamily="34" charset="0"/>
+              <a:t>							http://urlib.net/8JMKD2USNRW34T/4D6DMD2</a:t>
+            </a:r>
+          </a:p>
+          <a:p>
+            <a:pPr defTabSz="246063" eaLnBrk="1" hangingPunct="1">
+              <a:buFontTx/>
+              <a:buNone/>
+            </a:pPr>
+            <a:r>
+              <a:rPr lang="pt-BR" sz="2000" kern="0" dirty="0">
+                <a:latin typeface="Tahoma" panose="020B0604030504040204" pitchFamily="34" charset="0"/>
+              </a:rPr>
+              <a:t>								https://cdrenno.github.io/Estatistica/</a:t>
+            </a:r>
+            <a:endParaRPr lang="pt-BR" altLang="pt-BR" sz="2000" kern="0" dirty="0">
+              <a:latin typeface="Tahoma" panose="020B0604030504040204" pitchFamily="34" charset="0"/>
             </a:endParaRPr>
           </a:p>
         </p:txBody>
       </p:sp>
+      <p:pic>
+        <p:nvPicPr>
+          <p:cNvPr id="11" name="Áudio 10">
+            <a:hlinkClick r:id="" action="ppaction://media"/>
+            <a:extLst>
+              <a:ext uri="{FF2B5EF4-FFF2-40B4-BE49-F238E27FC236}">
+                <a16:creationId xmlns:a16="http://schemas.microsoft.com/office/drawing/2014/main" id="{FB357070-E09F-48FA-B3EF-666CF1D0134C}"/>
+              </a:ext>
+            </a:extLst>
+          </p:cNvPr>
+          <p:cNvPicPr>
+            <a:picLocks noChangeAspect="1"/>
+          </p:cNvPicPr>
+          <p:nvPr>
+            <a:audioFile r:link="rId2"/>
+            <p:extLst>
+              <p:ext uri="{DAA4B4D4-6D71-4841-9C94-3DE7FCFB9230}">
+                <p14:media xmlns:p14="http://schemas.microsoft.com/office/powerpoint/2010/main" r:embed="rId1"/>
+              </p:ext>
+            </p:extLst>
+          </p:nvPr>
+        </p:nvPicPr>
+        <p:blipFill>
+          <a:blip r:embed="rId4"/>
+          <a:srcRect l="-118750" t="-118750" r="-118750" b="-118750"/>
+          <a:stretch>
+            <a:fillRect/>
+          </a:stretch>
+        </p:blipFill>
+        <p:spPr>
+          <a:xfrm>
+            <a:off x="7004304" y="4718304"/>
+            <a:ext cx="2057400" cy="2057400"/>
+          </a:xfrm>
+          <a:prstGeom prst="ellipse">
+            <a:avLst/>
+          </a:prstGeom>
+        </p:spPr>
+      </p:pic>
     </p:spTree>
     <p:extLst>
       <p:ext uri="{BB962C8B-B14F-4D97-AF65-F5344CB8AC3E}">
-        <p14:creationId xmlns:p14="http://schemas.microsoft.com/office/powerpoint/2010/main" xmlns="" val="33346296"/>
+        <p14:creationId xmlns:p14="http://schemas.microsoft.com/office/powerpoint/2010/main" val="33346296"/>
       </p:ext>
     </p:extLst>
   </p:cSld>
   <p:clrMapOvr>
     <a:masterClrMapping/>
   </p:clrMapOvr>
+  <mc:AlternateContent xmlns:mc="http://schemas.openxmlformats.org/markup-compatibility/2006">
+    <mc:Choice xmlns:p14="http://schemas.microsoft.com/office/powerpoint/2010/main" Requires="p14">
+      <p:transition spd="slow" p14:dur="2000" advTm="2259"/>
+    </mc:Choice>
+    <mc:Fallback>
+      <p:transition spd="slow" advTm="2259"/>
+    </mc:Fallback>
+  </mc:AlternateContent>
+  <p:timing>
+    <p:tnLst>
+      <p:par>
+        <p:cTn id="1" dur="indefinite" restart="never" nodeType="tmRoot">
+          <p:childTnLst>
+            <p:seq concurrent="1" nextAc="seek">
+              <p:cTn id="2" dur="indefinite" nodeType="mainSeq">
+                <p:childTnLst>
+                  <p:par>
+                    <p:cTn id="3" fill="hold">
+                      <p:stCondLst>
+                        <p:cond delay="indefinite"/>
+                        <p:cond evt="onBegin" delay="0">
+                          <p:tn val="2"/>
+                        </p:cond>
+                      </p:stCondLst>
+                      <p:childTnLst>
+                        <p:par>
+                          <p:cTn id="4" fill="hold">
+                            <p:stCondLst>
+                              <p:cond delay="0"/>
+                            </p:stCondLst>
+                            <p:childTnLst>
+                              <p:par>
+                                <p:cTn id="5" presetID="1" presetClass="mediacall" presetSubtype="0" fill="hold" nodeType="afterEffect">
+                                  <p:stCondLst>
+                                    <p:cond delay="0"/>
+                                  </p:stCondLst>
+                                  <p:childTnLst>
+                                    <p:cmd type="call" cmd="playFrom(0.0)">
+                                      <p:cBhvr>
+                                        <p:cTn id="6" dur="1" fill="hold"/>
+                                        <p:tgtEl>
+                                          <p:spTgt spid="11"/>
+                                        </p:tgtEl>
+                                      </p:cBhvr>
+                                    </p:cmd>
+                                  </p:childTnLst>
+                                </p:cTn>
+                              </p:par>
+                            </p:childTnLst>
+                          </p:cTn>
+                        </p:par>
+                      </p:childTnLst>
+                    </p:cTn>
+                  </p:par>
+                </p:childTnLst>
+              </p:cTn>
+              <p:prevCondLst>
+                <p:cond evt="onPrev" delay="0">
+                  <p:tgtEl>
+                    <p:sldTgt/>
+                  </p:tgtEl>
+                </p:cond>
+              </p:prevCondLst>
+              <p:nextCondLst>
+                <p:cond evt="onNext" delay="0">
+                  <p:tgtEl>
+                    <p:sldTgt/>
+                  </p:tgtEl>
+                </p:cond>
+              </p:nextCondLst>
+            </p:seq>
+            <p:audio isNarration="1">
+              <p:cMediaNode vol="80000" showWhenStopped="0">
+                <p:cTn id="7" fill="hold" display="0">
+                  <p:stCondLst>
+                    <p:cond delay="indefinite"/>
+                  </p:stCondLst>
+                  <p:endCondLst>
+                    <p:cond evt="onStopAudio" delay="0">
+                      <p:tgtEl>
+                        <p:sldTgt/>
+                      </p:tgtEl>
+                    </p:cond>
+                  </p:endCondLst>
+                </p:cTn>
+                <p:tgtEl>
+                  <p:spTgt spid="11"/>
+                </p:tgtEl>
+              </p:cMediaNode>
+            </p:audio>
+          </p:childTnLst>
+        </p:cTn>
+      </p:par>
+    </p:tnLst>
+  </p:timing>
 </p:sld>
 </file>
 
@@ -4568,10 +5444,10 @@
             <p:nvPr/>
           </p:nvPicPr>
           <p:blipFill>
-            <a:blip r:embed="rId2" cstate="print">
+            <a:blip r:embed="rId5" cstate="print">
               <a:extLst>
                 <a:ext uri="{28A0092B-C50C-407E-A947-70E740481C1C}">
-                  <a14:useLocalDpi xmlns:a14="http://schemas.microsoft.com/office/drawing/2010/main" xmlns="" val="0"/>
+                  <a14:useLocalDpi xmlns:a14="http://schemas.microsoft.com/office/drawing/2010/main" val="0"/>
                 </a:ext>
               </a:extLst>
             </a:blip>
@@ -4594,14 +5470,14 @@
             </a:ln>
             <a:extLst>
               <a:ext uri="{909E8E84-426E-40DD-AFC4-6F175D3DCCD1}">
-                <a14:hiddenFill xmlns:a14="http://schemas.microsoft.com/office/drawing/2010/main" xmlns="">
+                <a14:hiddenFill xmlns:a14="http://schemas.microsoft.com/office/drawing/2010/main">
                   <a:solidFill>
                     <a:srgbClr val="FFFFFF"/>
                   </a:solidFill>
                 </a14:hiddenFill>
               </a:ext>
               <a:ext uri="{91240B29-F687-4F45-9708-019B960494DF}">
-                <a14:hiddenLine xmlns:a14="http://schemas.microsoft.com/office/drawing/2010/main" xmlns="" w="9525">
+                <a14:hiddenLine xmlns:a14="http://schemas.microsoft.com/office/drawing/2010/main" w="9525">
                   <a:solidFill>
                     <a:srgbClr val="000000"/>
                   </a:solidFill>
@@ -6379,10 +7255,10 @@
             <p:nvPr/>
           </p:nvPicPr>
           <p:blipFill>
-            <a:blip r:embed="rId3" cstate="print">
+            <a:blip r:embed="rId6" cstate="print">
               <a:extLst>
                 <a:ext uri="{28A0092B-C50C-407E-A947-70E740481C1C}">
-                  <a14:useLocalDpi xmlns:a14="http://schemas.microsoft.com/office/drawing/2010/main" xmlns="" val="0"/>
+                  <a14:useLocalDpi xmlns:a14="http://schemas.microsoft.com/office/drawing/2010/main" val="0"/>
                 </a:ext>
               </a:extLst>
             </a:blip>
@@ -6405,14 +7281,14 @@
             </a:ln>
             <a:extLst>
               <a:ext uri="{909E8E84-426E-40DD-AFC4-6F175D3DCCD1}">
-                <a14:hiddenFill xmlns:a14="http://schemas.microsoft.com/office/drawing/2010/main" xmlns="">
+                <a14:hiddenFill xmlns:a14="http://schemas.microsoft.com/office/drawing/2010/main">
                   <a:solidFill>
                     <a:srgbClr val="FFFFFF"/>
                   </a:solidFill>
                 </a14:hiddenFill>
               </a:ext>
               <a:ext uri="{91240B29-F687-4F45-9708-019B960494DF}">
-                <a14:hiddenLine xmlns:a14="http://schemas.microsoft.com/office/drawing/2010/main" xmlns="" w="9525">
+                <a14:hiddenLine xmlns:a14="http://schemas.microsoft.com/office/drawing/2010/main" w="9525">
                   <a:solidFill>
                     <a:srgbClr val="000000"/>
                   </a:solidFill>
@@ -6433,10 +7309,10 @@
             <p:nvPr/>
           </p:nvPicPr>
           <p:blipFill>
-            <a:blip r:embed="rId4" cstate="print">
+            <a:blip r:embed="rId7" cstate="print">
               <a:extLst>
                 <a:ext uri="{28A0092B-C50C-407E-A947-70E740481C1C}">
-                  <a14:useLocalDpi xmlns:a14="http://schemas.microsoft.com/office/drawing/2010/main" xmlns="" val="0"/>
+                  <a14:useLocalDpi xmlns:a14="http://schemas.microsoft.com/office/drawing/2010/main" val="0"/>
                 </a:ext>
               </a:extLst>
             </a:blip>
@@ -6459,14 +7335,14 @@
             </a:ln>
             <a:extLst>
               <a:ext uri="{909E8E84-426E-40DD-AFC4-6F175D3DCCD1}">
-                <a14:hiddenFill xmlns:a14="http://schemas.microsoft.com/office/drawing/2010/main" xmlns="">
+                <a14:hiddenFill xmlns:a14="http://schemas.microsoft.com/office/drawing/2010/main">
                   <a:solidFill>
                     <a:srgbClr val="FFFFFF"/>
                   </a:solidFill>
                 </a14:hiddenFill>
               </a:ext>
               <a:ext uri="{91240B29-F687-4F45-9708-019B960494DF}">
-                <a14:hiddenLine xmlns:a14="http://schemas.microsoft.com/office/drawing/2010/main" xmlns="" w="9525">
+                <a14:hiddenLine xmlns:a14="http://schemas.microsoft.com/office/drawing/2010/main" w="9525">
                   <a:solidFill>
                     <a:srgbClr val="000000"/>
                   </a:solidFill>
@@ -6504,10 +7380,10 @@
             <p:nvPr/>
           </p:nvPicPr>
           <p:blipFill>
-            <a:blip r:embed="rId5" cstate="print">
+            <a:blip r:embed="rId8" cstate="print">
               <a:extLst>
                 <a:ext uri="{28A0092B-C50C-407E-A947-70E740481C1C}">
-                  <a14:useLocalDpi xmlns:a14="http://schemas.microsoft.com/office/drawing/2010/main" xmlns="" val="0"/>
+                  <a14:useLocalDpi xmlns:a14="http://schemas.microsoft.com/office/drawing/2010/main" val="0"/>
                 </a:ext>
               </a:extLst>
             </a:blip>
@@ -6530,14 +7406,14 @@
             </a:ln>
             <a:extLst>
               <a:ext uri="{909E8E84-426E-40DD-AFC4-6F175D3DCCD1}">
-                <a14:hiddenFill xmlns:a14="http://schemas.microsoft.com/office/drawing/2010/main" xmlns="">
+                <a14:hiddenFill xmlns:a14="http://schemas.microsoft.com/office/drawing/2010/main">
                   <a:solidFill>
                     <a:srgbClr val="FFFFFF"/>
                   </a:solidFill>
                 </a14:hiddenFill>
               </a:ext>
               <a:ext uri="{91240B29-F687-4F45-9708-019B960494DF}">
-                <a14:hiddenLine xmlns:a14="http://schemas.microsoft.com/office/drawing/2010/main" xmlns="" w="9525">
+                <a14:hiddenLine xmlns:a14="http://schemas.microsoft.com/office/drawing/2010/main" w="9525">
                   <a:solidFill>
                     <a:srgbClr val="000000"/>
                   </a:solidFill>
@@ -6558,10 +7434,10 @@
             <p:nvPr/>
           </p:nvPicPr>
           <p:blipFill>
-            <a:blip r:embed="rId6" cstate="print">
+            <a:blip r:embed="rId9" cstate="print">
               <a:extLst>
                 <a:ext uri="{28A0092B-C50C-407E-A947-70E740481C1C}">
-                  <a14:useLocalDpi xmlns:a14="http://schemas.microsoft.com/office/drawing/2010/main" xmlns="" val="0"/>
+                  <a14:useLocalDpi xmlns:a14="http://schemas.microsoft.com/office/drawing/2010/main" val="0"/>
                 </a:ext>
               </a:extLst>
             </a:blip>
@@ -6584,14 +7460,14 @@
             </a:ln>
             <a:extLst>
               <a:ext uri="{909E8E84-426E-40DD-AFC4-6F175D3DCCD1}">
-                <a14:hiddenFill xmlns:a14="http://schemas.microsoft.com/office/drawing/2010/main" xmlns="">
+                <a14:hiddenFill xmlns:a14="http://schemas.microsoft.com/office/drawing/2010/main">
                   <a:solidFill>
                     <a:srgbClr val="FFFFFF"/>
                   </a:solidFill>
                 </a14:hiddenFill>
               </a:ext>
               <a:ext uri="{91240B29-F687-4F45-9708-019B960494DF}">
-                <a14:hiddenLine xmlns:a14="http://schemas.microsoft.com/office/drawing/2010/main" xmlns="" w="9525">
+                <a14:hiddenLine xmlns:a14="http://schemas.microsoft.com/office/drawing/2010/main" w="9525">
                   <a:solidFill>
                     <a:srgbClr val="000000"/>
                   </a:solidFill>
@@ -6612,10 +7488,10 @@
             <p:nvPr/>
           </p:nvPicPr>
           <p:blipFill>
-            <a:blip r:embed="rId7" cstate="print">
+            <a:blip r:embed="rId10" cstate="print">
               <a:extLst>
                 <a:ext uri="{28A0092B-C50C-407E-A947-70E740481C1C}">
-                  <a14:useLocalDpi xmlns:a14="http://schemas.microsoft.com/office/drawing/2010/main" xmlns="" val="0"/>
+                  <a14:useLocalDpi xmlns:a14="http://schemas.microsoft.com/office/drawing/2010/main" val="0"/>
                 </a:ext>
               </a:extLst>
             </a:blip>
@@ -6638,14 +7514,14 @@
             </a:ln>
             <a:extLst>
               <a:ext uri="{909E8E84-426E-40DD-AFC4-6F175D3DCCD1}">
-                <a14:hiddenFill xmlns:a14="http://schemas.microsoft.com/office/drawing/2010/main" xmlns="">
+                <a14:hiddenFill xmlns:a14="http://schemas.microsoft.com/office/drawing/2010/main">
                   <a:solidFill>
                     <a:srgbClr val="FFFFFF"/>
                   </a:solidFill>
                 </a14:hiddenFill>
               </a:ext>
               <a:ext uri="{91240B29-F687-4F45-9708-019B960494DF}">
-                <a14:hiddenLine xmlns:a14="http://schemas.microsoft.com/office/drawing/2010/main" xmlns="" w="9525">
+                <a14:hiddenLine xmlns:a14="http://schemas.microsoft.com/office/drawing/2010/main" w="9525">
                   <a:solidFill>
                     <a:srgbClr val="000000"/>
                   </a:solidFill>
@@ -6666,10 +7542,10 @@
             <p:nvPr/>
           </p:nvPicPr>
           <p:blipFill>
-            <a:blip r:embed="rId8" cstate="print">
+            <a:blip r:embed="rId11" cstate="print">
               <a:extLst>
                 <a:ext uri="{28A0092B-C50C-407E-A947-70E740481C1C}">
-                  <a14:useLocalDpi xmlns:a14="http://schemas.microsoft.com/office/drawing/2010/main" xmlns="" val="0"/>
+                  <a14:useLocalDpi xmlns:a14="http://schemas.microsoft.com/office/drawing/2010/main" val="0"/>
                 </a:ext>
               </a:extLst>
             </a:blip>
@@ -6692,14 +7568,14 @@
             </a:ln>
             <a:extLst>
               <a:ext uri="{909E8E84-426E-40DD-AFC4-6F175D3DCCD1}">
-                <a14:hiddenFill xmlns:a14="http://schemas.microsoft.com/office/drawing/2010/main" xmlns="">
+                <a14:hiddenFill xmlns:a14="http://schemas.microsoft.com/office/drawing/2010/main">
                   <a:solidFill>
                     <a:srgbClr val="FFFFFF"/>
                   </a:solidFill>
                 </a14:hiddenFill>
               </a:ext>
               <a:ext uri="{91240B29-F687-4F45-9708-019B960494DF}">
-                <a14:hiddenLine xmlns:a14="http://schemas.microsoft.com/office/drawing/2010/main" xmlns="" w="9525">
+                <a14:hiddenLine xmlns:a14="http://schemas.microsoft.com/office/drawing/2010/main" w="9525">
                   <a:solidFill>
                     <a:srgbClr val="000000"/>
                   </a:solidFill>
@@ -6720,10 +7596,10 @@
             <p:nvPr/>
           </p:nvPicPr>
           <p:blipFill>
-            <a:blip r:embed="rId9" cstate="print">
+            <a:blip r:embed="rId12" cstate="print">
               <a:extLst>
                 <a:ext uri="{28A0092B-C50C-407E-A947-70E740481C1C}">
-                  <a14:useLocalDpi xmlns:a14="http://schemas.microsoft.com/office/drawing/2010/main" xmlns="" val="0"/>
+                  <a14:useLocalDpi xmlns:a14="http://schemas.microsoft.com/office/drawing/2010/main" val="0"/>
                 </a:ext>
               </a:extLst>
             </a:blip>
@@ -6746,14 +7622,14 @@
             </a:ln>
             <a:extLst>
               <a:ext uri="{909E8E84-426E-40DD-AFC4-6F175D3DCCD1}">
-                <a14:hiddenFill xmlns:a14="http://schemas.microsoft.com/office/drawing/2010/main" xmlns="">
+                <a14:hiddenFill xmlns:a14="http://schemas.microsoft.com/office/drawing/2010/main">
                   <a:solidFill>
                     <a:srgbClr val="FFFFFF"/>
                   </a:solidFill>
                 </a14:hiddenFill>
               </a:ext>
               <a:ext uri="{91240B29-F687-4F45-9708-019B960494DF}">
-                <a14:hiddenLine xmlns:a14="http://schemas.microsoft.com/office/drawing/2010/main" xmlns="" w="9525">
+                <a14:hiddenLine xmlns:a14="http://schemas.microsoft.com/office/drawing/2010/main" w="9525">
                   <a:solidFill>
                     <a:srgbClr val="000000"/>
                   </a:solidFill>
@@ -7036,19 +7912,63 @@
                     <a:lumMod val="100000"/>
                   </a:schemeClr>
                 </a:solidFill>
-                <a:latin typeface="Comic Sans MS"/>
+                <a:latin typeface="Tahoma" panose="020B0604030504040204" pitchFamily="34" charset="0"/>
                 <a:cs typeface="Arial" charset="0"/>
               </a:rPr>
               <a:t>Espera-se que o aluno, ao final do curso, consiga compreender, adaptar e desenvolver análises estatísticas apropriadas ao conjunto de dados utilizado em seu trabalho de dissertação e tese.</a:t>
             </a:r>
-            <a:endParaRPr lang="pt-BR" altLang="pt-BR" sz="2000" kern="0" dirty="0"/>
+            <a:endParaRPr lang="pt-BR" altLang="pt-BR" sz="2000" kern="0" dirty="0">
+              <a:latin typeface="Tahoma" panose="020B0604030504040204" pitchFamily="34" charset="0"/>
+            </a:endParaRPr>
           </a:p>
         </p:txBody>
       </p:sp>
+      <p:pic>
+        <p:nvPicPr>
+          <p:cNvPr id="81" name="Áudio 80">
+            <a:hlinkClick r:id="" action="ppaction://media"/>
+            <a:extLst>
+              <a:ext uri="{FF2B5EF4-FFF2-40B4-BE49-F238E27FC236}">
+                <a16:creationId xmlns:a16="http://schemas.microsoft.com/office/drawing/2014/main" id="{B0DE8F5F-567A-BF98-7BE6-8F0B77209FB4}"/>
+              </a:ext>
+            </a:extLst>
+          </p:cNvPr>
+          <p:cNvPicPr>
+            <a:picLocks noChangeAspect="1"/>
+          </p:cNvPicPr>
+          <p:nvPr>
+            <a:audioFile r:link="rId3"/>
+            <p:extLst>
+              <p:ext uri="{DAA4B4D4-6D71-4841-9C94-3DE7FCFB9230}">
+                <p14:media xmlns:p14="http://schemas.microsoft.com/office/powerpoint/2010/main" r:embed="rId2"/>
+              </p:ext>
+            </p:extLst>
+          </p:nvPr>
+        </p:nvPicPr>
+        <p:blipFill>
+          <a:blip r:embed="rId13"/>
+          <a:srcRect l="-118750" t="-118750" r="-118750" b="-118750"/>
+          <a:stretch>
+            <a:fillRect/>
+          </a:stretch>
+        </p:blipFill>
+        <p:spPr>
+          <a:xfrm>
+            <a:off x="7004304" y="4718304"/>
+            <a:ext cx="2057400" cy="2057400"/>
+          </a:xfrm>
+          <a:prstGeom prst="ellipse">
+            <a:avLst/>
+          </a:prstGeom>
+        </p:spPr>
+      </p:pic>
     </p:spTree>
+    <p:custDataLst>
+      <p:tags r:id="rId1"/>
+    </p:custDataLst>
     <p:extLst>
       <p:ext uri="{BB962C8B-B14F-4D97-AF65-F5344CB8AC3E}">
-        <p14:creationId xmlns:p14="http://schemas.microsoft.com/office/powerpoint/2010/main" xmlns="" val="1916879497"/>
+        <p14:creationId xmlns:p14="http://schemas.microsoft.com/office/powerpoint/2010/main" val="1916879497"/>
       </p:ext>
     </p:extLst>
   </p:cSld>
@@ -7056,13 +7976,13 @@
     <a:masterClrMapping/>
   </p:clrMapOvr>
   <mc:AlternateContent xmlns:mc="http://schemas.openxmlformats.org/markup-compatibility/2006">
-    <mc:Choice xmlns:p14="http://schemas.microsoft.com/office/powerpoint/2010/main" xmlns="" Requires="p14">
-      <p:transition spd="slow" p14:dur="2000">
+    <mc:Choice xmlns:p14="http://schemas.microsoft.com/office/powerpoint/2010/main" Requires="p14">
+      <p:transition spd="slow" p14:dur="2000" advTm="7495">
         <p:cut/>
       </p:transition>
     </mc:Choice>
     <mc:Fallback>
-      <p:transition spd="slow">
+      <p:transition spd="slow" advTm="7495">
         <p:cut/>
       </p:transition>
     </mc:Fallback>
@@ -7079,6 +7999,9 @@
                     <p:cTn id="3" fill="hold">
                       <p:stCondLst>
                         <p:cond delay="indefinite"/>
+                        <p:cond evt="onBegin" delay="0">
+                          <p:tn val="2"/>
+                        </p:cond>
                       </p:stCondLst>
                       <p:childTnLst>
                         <p:par>
@@ -7088,14 +8011,49 @@
                             </p:stCondLst>
                             <p:childTnLst>
                               <p:par>
-                                <p:cTn id="5" presetID="1" presetClass="entr" presetSubtype="0" fill="hold" nodeType="clickEffect">
+                                <p:cTn id="5" presetID="1" presetClass="mediacall" presetSubtype="0" fill="hold" nodeType="afterEffect">
+                                  <p:stCondLst>
+                                    <p:cond delay="0"/>
+                                  </p:stCondLst>
+                                  <p:childTnLst>
+                                    <p:cmd type="call" cmd="playFrom(0.0)">
+                                      <p:cBhvr>
+                                        <p:cTn id="6" dur="1" fill="hold"/>
+                                        <p:tgtEl>
+                                          <p:spTgt spid="81"/>
+                                        </p:tgtEl>
+                                      </p:cBhvr>
+                                    </p:cmd>
+                                  </p:childTnLst>
+                                </p:cTn>
+                              </p:par>
+                            </p:childTnLst>
+                          </p:cTn>
+                        </p:par>
+                      </p:childTnLst>
+                    </p:cTn>
+                  </p:par>
+                  <p:par>
+                    <p:cTn id="7" fill="hold">
+                      <p:stCondLst>
+                        <p:cond delay="indefinite"/>
+                      </p:stCondLst>
+                      <p:childTnLst>
+                        <p:par>
+                          <p:cTn id="8" fill="hold">
+                            <p:stCondLst>
+                              <p:cond delay="0"/>
+                            </p:stCondLst>
+                            <p:childTnLst>
+                              <p:par>
+                                <p:cTn id="9" presetID="1" presetClass="entr" presetSubtype="0" fill="hold" nodeType="clickEffect">
                                   <p:stCondLst>
                                     <p:cond delay="0"/>
                                   </p:stCondLst>
                                   <p:childTnLst>
                                     <p:set>
                                       <p:cBhvr>
-                                        <p:cTn id="6" dur="1" fill="hold">
+                                        <p:cTn id="10" dur="1" fill="hold">
                                           <p:stCondLst>
                                             <p:cond delay="0"/>
                                           </p:stCondLst>
@@ -7115,14 +8073,14 @@
                                 </p:cTn>
                               </p:par>
                               <p:par>
-                                <p:cTn id="7" presetID="1" presetClass="entr" presetSubtype="0" fill="hold" nodeType="withEffect">
+                                <p:cTn id="11" presetID="1" presetClass="entr" presetSubtype="0" fill="hold" nodeType="withEffect">
                                   <p:stCondLst>
                                     <p:cond delay="0"/>
                                   </p:stCondLst>
                                   <p:childTnLst>
                                     <p:set>
                                       <p:cBhvr>
-                                        <p:cTn id="8" dur="1" fill="hold">
+                                        <p:cTn id="12" dur="1" fill="hold">
                                           <p:stCondLst>
                                             <p:cond delay="0"/>
                                           </p:stCondLst>
@@ -7142,14 +8100,14 @@
                                 </p:cTn>
                               </p:par>
                               <p:par>
-                                <p:cTn id="9" presetID="1" presetClass="entr" presetSubtype="0" fill="hold" nodeType="withEffect">
+                                <p:cTn id="13" presetID="1" presetClass="entr" presetSubtype="0" fill="hold" nodeType="withEffect">
                                   <p:stCondLst>
                                     <p:cond delay="0"/>
                                   </p:stCondLst>
                                   <p:childTnLst>
                                     <p:set>
                                       <p:cBhvr>
-                                        <p:cTn id="10" dur="1" fill="hold">
+                                        <p:cTn id="14" dur="1" fill="hold">
                                           <p:stCondLst>
                                             <p:cond delay="0"/>
                                           </p:stCondLst>
@@ -7175,26 +8133,26 @@
                     </p:cTn>
                   </p:par>
                   <p:par>
-                    <p:cTn id="11" fill="hold">
+                    <p:cTn id="15" fill="hold">
                       <p:stCondLst>
                         <p:cond delay="indefinite"/>
                       </p:stCondLst>
                       <p:childTnLst>
                         <p:par>
-                          <p:cTn id="12" fill="hold">
+                          <p:cTn id="16" fill="hold">
                             <p:stCondLst>
                               <p:cond delay="0"/>
                             </p:stCondLst>
                             <p:childTnLst>
                               <p:par>
-                                <p:cTn id="13" presetID="1" presetClass="entr" presetSubtype="0" fill="hold" grpId="0" nodeType="clickEffect">
+                                <p:cTn id="17" presetID="1" presetClass="entr" presetSubtype="0" fill="hold" grpId="0" nodeType="clickEffect">
                                   <p:stCondLst>
                                     <p:cond delay="0"/>
                                   </p:stCondLst>
                                   <p:childTnLst>
                                     <p:set>
                                       <p:cBhvr>
-                                        <p:cTn id="14" dur="1" fill="hold">
+                                        <p:cTn id="18" dur="1" fill="hold">
                                           <p:stCondLst>
                                             <p:cond delay="0"/>
                                           </p:stCondLst>
@@ -7236,6 +8194,25 @@
                 </p:cond>
               </p:nextCondLst>
             </p:seq>
+            <p:audio isNarration="1">
+              <p:cMediaNode vol="80000" showWhenStopped="0">
+                <p:cTn id="19" fill="hold" display="0">
+                  <p:stCondLst>
+                    <p:cond delay="indefinite"/>
+                  </p:stCondLst>
+                  <p:endCondLst>
+                    <p:cond evt="onStopAudio" delay="0">
+                      <p:tgtEl>
+                        <p:sldTgt/>
+                      </p:tgtEl>
+                    </p:cond>
+                  </p:endCondLst>
+                </p:cTn>
+                <p:tgtEl>
+                  <p:spTgt spid="81"/>
+                </p:tgtEl>
+              </p:cMediaNode>
+            </p:audio>
           </p:childTnLst>
         </p:cTn>
       </p:par>
@@ -7436,11 +8413,166 @@
           </a:p>
         </p:txBody>
       </p:sp>
+      <p:pic>
+        <p:nvPicPr>
+          <p:cNvPr id="7" name="Áudio 6">
+            <a:hlinkClick r:id="" action="ppaction://media"/>
+            <a:extLst>
+              <a:ext uri="{FF2B5EF4-FFF2-40B4-BE49-F238E27FC236}">
+                <a16:creationId xmlns:a16="http://schemas.microsoft.com/office/drawing/2014/main" id="{D000FDAB-8734-1D51-1D9A-3F3440C2A53A}"/>
+              </a:ext>
+            </a:extLst>
+          </p:cNvPr>
+          <p:cNvPicPr>
+            <a:picLocks noChangeAspect="1"/>
+          </p:cNvPicPr>
+          <p:nvPr>
+            <a:audioFile r:link="rId2"/>
+            <p:extLst>
+              <p:ext uri="{DAA4B4D4-6D71-4841-9C94-3DE7FCFB9230}">
+                <p14:media xmlns:p14="http://schemas.microsoft.com/office/powerpoint/2010/main" r:embed="rId1"/>
+              </p:ext>
+            </p:extLst>
+          </p:nvPr>
+        </p:nvPicPr>
+        <p:blipFill>
+          <a:blip r:embed="rId4"/>
+          <a:srcRect l="-118750" t="-118750" r="-118750" b="-118750"/>
+          <a:stretch>
+            <a:fillRect/>
+          </a:stretch>
+        </p:blipFill>
+        <p:spPr>
+          <a:xfrm>
+            <a:off x="7004304" y="4718304"/>
+            <a:ext cx="2057400" cy="2057400"/>
+          </a:xfrm>
+          <a:prstGeom prst="ellipse">
+            <a:avLst/>
+          </a:prstGeom>
+        </p:spPr>
+      </p:pic>
     </p:spTree>
   </p:cSld>
   <p:clrMapOvr>
     <a:masterClrMapping/>
   </p:clrMapOvr>
+  <mc:AlternateContent xmlns:mc="http://schemas.openxmlformats.org/markup-compatibility/2006">
+    <mc:Choice xmlns:p14="http://schemas.microsoft.com/office/powerpoint/2010/main" Requires="p14">
+      <p:transition spd="slow" p14:dur="2000" advTm="2703"/>
+    </mc:Choice>
+    <mc:Fallback>
+      <p:transition spd="slow" advTm="2703"/>
+    </mc:Fallback>
+  </mc:AlternateContent>
+  <p:timing>
+    <p:tnLst>
+      <p:par>
+        <p:cTn id="1" dur="indefinite" restart="never" nodeType="tmRoot">
+          <p:childTnLst>
+            <p:seq concurrent="1" nextAc="seek">
+              <p:cTn id="2" dur="indefinite" nodeType="mainSeq">
+                <p:childTnLst>
+                  <p:par>
+                    <p:cTn id="3" fill="hold">
+                      <p:stCondLst>
+                        <p:cond delay="indefinite"/>
+                        <p:cond evt="onBegin" delay="0">
+                          <p:tn val="2"/>
+                        </p:cond>
+                      </p:stCondLst>
+                      <p:childTnLst>
+                        <p:par>
+                          <p:cTn id="4" fill="hold">
+                            <p:stCondLst>
+                              <p:cond delay="0"/>
+                            </p:stCondLst>
+                            <p:childTnLst>
+                              <p:par>
+                                <p:cTn id="5" presetID="1" presetClass="mediacall" presetSubtype="0" fill="hold" nodeType="afterEffect">
+                                  <p:stCondLst>
+                                    <p:cond delay="0"/>
+                                  </p:stCondLst>
+                                  <p:childTnLst>
+                                    <p:cmd type="call" cmd="playFrom(0.0)">
+                                      <p:cBhvr>
+                                        <p:cTn id="6" dur="1" fill="hold"/>
+                                        <p:tgtEl>
+                                          <p:spTgt spid="7"/>
+                                        </p:tgtEl>
+                                      </p:cBhvr>
+                                    </p:cmd>
+                                  </p:childTnLst>
+                                </p:cTn>
+                              </p:par>
+                            </p:childTnLst>
+                          </p:cTn>
+                        </p:par>
+                      </p:childTnLst>
+                    </p:cTn>
+                  </p:par>
+                </p:childTnLst>
+              </p:cTn>
+              <p:prevCondLst>
+                <p:cond evt="onPrev" delay="0">
+                  <p:tgtEl>
+                    <p:sldTgt/>
+                  </p:tgtEl>
+                </p:cond>
+              </p:prevCondLst>
+              <p:nextCondLst>
+                <p:cond evt="onNext" delay="0">
+                  <p:tgtEl>
+                    <p:sldTgt/>
+                  </p:tgtEl>
+                </p:cond>
+              </p:nextCondLst>
+            </p:seq>
+            <p:audio isNarration="1">
+              <p:cMediaNode vol="80000" showWhenStopped="0">
+                <p:cTn id="7" fill="hold" display="0">
+                  <p:stCondLst>
+                    <p:cond delay="indefinite"/>
+                  </p:stCondLst>
+                  <p:endCondLst>
+                    <p:cond evt="onStopAudio" delay="0">
+                      <p:tgtEl>
+                        <p:sldTgt/>
+                      </p:tgtEl>
+                    </p:cond>
+                  </p:endCondLst>
+                </p:cTn>
+                <p:tgtEl>
+                  <p:spTgt spid="7"/>
+                </p:tgtEl>
+              </p:cMediaNode>
+            </p:audio>
+          </p:childTnLst>
+        </p:cTn>
+      </p:par>
+    </p:tnLst>
+  </p:timing>
+  <p:extLst>
+    <p:ext uri="{3A86A75C-4F4B-4683-9AE1-C65F6400EC91}">
+      <p14:laserTraceLst xmlns:p14="http://schemas.microsoft.com/office/powerpoint/2010/main">
+        <p14:tracePtLst>
+          <p14:tracePt t="1293" x="7029450" y="3954463"/>
+          <p14:tracePt t="1301" x="7029450" y="4002088"/>
+          <p14:tracePt t="1317" x="7019925" y="3994150"/>
+          <p14:tracePt t="1324" x="7019925" y="4002088"/>
+          <p14:tracePt t="1335" x="7037388" y="4002088"/>
+          <p14:tracePt t="1352" x="8794750" y="4368800"/>
+          <p14:tracePt t="1398" x="933450" y="5791200"/>
+          <p14:tracePt t="1405" x="1752600" y="5981700"/>
+          <p14:tracePt t="1420" x="2400300" y="6140450"/>
+          <p14:tracePt t="1436" x="3289300" y="6261100"/>
+          <p14:tracePt t="1453" x="3759200" y="6254750"/>
+          <p14:tracePt t="1469" x="3797300" y="6254750"/>
+          <p14:tracePt t="1487" x="3803650" y="6254750"/>
+        </p14:tracePtLst>
+      </p14:laserTraceLst>
+    </p:ext>
+  </p:extLst>
 </p:sld>
 </file>
 
@@ -7535,7 +8667,6 @@
                     <a:lumMod val="100000"/>
                   </a:schemeClr>
                 </a:solidFill>
-                <a:latin typeface="Comic Sans MS"/>
               </a:rPr>
               <a:t>Regulares</a:t>
             </a:r>
@@ -7552,7 +8683,6 @@
                     <a:lumMod val="100000"/>
                   </a:schemeClr>
                 </a:solidFill>
-                <a:latin typeface="Comic Sans MS"/>
               </a:rPr>
               <a:t>	</a:t>
             </a:r>
@@ -7563,7 +8693,6 @@
                     <a:lumMod val="100000"/>
                   </a:schemeClr>
                 </a:solidFill>
-                <a:latin typeface="Comic Sans MS"/>
               </a:rPr>
               <a:t>O material disponibilizado </a:t>
             </a:r>
@@ -7572,7 +8701,6 @@
                 <a:solidFill>
                   <a:srgbClr val="FF0000"/>
                 </a:solidFill>
-                <a:latin typeface="Comic Sans MS"/>
               </a:rPr>
               <a:t>deve ser </a:t>
             </a:r>
@@ -7583,7 +8711,6 @@
                     <a:lumMod val="100000"/>
                   </a:schemeClr>
                 </a:solidFill>
-                <a:latin typeface="Comic Sans MS"/>
               </a:rPr>
               <a:t>estudado antes da aula</a:t>
             </a:r>
@@ -7600,7 +8727,6 @@
                     <a:lumMod val="100000"/>
                   </a:schemeClr>
                 </a:solidFill>
-                <a:latin typeface="Comic Sans MS"/>
               </a:rPr>
               <a:t>	A aula será interativa com perguntas direcionadas</a:t>
             </a:r>
@@ -7617,7 +8743,6 @@
                     <a:lumMod val="100000"/>
                   </a:schemeClr>
                 </a:solidFill>
-                <a:latin typeface="Comic Sans MS"/>
               </a:rPr>
               <a:t>	O material disponibilizado será utilizado como apoio</a:t>
             </a:r>
@@ -7634,7 +8759,6 @@
                     <a:lumMod val="100000"/>
                   </a:schemeClr>
                 </a:solidFill>
-                <a:latin typeface="Comic Sans MS"/>
               </a:rPr>
               <a:t>	Intervenções durante as aulas para esclarecimento de dúvidas ou 			comentários serão incentivadas</a:t>
             </a:r>
@@ -7658,7 +8782,6 @@
                     <a:lumMod val="100000"/>
                   </a:schemeClr>
                 </a:solidFill>
-                <a:latin typeface="Comic Sans MS"/>
               </a:rPr>
               <a:t>“Tira Dúvidas”</a:t>
             </a:r>
@@ -7675,7 +8798,6 @@
                     <a:lumMod val="100000"/>
                   </a:schemeClr>
                 </a:solidFill>
-                <a:latin typeface="Comic Sans MS"/>
               </a:rPr>
               <a:t>	</a:t>
             </a:r>
@@ -7686,7 +8808,6 @@
                     <a:lumMod val="100000"/>
                   </a:schemeClr>
                 </a:solidFill>
-                <a:latin typeface="Comic Sans MS"/>
               </a:rPr>
               <a:t>Marcadas sempre antes das provas</a:t>
             </a:r>
@@ -7703,7 +8824,6 @@
                     <a:lumMod val="100000"/>
                   </a:schemeClr>
                 </a:solidFill>
-                <a:latin typeface="Comic Sans MS"/>
               </a:rPr>
               <a:t>	Serão discutidos assuntos definidos pelos presentes, incluindo-se a 			resolução dos exercícios propostos caso haja interesse</a:t>
             </a:r>
@@ -7720,7 +8840,6 @@
                     <a:lumMod val="100000"/>
                   </a:schemeClr>
                 </a:solidFill>
-                <a:latin typeface="Comic Sans MS"/>
               </a:rPr>
               <a:t>	Deverá acontecer preferencialmente no horário regular das aulas</a:t>
             </a:r>
@@ -7760,10 +8879,49 @@
           </a:p>
         </p:txBody>
       </p:sp>
+      <p:pic>
+        <p:nvPicPr>
+          <p:cNvPr id="7" name="Áudio 6">
+            <a:hlinkClick r:id="" action="ppaction://media"/>
+            <a:extLst>
+              <a:ext uri="{FF2B5EF4-FFF2-40B4-BE49-F238E27FC236}">
+                <a16:creationId xmlns:a16="http://schemas.microsoft.com/office/drawing/2014/main" id="{16CFF5A2-BEC4-70E1-ECCC-A33817FE0F69}"/>
+              </a:ext>
+            </a:extLst>
+          </p:cNvPr>
+          <p:cNvPicPr>
+            <a:picLocks noChangeAspect="1"/>
+          </p:cNvPicPr>
+          <p:nvPr>
+            <a:audioFile r:link="rId2"/>
+            <p:extLst>
+              <p:ext uri="{DAA4B4D4-6D71-4841-9C94-3DE7FCFB9230}">
+                <p14:media xmlns:p14="http://schemas.microsoft.com/office/powerpoint/2010/main" r:embed="rId1"/>
+              </p:ext>
+            </p:extLst>
+          </p:nvPr>
+        </p:nvPicPr>
+        <p:blipFill>
+          <a:blip r:embed="rId4"/>
+          <a:srcRect l="-118750" t="-118750" r="-118750" b="-118750"/>
+          <a:stretch>
+            <a:fillRect/>
+          </a:stretch>
+        </p:blipFill>
+        <p:spPr>
+          <a:xfrm>
+            <a:off x="7004304" y="4718304"/>
+            <a:ext cx="2057400" cy="2057400"/>
+          </a:xfrm>
+          <a:prstGeom prst="ellipse">
+            <a:avLst/>
+          </a:prstGeom>
+        </p:spPr>
+      </p:pic>
     </p:spTree>
     <p:extLst>
       <p:ext uri="{BB962C8B-B14F-4D97-AF65-F5344CB8AC3E}">
-        <p14:creationId xmlns:p14="http://schemas.microsoft.com/office/powerpoint/2010/main" xmlns="" val="983261099"/>
+        <p14:creationId xmlns:p14="http://schemas.microsoft.com/office/powerpoint/2010/main" val="983261099"/>
       </p:ext>
     </p:extLst>
   </p:cSld>
@@ -7771,17 +8929,104 @@
     <a:masterClrMapping/>
   </p:clrMapOvr>
   <mc:AlternateContent xmlns:mc="http://schemas.openxmlformats.org/markup-compatibility/2006">
-    <mc:Choice xmlns:p14="http://schemas.microsoft.com/office/powerpoint/2010/main" xmlns="" Requires="p14">
-      <p:transition spd="slow" p14:dur="2000">
+    <mc:Choice xmlns:p14="http://schemas.microsoft.com/office/powerpoint/2010/main" Requires="p14">
+      <p:transition spd="slow" p14:dur="2000" advTm="433">
         <p:cut/>
       </p:transition>
     </mc:Choice>
     <mc:Fallback>
-      <p:transition spd="slow">
+      <p:transition spd="slow" advTm="433">
         <p:cut/>
       </p:transition>
     </mc:Fallback>
   </mc:AlternateContent>
+  <p:timing>
+    <p:tnLst>
+      <p:par>
+        <p:cTn id="1" dur="indefinite" restart="never" nodeType="tmRoot">
+          <p:childTnLst>
+            <p:seq concurrent="1" nextAc="seek">
+              <p:cTn id="2" dur="indefinite" nodeType="mainSeq">
+                <p:childTnLst>
+                  <p:par>
+                    <p:cTn id="3" fill="hold">
+                      <p:stCondLst>
+                        <p:cond delay="indefinite"/>
+                        <p:cond evt="onBegin" delay="0">
+                          <p:tn val="2"/>
+                        </p:cond>
+                      </p:stCondLst>
+                      <p:childTnLst>
+                        <p:par>
+                          <p:cTn id="4" fill="hold">
+                            <p:stCondLst>
+                              <p:cond delay="0"/>
+                            </p:stCondLst>
+                            <p:childTnLst>
+                              <p:par>
+                                <p:cTn id="5" presetID="1" presetClass="mediacall" presetSubtype="0" fill="hold" nodeType="afterEffect">
+                                  <p:stCondLst>
+                                    <p:cond delay="0"/>
+                                  </p:stCondLst>
+                                  <p:childTnLst>
+                                    <p:cmd type="call" cmd="playFrom(0.0)">
+                                      <p:cBhvr>
+                                        <p:cTn id="6" dur="1" fill="hold"/>
+                                        <p:tgtEl>
+                                          <p:spTgt spid="7"/>
+                                        </p:tgtEl>
+                                      </p:cBhvr>
+                                    </p:cmd>
+                                  </p:childTnLst>
+                                </p:cTn>
+                              </p:par>
+                            </p:childTnLst>
+                          </p:cTn>
+                        </p:par>
+                      </p:childTnLst>
+                    </p:cTn>
+                  </p:par>
+                </p:childTnLst>
+              </p:cTn>
+              <p:prevCondLst>
+                <p:cond evt="onPrev" delay="0">
+                  <p:tgtEl>
+                    <p:sldTgt/>
+                  </p:tgtEl>
+                </p:cond>
+              </p:prevCondLst>
+              <p:nextCondLst>
+                <p:cond evt="onNext" delay="0">
+                  <p:tgtEl>
+                    <p:sldTgt/>
+                  </p:tgtEl>
+                </p:cond>
+              </p:nextCondLst>
+            </p:seq>
+            <p:audio isNarration="1">
+              <p:cMediaNode vol="80000" showWhenStopped="0">
+                <p:cTn id="7" fill="hold" display="0">
+                  <p:stCondLst>
+                    <p:cond delay="indefinite"/>
+                  </p:stCondLst>
+                  <p:endCondLst>
+                    <p:cond evt="onStopAudio" delay="0">
+                      <p:tgtEl>
+                        <p:sldTgt/>
+                      </p:tgtEl>
+                    </p:cond>
+                  </p:endCondLst>
+                </p:cTn>
+                <p:tgtEl>
+                  <p:spTgt spid="7"/>
+                </p:tgtEl>
+              </p:cMediaNode>
+            </p:audio>
+          </p:childTnLst>
+        </p:cTn>
+      </p:par>
+    </p:tnLst>
+  </p:timing>
 </p:sld>
 </file>
 
@@ -7876,7 +9121,6 @@
                     <a:lumMod val="100000"/>
                   </a:schemeClr>
                 </a:solidFill>
-                <a:latin typeface="Comic Sans MS"/>
               </a:rPr>
               <a:t>Exercícios</a:t>
             </a:r>
@@ -7886,17 +9130,6 @@
               <a:buNone/>
               <a:defRPr/>
             </a:pPr>
-            <a:r>
-              <a:rPr lang="pt-BR" altLang="pt-BR" sz="1600" dirty="0">
-                <a:solidFill>
-                  <a:schemeClr val="tx1">
-                    <a:lumMod val="100000"/>
-                  </a:schemeClr>
-                </a:solidFill>
-                <a:latin typeface="Comic Sans MS"/>
-              </a:rPr>
-              <a:t>				</a:t>
-            </a:r>
             <a:r>
               <a:rPr lang="pt-BR" altLang="pt-BR" sz="1600" dirty="0">
                 <a:solidFill>
@@ -7905,19 +9138,14 @@
                   </a:schemeClr>
                 </a:solidFill>
               </a:rPr>
-              <a:t>Disponibilizados por tema, devendo ser resolvidos em grupos de 3</a:t>
-            </a:r>
-            <a:r>
-              <a:rPr lang="pt-BR" altLang="pt-BR" sz="1600" dirty="0">
-                <a:solidFill>
-                  <a:schemeClr val="tx1">
-                    <a:lumMod val="100000"/>
-                  </a:schemeClr>
-                </a:solidFill>
-                <a:latin typeface="Comic Sans MS"/>
-              </a:rPr>
-              <a:t>							</a:t>
-            </a:r>
+              <a:t>				Disponibilizados por tema, devendo ser resolvidos em grupos de 3							pessoas e enviadas para camilo.renno@inpe.br em data combinada</a:t>
+            </a:r>
+          </a:p>
+          <a:p>
+            <a:pPr marL="0" indent="0" algn="just" defTabSz="217488" eaLnBrk="1" hangingPunct="1">
+              <a:buNone/>
+              <a:defRPr/>
+            </a:pPr>
             <a:r>
               <a:rPr lang="pt-BR" altLang="pt-BR" sz="1600" dirty="0">
                 <a:solidFill>
@@ -7926,18 +9154,15 @@
                   </a:schemeClr>
                 </a:solidFill>
               </a:rPr>
-              <a:t>pessoas </a:t>
+              <a:t>				Devem ser entregues no formato </a:t>
             </a:r>
             <a:r>
               <a:rPr lang="pt-BR" altLang="pt-BR" sz="1600" dirty="0">
                 <a:solidFill>
-                  <a:schemeClr val="tx1">
-                    <a:lumMod val="100000"/>
-                  </a:schemeClr>
+                  <a:srgbClr val="FF0000"/>
                 </a:solidFill>
-                <a:latin typeface="Comic Sans MS"/>
               </a:rPr>
-              <a:t>e enviadas para camilo.renno@inpe.br em data combinada</a:t>
+              <a:t>PDF editável</a:t>
             </a:r>
           </a:p>
           <a:p>
@@ -7945,17 +9170,6 @@
               <a:buNone/>
               <a:defRPr/>
             </a:pPr>
-            <a:r>
-              <a:rPr lang="pt-BR" altLang="pt-BR" sz="1600" dirty="0">
-                <a:solidFill>
-                  <a:schemeClr val="tx1">
-                    <a:lumMod val="100000"/>
-                  </a:schemeClr>
-                </a:solidFill>
-                <a:latin typeface="Comic Sans MS"/>
-              </a:rPr>
-              <a:t>				</a:t>
-            </a:r>
             <a:r>
               <a:rPr lang="pt-BR" altLang="pt-BR" sz="1600" dirty="0">
                 <a:solidFill>
@@ -7964,42 +9178,7 @@
                   </a:schemeClr>
                 </a:solidFill>
               </a:rPr>
-              <a:t>Devem ser entregues no formato </a:t>
-            </a:r>
-            <a:r>
-              <a:rPr lang="pt-BR" altLang="pt-BR" sz="1600" dirty="0">
-                <a:solidFill>
-                  <a:srgbClr val="FF0000"/>
-                </a:solidFill>
-              </a:rPr>
-              <a:t>PDF editável</a:t>
-            </a:r>
-          </a:p>
-          <a:p>
-            <a:pPr marL="0" indent="0" algn="just" defTabSz="217488" eaLnBrk="1" hangingPunct="1">
-              <a:buNone/>
-              <a:defRPr/>
-            </a:pPr>
-            <a:r>
-              <a:rPr lang="pt-BR" altLang="pt-BR" sz="1600" dirty="0">
-                <a:solidFill>
-                  <a:schemeClr val="tx1">
-                    <a:lumMod val="100000"/>
-                  </a:schemeClr>
-                </a:solidFill>
-                <a:latin typeface="Comic Sans MS"/>
-              </a:rPr>
-              <a:t>					e </a:t>
-            </a:r>
-            <a:r>
-              <a:rPr lang="pt-BR" altLang="pt-BR" sz="1600" dirty="0">
-                <a:solidFill>
-                  <a:schemeClr val="tx1">
-                    <a:lumMod val="100000"/>
-                  </a:schemeClr>
-                </a:solidFill>
-              </a:rPr>
-              <a:t>não serão aceitos arquivos em outros formatos (</a:t>
+              <a:t>					e não serão aceitos arquivos em outros formatos (</a:t>
             </a:r>
             <a:r>
               <a:rPr lang="pt-BR" altLang="pt-BR" sz="1600" dirty="0" err="1">
@@ -8061,14 +9240,6 @@
               </a:rPr>
               <a:t>)</a:t>
             </a:r>
-            <a:endParaRPr lang="pt-BR" altLang="pt-BR" sz="1600" dirty="0">
-              <a:solidFill>
-                <a:schemeClr val="tx1">
-                  <a:lumMod val="100000"/>
-                </a:schemeClr>
-              </a:solidFill>
-              <a:latin typeface="Comic Sans MS"/>
-            </a:endParaRPr>
           </a:p>
           <a:p>
             <a:pPr marL="0" indent="0" algn="just" defTabSz="900113" eaLnBrk="1" hangingPunct="1">
@@ -8082,7 +9253,6 @@
                     <a:lumMod val="100000"/>
                   </a:schemeClr>
                 </a:solidFill>
-                <a:latin typeface="Comic Sans MS"/>
               </a:rPr>
               <a:t>	</a:t>
             </a:r>
@@ -8102,7 +9272,6 @@
                     <a:lumMod val="100000"/>
                   </a:schemeClr>
                 </a:solidFill>
-                <a:latin typeface="Comic Sans MS"/>
               </a:rPr>
               <a:t>Provas</a:t>
             </a:r>
@@ -8203,10 +9372,49 @@
           </a:p>
         </p:txBody>
       </p:sp>
+      <p:pic>
+        <p:nvPicPr>
+          <p:cNvPr id="7" name="Áudio 6">
+            <a:hlinkClick r:id="" action="ppaction://media"/>
+            <a:extLst>
+              <a:ext uri="{FF2B5EF4-FFF2-40B4-BE49-F238E27FC236}">
+                <a16:creationId xmlns:a16="http://schemas.microsoft.com/office/drawing/2014/main" id="{5027E456-2CF7-1AB7-D60D-16D56DB9E74B}"/>
+              </a:ext>
+            </a:extLst>
+          </p:cNvPr>
+          <p:cNvPicPr>
+            <a:picLocks noChangeAspect="1"/>
+          </p:cNvPicPr>
+          <p:nvPr>
+            <a:audioFile r:link="rId2"/>
+            <p:extLst>
+              <p:ext uri="{DAA4B4D4-6D71-4841-9C94-3DE7FCFB9230}">
+                <p14:media xmlns:p14="http://schemas.microsoft.com/office/powerpoint/2010/main" r:embed="rId1"/>
+              </p:ext>
+            </p:extLst>
+          </p:nvPr>
+        </p:nvPicPr>
+        <p:blipFill>
+          <a:blip r:embed="rId4"/>
+          <a:srcRect l="-118750" t="-118750" r="-118750" b="-118750"/>
+          <a:stretch>
+            <a:fillRect/>
+          </a:stretch>
+        </p:blipFill>
+        <p:spPr>
+          <a:xfrm>
+            <a:off x="7004304" y="4718304"/>
+            <a:ext cx="2057400" cy="2057400"/>
+          </a:xfrm>
+          <a:prstGeom prst="ellipse">
+            <a:avLst/>
+          </a:prstGeom>
+        </p:spPr>
+      </p:pic>
     </p:spTree>
     <p:extLst>
       <p:ext uri="{BB962C8B-B14F-4D97-AF65-F5344CB8AC3E}">
-        <p14:creationId xmlns:p14="http://schemas.microsoft.com/office/powerpoint/2010/main" xmlns="" val="1877254047"/>
+        <p14:creationId xmlns:p14="http://schemas.microsoft.com/office/powerpoint/2010/main" val="1877254047"/>
       </p:ext>
     </p:extLst>
   </p:cSld>
@@ -8214,17 +9422,104 @@
     <a:masterClrMapping/>
   </p:clrMapOvr>
   <mc:AlternateContent xmlns:mc="http://schemas.openxmlformats.org/markup-compatibility/2006">
-    <mc:Choice xmlns:p14="http://schemas.microsoft.com/office/powerpoint/2010/main" xmlns="" Requires="p14">
-      <p:transition spd="slow" p14:dur="2000">
+    <mc:Choice xmlns:p14="http://schemas.microsoft.com/office/powerpoint/2010/main" Requires="p14">
+      <p:transition spd="slow" p14:dur="2000" advTm="622">
         <p:cut/>
       </p:transition>
     </mc:Choice>
     <mc:Fallback>
-      <p:transition spd="slow">
+      <p:transition spd="slow" advTm="622">
         <p:cut/>
       </p:transition>
     </mc:Fallback>
   </mc:AlternateContent>
+  <p:timing>
+    <p:tnLst>
+      <p:par>
+        <p:cTn id="1" dur="indefinite" restart="never" nodeType="tmRoot">
+          <p:childTnLst>
+            <p:seq concurrent="1" nextAc="seek">
+              <p:cTn id="2" dur="indefinite" nodeType="mainSeq">
+                <p:childTnLst>
+                  <p:par>
+                    <p:cTn id="3" fill="hold">
+                      <p:stCondLst>
+                        <p:cond delay="indefinite"/>
+                        <p:cond evt="onBegin" delay="0">
+                          <p:tn val="2"/>
+                        </p:cond>
+                      </p:stCondLst>
+                      <p:childTnLst>
+                        <p:par>
+                          <p:cTn id="4" fill="hold">
+                            <p:stCondLst>
+                              <p:cond delay="0"/>
+                            </p:stCondLst>
+                            <p:childTnLst>
+                              <p:par>
+                                <p:cTn id="5" presetID="1" presetClass="mediacall" presetSubtype="0" fill="hold" nodeType="afterEffect">
+                                  <p:stCondLst>
+                                    <p:cond delay="0"/>
+                                  </p:stCondLst>
+                                  <p:childTnLst>
+                                    <p:cmd type="call" cmd="playFrom(0.0)">
+                                      <p:cBhvr>
+                                        <p:cTn id="6" dur="1" fill="hold"/>
+                                        <p:tgtEl>
+                                          <p:spTgt spid="7"/>
+                                        </p:tgtEl>
+                                      </p:cBhvr>
+                                    </p:cmd>
+                                  </p:childTnLst>
+                                </p:cTn>
+                              </p:par>
+                            </p:childTnLst>
+                          </p:cTn>
+                        </p:par>
+                      </p:childTnLst>
+                    </p:cTn>
+                  </p:par>
+                </p:childTnLst>
+              </p:cTn>
+              <p:prevCondLst>
+                <p:cond evt="onPrev" delay="0">
+                  <p:tgtEl>
+                    <p:sldTgt/>
+                  </p:tgtEl>
+                </p:cond>
+              </p:prevCondLst>
+              <p:nextCondLst>
+                <p:cond evt="onNext" delay="0">
+                  <p:tgtEl>
+                    <p:sldTgt/>
+                  </p:tgtEl>
+                </p:cond>
+              </p:nextCondLst>
+            </p:seq>
+            <p:audio isNarration="1">
+              <p:cMediaNode vol="80000" showWhenStopped="0">
+                <p:cTn id="7" fill="hold" display="0">
+                  <p:stCondLst>
+                    <p:cond delay="indefinite"/>
+                  </p:stCondLst>
+                  <p:endCondLst>
+                    <p:cond evt="onStopAudio" delay="0">
+                      <p:tgtEl>
+                        <p:sldTgt/>
+                      </p:tgtEl>
+                    </p:cond>
+                  </p:endCondLst>
+                </p:cTn>
+                <p:tgtEl>
+                  <p:spTgt spid="7"/>
+                </p:tgtEl>
+              </p:cMediaNode>
+            </p:audio>
+          </p:childTnLst>
+        </p:cTn>
+      </p:par>
+    </p:tnLst>
+  </p:timing>
 </p:sld>
 </file>
 
@@ -8254,7 +9549,7 @@
           <p:nvPr/>
         </p:nvPicPr>
         <p:blipFill>
-          <a:blip r:embed="rId2" cstate="print"/>
+          <a:blip r:embed="rId4" cstate="print"/>
           <a:stretch>
             <a:fillRect/>
           </a:stretch>
@@ -8403,16 +9698,150 @@
           </a:p>
         </p:txBody>
       </p:sp>
+      <p:pic>
+        <p:nvPicPr>
+          <p:cNvPr id="8" name="Áudio 7">
+            <a:hlinkClick r:id="" action="ppaction://media"/>
+            <a:extLst>
+              <a:ext uri="{FF2B5EF4-FFF2-40B4-BE49-F238E27FC236}">
+                <a16:creationId xmlns:a16="http://schemas.microsoft.com/office/drawing/2014/main" id="{C116E63C-A925-7AE5-14FF-BE1E92DB89DD}"/>
+              </a:ext>
+            </a:extLst>
+          </p:cNvPr>
+          <p:cNvPicPr>
+            <a:picLocks noChangeAspect="1"/>
+          </p:cNvPicPr>
+          <p:nvPr>
+            <a:audioFile r:link="rId2"/>
+            <p:extLst>
+              <p:ext uri="{DAA4B4D4-6D71-4841-9C94-3DE7FCFB9230}">
+                <p14:media xmlns:p14="http://schemas.microsoft.com/office/powerpoint/2010/main" r:embed="rId1"/>
+              </p:ext>
+            </p:extLst>
+          </p:nvPr>
+        </p:nvPicPr>
+        <p:blipFill>
+          <a:blip r:embed="rId5"/>
+          <a:srcRect l="-118750" t="-118750" r="-118750" b="-118750"/>
+          <a:stretch>
+            <a:fillRect/>
+          </a:stretch>
+        </p:blipFill>
+        <p:spPr>
+          <a:xfrm>
+            <a:off x="7004304" y="4718304"/>
+            <a:ext cx="2057400" cy="2057400"/>
+          </a:xfrm>
+          <a:prstGeom prst="ellipse">
+            <a:avLst/>
+          </a:prstGeom>
+        </p:spPr>
+      </p:pic>
     </p:spTree>
     <p:extLst>
       <p:ext uri="{BB962C8B-B14F-4D97-AF65-F5344CB8AC3E}">
-        <p14:creationId xmlns:p14="http://schemas.microsoft.com/office/powerpoint/2010/main" xmlns="" val="2239123633"/>
+        <p14:creationId xmlns:p14="http://schemas.microsoft.com/office/powerpoint/2010/main" val="2239123633"/>
       </p:ext>
     </p:extLst>
   </p:cSld>
   <p:clrMapOvr>
     <a:masterClrMapping/>
   </p:clrMapOvr>
+  <mc:AlternateContent xmlns:mc="http://schemas.openxmlformats.org/markup-compatibility/2006">
+    <mc:Choice xmlns:p14="http://schemas.microsoft.com/office/powerpoint/2010/main" Requires="p14">
+      <p:transition spd="slow" p14:dur="2000" advTm="627"/>
+    </mc:Choice>
+    <mc:Fallback>
+      <p:transition spd="slow" advTm="627"/>
+    </mc:Fallback>
+  </mc:AlternateContent>
+  <p:timing>
+    <p:tnLst>
+      <p:par>
+        <p:cTn id="1" dur="indefinite" restart="never" nodeType="tmRoot">
+          <p:childTnLst>
+            <p:seq concurrent="1" nextAc="seek">
+              <p:cTn id="2" dur="indefinite" nodeType="mainSeq">
+                <p:childTnLst>
+                  <p:par>
+                    <p:cTn id="3" fill="hold">
+                      <p:stCondLst>
+                        <p:cond delay="indefinite"/>
+                        <p:cond evt="onBegin" delay="0">
+                          <p:tn val="2"/>
+                        </p:cond>
+                      </p:stCondLst>
+                      <p:childTnLst>
+                        <p:par>
+                          <p:cTn id="4" fill="hold">
+                            <p:stCondLst>
+                              <p:cond delay="0"/>
+                            </p:stCondLst>
+                            <p:childTnLst>
+                              <p:par>
+                                <p:cTn id="5" presetID="1" presetClass="mediacall" presetSubtype="0" fill="hold" nodeType="afterEffect">
+                                  <p:stCondLst>
+                                    <p:cond delay="0"/>
+                                  </p:stCondLst>
+                                  <p:childTnLst>
+                                    <p:cmd type="call" cmd="playFrom(0.0)">
+                                      <p:cBhvr>
+                                        <p:cTn id="6" dur="1" fill="hold"/>
+                                        <p:tgtEl>
+                                          <p:spTgt spid="8"/>
+                                        </p:tgtEl>
+                                      </p:cBhvr>
+                                    </p:cmd>
+                                  </p:childTnLst>
+                                </p:cTn>
+                              </p:par>
+                            </p:childTnLst>
+                          </p:cTn>
+                        </p:par>
+                      </p:childTnLst>
+                    </p:cTn>
+                  </p:par>
+                </p:childTnLst>
+              </p:cTn>
+              <p:prevCondLst>
+                <p:cond evt="onPrev" delay="0">
+                  <p:tgtEl>
+                    <p:sldTgt/>
+                  </p:tgtEl>
+                </p:cond>
+              </p:prevCondLst>
+              <p:nextCondLst>
+                <p:cond evt="onNext" delay="0">
+                  <p:tgtEl>
+                    <p:sldTgt/>
+                  </p:tgtEl>
+                </p:cond>
+              </p:nextCondLst>
+            </p:seq>
+            <p:audio isNarration="1">
+              <p:cMediaNode vol="80000" showWhenStopped="0">
+                <p:cTn id="7" fill="hold" display="0">
+                  <p:stCondLst>
+                    <p:cond delay="indefinite"/>
+                  </p:stCondLst>
+                  <p:endCondLst>
+                    <p:cond evt="onStopAudio" delay="0">
+                      <p:tgtEl>
+                        <p:sldTgt/>
+                      </p:tgtEl>
+                    </p:cond>
+                  </p:endCondLst>
+                </p:cTn>
+                <p:tgtEl>
+                  <p:spTgt spid="8"/>
+                </p:tgtEl>
+              </p:cMediaNode>
+            </p:audio>
+          </p:childTnLst>
+        </p:cTn>
+      </p:par>
+    </p:tnLst>
+  </p:timing>
 </p:sld>
 </file>
 
@@ -8442,20 +9871,20 @@
           <p:nvPr/>
         </p:nvPicPr>
         <p:blipFill rotWithShape="1">
-          <a:blip r:embed="rId2" cstate="print">
+          <a:blip r:embed="rId4" cstate="print">
             <a:extLst>
               <a:ext uri="{28A0092B-C50C-407E-A947-70E740481C1C}">
-                <a14:useLocalDpi xmlns:a14="http://schemas.microsoft.com/office/drawing/2010/main" xmlns="" val="0"/>
+                <a14:useLocalDpi xmlns:a14="http://schemas.microsoft.com/office/drawing/2010/main" val="0"/>
               </a:ext>
             </a:extLst>
           </a:blip>
-          <a:srcRect b="26075"/>
+          <a:srcRect/>
           <a:stretch/>
         </p:blipFill>
         <p:spPr>
           <a:xfrm>
             <a:off x="557213" y="1038225"/>
-            <a:ext cx="8010525" cy="4767039"/>
+            <a:ext cx="8010525" cy="4551015"/>
           </a:xfrm>
           <a:prstGeom prst="rect">
             <a:avLst/>
@@ -8501,7 +9930,7 @@
         <p:spPr>
           <a:xfrm>
             <a:off x="557213" y="699671"/>
-            <a:ext cx="3897221" cy="338554"/>
+            <a:ext cx="4411785" cy="338554"/>
           </a:xfrm>
           <a:prstGeom prst="rect">
             <a:avLst/>
@@ -8518,7 +9947,7 @@
                 <a:latin typeface="Arial" panose="020B0604020202020204" pitchFamily="34" charset="0"/>
                 <a:cs typeface="Arial" panose="020B0604020202020204" pitchFamily="34" charset="0"/>
               </a:rPr>
-              <a:t>http://www.dpi.inpe.br/~camilo/estatistica</a:t>
+              <a:t>http://urlib.net/8JMKD2USNRW34T/4D6DMD2</a:t>
             </a:r>
             <a:endParaRPr lang="pt-BR" dirty="0">
               <a:latin typeface="Arial" panose="020B0604020202020204" pitchFamily="34" charset="0"/>
@@ -8527,16 +9956,150 @@
           </a:p>
         </p:txBody>
       </p:sp>
+      <p:pic>
+        <p:nvPicPr>
+          <p:cNvPr id="9" name="Áudio 8">
+            <a:hlinkClick r:id="" action="ppaction://media"/>
+            <a:extLst>
+              <a:ext uri="{FF2B5EF4-FFF2-40B4-BE49-F238E27FC236}">
+                <a16:creationId xmlns:a16="http://schemas.microsoft.com/office/drawing/2014/main" id="{E3A7E23F-2F3C-AAF2-CA7E-D1FD75B53958}"/>
+              </a:ext>
+            </a:extLst>
+          </p:cNvPr>
+          <p:cNvPicPr>
+            <a:picLocks noChangeAspect="1"/>
+          </p:cNvPicPr>
+          <p:nvPr>
+            <a:audioFile r:link="rId2"/>
+            <p:extLst>
+              <p:ext uri="{DAA4B4D4-6D71-4841-9C94-3DE7FCFB9230}">
+                <p14:media xmlns:p14="http://schemas.microsoft.com/office/powerpoint/2010/main" r:embed="rId1"/>
+              </p:ext>
+            </p:extLst>
+          </p:nvPr>
+        </p:nvPicPr>
+        <p:blipFill>
+          <a:blip r:embed="rId5"/>
+          <a:srcRect l="-118750" t="-118750" r="-118750" b="-118750"/>
+          <a:stretch>
+            <a:fillRect/>
+          </a:stretch>
+        </p:blipFill>
+        <p:spPr>
+          <a:xfrm>
+            <a:off x="7004304" y="4718304"/>
+            <a:ext cx="2057400" cy="2057400"/>
+          </a:xfrm>
+          <a:prstGeom prst="ellipse">
+            <a:avLst/>
+          </a:prstGeom>
+        </p:spPr>
+      </p:pic>
     </p:spTree>
     <p:extLst>
       <p:ext uri="{BB962C8B-B14F-4D97-AF65-F5344CB8AC3E}">
-        <p14:creationId xmlns:p14="http://schemas.microsoft.com/office/powerpoint/2010/main" xmlns="" val="2956632756"/>
+        <p14:creationId xmlns:p14="http://schemas.microsoft.com/office/powerpoint/2010/main" val="2956632756"/>
       </p:ext>
     </p:extLst>
   </p:cSld>
   <p:clrMapOvr>
     <a:masterClrMapping/>
   </p:clrMapOvr>
+  <mc:AlternateContent xmlns:mc="http://schemas.openxmlformats.org/markup-compatibility/2006">
+    <mc:Choice xmlns:p14="http://schemas.microsoft.com/office/powerpoint/2010/main" Requires="p14">
+      <p:transition spd="slow" p14:dur="2000" advTm="645"/>
+    </mc:Choice>
+    <mc:Fallback>
+      <p:transition spd="slow" advTm="645"/>
+    </mc:Fallback>
+  </mc:AlternateContent>
+  <p:timing>
+    <p:tnLst>
+      <p:par>
+        <p:cTn id="1" dur="indefinite" restart="never" nodeType="tmRoot">
+          <p:childTnLst>
+            <p:seq concurrent="1" nextAc="seek">
+              <p:cTn id="2" dur="indefinite" nodeType="mainSeq">
+                <p:childTnLst>
+                  <p:par>
+                    <p:cTn id="3" fill="hold">
+                      <p:stCondLst>
+                        <p:cond delay="indefinite"/>
+                        <p:cond evt="onBegin" delay="0">
+                          <p:tn val="2"/>
+                        </p:cond>
+                      </p:stCondLst>
+                      <p:childTnLst>
+                        <p:par>
+                          <p:cTn id="4" fill="hold">
+                            <p:stCondLst>
+                              <p:cond delay="0"/>
+                            </p:stCondLst>
+                            <p:childTnLst>
+                              <p:par>
+                                <p:cTn id="5" presetID="1" presetClass="mediacall" presetSubtype="0" fill="hold" nodeType="afterEffect">
+                                  <p:stCondLst>
+                                    <p:cond delay="0"/>
+                                  </p:stCondLst>
+                                  <p:childTnLst>
+                                    <p:cmd type="call" cmd="playFrom(0.0)">
+                                      <p:cBhvr>
+                                        <p:cTn id="6" dur="1" fill="hold"/>
+                                        <p:tgtEl>
+                                          <p:spTgt spid="9"/>
+                                        </p:tgtEl>
+                                      </p:cBhvr>
+                                    </p:cmd>
+                                  </p:childTnLst>
+                                </p:cTn>
+                              </p:par>
+                            </p:childTnLst>
+                          </p:cTn>
+                        </p:par>
+                      </p:childTnLst>
+                    </p:cTn>
+                  </p:par>
+                </p:childTnLst>
+              </p:cTn>
+              <p:prevCondLst>
+                <p:cond evt="onPrev" delay="0">
+                  <p:tgtEl>
+                    <p:sldTgt/>
+                  </p:tgtEl>
+                </p:cond>
+              </p:prevCondLst>
+              <p:nextCondLst>
+                <p:cond evt="onNext" delay="0">
+                  <p:tgtEl>
+                    <p:sldTgt/>
+                  </p:tgtEl>
+                </p:cond>
+              </p:nextCondLst>
+            </p:seq>
+            <p:audio isNarration="1">
+              <p:cMediaNode vol="80000" showWhenStopped="0">
+                <p:cTn id="7" fill="hold" display="0">
+                  <p:stCondLst>
+                    <p:cond delay="indefinite"/>
+                  </p:stCondLst>
+                  <p:endCondLst>
+                    <p:cond evt="onStopAudio" delay="0">
+                      <p:tgtEl>
+                        <p:sldTgt/>
+                      </p:tgtEl>
+                    </p:cond>
+                  </p:endCondLst>
+                </p:cTn>
+                <p:tgtEl>
+                  <p:spTgt spid="9"/>
+                </p:tgtEl>
+              </p:cMediaNode>
+            </p:audio>
+          </p:childTnLst>
+        </p:cTn>
+      </p:par>
+    </p:tnLst>
+  </p:timing>
 </p:sld>
 </file>
 
@@ -8566,7 +10129,7 @@
           <p:nvPr/>
         </p:nvPicPr>
         <p:blipFill>
-          <a:blip r:embed="rId2" cstate="print"/>
+          <a:blip r:embed="rId5" cstate="print"/>
           <a:stretch>
             <a:fillRect/>
           </a:stretch>
@@ -8653,7 +10216,9 @@
           <a:lstStyle/>
           <a:p>
             <a:pPr algn="ctr"/>
-            <a:endParaRPr lang="pt-BR"/>
+            <a:endParaRPr lang="pt-BR" dirty="0">
+              <a:latin typeface="Tahoma" panose="020B0604030504040204" pitchFamily="34" charset="0"/>
+            </a:endParaRPr>
           </a:p>
         </p:txBody>
       </p:sp>
@@ -8699,7 +10264,9 @@
           <a:lstStyle/>
           <a:p>
             <a:pPr algn="ctr"/>
-            <a:endParaRPr lang="pt-BR"/>
+            <a:endParaRPr lang="pt-BR" dirty="0">
+              <a:latin typeface="Tahoma" panose="020B0604030504040204" pitchFamily="34" charset="0"/>
+            </a:endParaRPr>
           </a:p>
         </p:txBody>
       </p:sp>
@@ -8745,7 +10312,9 @@
           <a:lstStyle/>
           <a:p>
             <a:pPr algn="ctr"/>
-            <a:endParaRPr lang="pt-BR"/>
+            <a:endParaRPr lang="pt-BR" dirty="0">
+              <a:latin typeface="Tahoma" panose="020B0604030504040204" pitchFamily="34" charset="0"/>
+            </a:endParaRPr>
           </a:p>
         </p:txBody>
       </p:sp>
@@ -8791,20 +10360,72 @@
           <a:lstStyle/>
           <a:p>
             <a:pPr algn="ctr"/>
-            <a:endParaRPr lang="pt-BR"/>
+            <a:endParaRPr lang="pt-BR" dirty="0">
+              <a:latin typeface="Tahoma" panose="020B0604030504040204" pitchFamily="34" charset="0"/>
+            </a:endParaRPr>
           </a:p>
         </p:txBody>
       </p:sp>
+      <p:pic>
+        <p:nvPicPr>
+          <p:cNvPr id="18" name="Áudio 17">
+            <a:hlinkClick r:id="" action="ppaction://media"/>
+            <a:extLst>
+              <a:ext uri="{FF2B5EF4-FFF2-40B4-BE49-F238E27FC236}">
+                <a16:creationId xmlns:a16="http://schemas.microsoft.com/office/drawing/2014/main" id="{B4D12F94-1633-C5AD-54A8-5B22A2EF6E43}"/>
+              </a:ext>
+            </a:extLst>
+          </p:cNvPr>
+          <p:cNvPicPr>
+            <a:picLocks noChangeAspect="1"/>
+          </p:cNvPicPr>
+          <p:nvPr>
+            <a:audioFile r:link="rId3"/>
+            <p:extLst>
+              <p:ext uri="{DAA4B4D4-6D71-4841-9C94-3DE7FCFB9230}">
+                <p14:media xmlns:p14="http://schemas.microsoft.com/office/powerpoint/2010/main" r:embed="rId2"/>
+              </p:ext>
+            </p:extLst>
+          </p:nvPr>
+        </p:nvPicPr>
+        <p:blipFill>
+          <a:blip r:embed="rId6"/>
+          <a:srcRect l="-118750" t="-118750" r="-118750" b="-118750"/>
+          <a:stretch>
+            <a:fillRect/>
+          </a:stretch>
+        </p:blipFill>
+        <p:spPr>
+          <a:xfrm>
+            <a:off x="7004304" y="4718304"/>
+            <a:ext cx="2057400" cy="2057400"/>
+          </a:xfrm>
+          <a:prstGeom prst="ellipse">
+            <a:avLst/>
+          </a:prstGeom>
+        </p:spPr>
+      </p:pic>
     </p:spTree>
+    <p:custDataLst>
+      <p:tags r:id="rId1"/>
+    </p:custDataLst>
     <p:extLst>
       <p:ext uri="{BB962C8B-B14F-4D97-AF65-F5344CB8AC3E}">
-        <p14:creationId xmlns:p14="http://schemas.microsoft.com/office/powerpoint/2010/main" xmlns="" val="3928394977"/>
+        <p14:creationId xmlns:p14="http://schemas.microsoft.com/office/powerpoint/2010/main" val="3928394977"/>
       </p:ext>
     </p:extLst>
   </p:cSld>
   <p:clrMapOvr>
     <a:masterClrMapping/>
   </p:clrMapOvr>
+  <mc:AlternateContent xmlns:mc="http://schemas.openxmlformats.org/markup-compatibility/2006">
+    <mc:Choice xmlns:p14="http://schemas.microsoft.com/office/powerpoint/2010/main" Requires="p14">
+      <p:transition spd="slow" p14:dur="2000" advTm="2006"/>
+    </mc:Choice>
+    <mc:Fallback>
+      <p:transition spd="slow" advTm="2006"/>
+    </mc:Fallback>
+  </mc:AlternateContent>
   <p:timing>
     <p:tnLst>
       <p:par>
@@ -8817,6 +10438,9 @@
                     <p:cTn id="3" fill="hold">
                       <p:stCondLst>
                         <p:cond delay="indefinite"/>
+                        <p:cond evt="onBegin" delay="0">
+                          <p:tn val="2"/>
+                        </p:cond>
                       </p:stCondLst>
                       <p:childTnLst>
                         <p:par>
@@ -8826,46 +10450,20 @@
                             </p:stCondLst>
                             <p:childTnLst>
                               <p:par>
-                                <p:cTn id="5" presetID="1" presetClass="entr" presetSubtype="0" fill="hold" grpId="0" nodeType="clickEffect">
+                                <p:cTn id="5" presetID="1" presetClass="mediacall" presetSubtype="0" fill="hold" nodeType="afterEffect">
                                   <p:stCondLst>
                                     <p:cond delay="0"/>
                                   </p:stCondLst>
                                   <p:childTnLst>
-                                    <p:set>
+                                    <p:cmd type="call" cmd="playFrom(0.0)">
                                       <p:cBhvr>
-                                        <p:cTn id="6" dur="1" fill="hold">
-                                          <p:stCondLst>
-                                            <p:cond delay="0"/>
-                                          </p:stCondLst>
-                                        </p:cTn>
+                                        <p:cTn id="6" dur="1" fill="hold"/>
                                         <p:tgtEl>
-                                          <p:spTgt spid="4"/>
+                                          <p:spTgt spid="18"/>
                                         </p:tgtEl>
-                                        <p:attrNameLst>
-                                          <p:attrName>style.visibility</p:attrName>
-                                        </p:attrNameLst>
                                       </p:cBhvr>
-                                      <p:to>
-                                        <p:strVal val="visible"/>
-                                      </p:to>
-                                    </p:set>
+                                    </p:cmd>
                                   </p:childTnLst>
-                                  <p:subTnLst>
-                                    <p:set>
-                                      <p:cBhvr override="childStyle">
-                                        <p:cTn dur="1" fill="hold" display="0" masterRel="nextClick" afterEffect="1"/>
-                                        <p:tgtEl>
-                                          <p:spTgt spid="4"/>
-                                        </p:tgtEl>
-                                        <p:attrNameLst>
-                                          <p:attrName>style.visibility</p:attrName>
-                                        </p:attrNameLst>
-                                      </p:cBhvr>
-                                      <p:to>
-                                        <p:strVal val="hidden"/>
-                                      </p:to>
-                                    </p:set>
-                                  </p:subTnLst>
                                 </p:cTn>
                               </p:par>
                             </p:childTnLst>
@@ -8900,7 +10498,7 @@
                                           </p:stCondLst>
                                         </p:cTn>
                                         <p:tgtEl>
-                                          <p:spTgt spid="9"/>
+                                          <p:spTgt spid="4"/>
                                         </p:tgtEl>
                                         <p:attrNameLst>
                                           <p:attrName>style.visibility</p:attrName>
@@ -8916,7 +10514,7 @@
                                       <p:cBhvr override="childStyle">
                                         <p:cTn dur="1" fill="hold" display="0" masterRel="nextClick" afterEffect="1"/>
                                         <p:tgtEl>
-                                          <p:spTgt spid="9"/>
+                                          <p:spTgt spid="4"/>
                                         </p:tgtEl>
                                         <p:attrNameLst>
                                           <p:attrName>style.visibility</p:attrName>
@@ -8961,7 +10559,7 @@
                                           </p:stCondLst>
                                         </p:cTn>
                                         <p:tgtEl>
-                                          <p:spTgt spid="11"/>
+                                          <p:spTgt spid="9"/>
                                         </p:tgtEl>
                                         <p:attrNameLst>
                                           <p:attrName>style.visibility</p:attrName>
@@ -8977,7 +10575,7 @@
                                       <p:cBhvr override="childStyle">
                                         <p:cTn dur="1" fill="hold" display="0" masterRel="nextClick" afterEffect="1"/>
                                         <p:tgtEl>
-                                          <p:spTgt spid="11"/>
+                                          <p:spTgt spid="9"/>
                                         </p:tgtEl>
                                         <p:attrNameLst>
                                           <p:attrName>style.visibility</p:attrName>
@@ -9022,6 +10620,67 @@
                                           </p:stCondLst>
                                         </p:cTn>
                                         <p:tgtEl>
+                                          <p:spTgt spid="11"/>
+                                        </p:tgtEl>
+                                        <p:attrNameLst>
+                                          <p:attrName>style.visibility</p:attrName>
+                                        </p:attrNameLst>
+                                      </p:cBhvr>
+                                      <p:to>
+                                        <p:strVal val="visible"/>
+                                      </p:to>
+                                    </p:set>
+                                  </p:childTnLst>
+                                  <p:subTnLst>
+                                    <p:set>
+                                      <p:cBhvr override="childStyle">
+                                        <p:cTn dur="1" fill="hold" display="0" masterRel="nextClick" afterEffect="1"/>
+                                        <p:tgtEl>
+                                          <p:spTgt spid="11"/>
+                                        </p:tgtEl>
+                                        <p:attrNameLst>
+                                          <p:attrName>style.visibility</p:attrName>
+                                        </p:attrNameLst>
+                                      </p:cBhvr>
+                                      <p:to>
+                                        <p:strVal val="hidden"/>
+                                      </p:to>
+                                    </p:set>
+                                  </p:subTnLst>
+                                </p:cTn>
+                              </p:par>
+                            </p:childTnLst>
+                          </p:cTn>
+                        </p:par>
+                      </p:childTnLst>
+                    </p:cTn>
+                  </p:par>
+                  <p:par>
+                    <p:cTn id="19" fill="hold">
+                      <p:stCondLst>
+                        <p:cond delay="indefinite"/>
+                      </p:stCondLst>
+                      <p:childTnLst>
+                        <p:par>
+                          <p:cTn id="20" fill="hold">
+                            <p:stCondLst>
+                              <p:cond delay="0"/>
+                            </p:stCondLst>
+                            <p:childTnLst>
+                              <p:par>
+                                <p:cTn id="21" presetID="1" presetClass="entr" presetSubtype="0" fill="hold" grpId="0" nodeType="clickEffect">
+                                  <p:stCondLst>
+                                    <p:cond delay="0"/>
+                                  </p:stCondLst>
+                                  <p:childTnLst>
+                                    <p:set>
+                                      <p:cBhvr>
+                                        <p:cTn id="22" dur="1" fill="hold">
+                                          <p:stCondLst>
+                                            <p:cond delay="0"/>
+                                          </p:stCondLst>
+                                        </p:cTn>
+                                        <p:tgtEl>
                                           <p:spTgt spid="10"/>
                                         </p:tgtEl>
                                         <p:attrNameLst>
@@ -9058,6 +10717,25 @@
                 </p:cond>
               </p:nextCondLst>
             </p:seq>
+            <p:audio isNarration="1">
+              <p:cMediaNode vol="80000" showWhenStopped="0">
+                <p:cTn id="23" fill="hold" display="0">
+                  <p:stCondLst>
+                    <p:cond delay="indefinite"/>
+                  </p:stCondLst>
+                  <p:endCondLst>
+                    <p:cond evt="onStopAudio" delay="0">
+                      <p:tgtEl>
+                        <p:sldTgt/>
+                      </p:tgtEl>
+                    </p:cond>
+                  </p:endCondLst>
+                </p:cTn>
+                <p:tgtEl>
+                  <p:spTgt spid="18"/>
+                </p:tgtEl>
+              </p:cMediaNode>
+            </p:audio>
           </p:childTnLst>
         </p:cTn>
       </p:par>
@@ -9070,6 +10748,18 @@
     </p:bldLst>
   </p:timing>
 </p:sld>
+</file>
+
+<file path=ppt/tags/tag1.xml><?xml version="1.0" encoding="utf-8"?>
+<p:tagLst xmlns:a="http://schemas.openxmlformats.org/drawingml/2006/main" xmlns:r="http://schemas.openxmlformats.org/officeDocument/2006/relationships" xmlns:p="http://schemas.openxmlformats.org/presentationml/2006/main">
+  <p:tag name="TIMING" val="|3.5|1.7"/>
+</p:tagLst>
+</file>
+
+<file path=ppt/tags/tag2.xml><?xml version="1.0" encoding="utf-8"?>
+<p:tagLst xmlns:a="http://schemas.openxmlformats.org/drawingml/2006/main" xmlns:r="http://schemas.openxmlformats.org/officeDocument/2006/relationships" xmlns:p="http://schemas.openxmlformats.org/presentationml/2006/main">
+  <p:tag name="TIMING" val="|0.5|0.6|0.3|0.2"/>
+</p:tagLst>
 </file>
 
 <file path=ppt/theme/theme1.xml><?xml version="1.0" encoding="utf-8"?>

--- a/ppt/00Apres.pptx
+++ b/ppt/00Apres.pptx
@@ -167,7 +167,7 @@
 <file path=ppt/revisionInfo.xml><?xml version="1.0" encoding="utf-8"?>
 <p1510:revInfo xmlns:a="http://schemas.openxmlformats.org/drawingml/2006/main" xmlns:r="http://schemas.openxmlformats.org/officeDocument/2006/relationships" xmlns:p1510="http://schemas.microsoft.com/office/powerpoint/2015/10/main">
   <p1510:revLst>
-    <p1510:client id="{435231E9-EFF7-4B35-A063-2CE70FCF688A}" v="3" dt="2025-06-09T12:42:30.593"/>
+    <p1510:client id="{435231E9-EFF7-4B35-A063-2CE70FCF688A}" v="4" dt="2025-06-12T14:30:44.493"/>
   </p1510:revLst>
 </p1510:revInfo>
 </file>
@@ -193,12 +193,12 @@
   <pc:docChgLst>
     <pc:chgData name="Camilo Daleles Rennó" userId="eac9aab033b2f962" providerId="LiveId" clId="{435231E9-EFF7-4B35-A063-2CE70FCF688A}"/>
     <pc:docChg chg="modSld">
-      <pc:chgData name="Camilo Daleles Rennó" userId="eac9aab033b2f962" providerId="LiveId" clId="{435231E9-EFF7-4B35-A063-2CE70FCF688A}" dt="2025-06-09T13:00:50.505" v="12" actId="6549"/>
+      <pc:chgData name="Camilo Daleles Rennó" userId="eac9aab033b2f962" providerId="LiveId" clId="{435231E9-EFF7-4B35-A063-2CE70FCF688A}" dt="2025-06-12T14:30:44.477" v="13"/>
       <pc:docMkLst>
         <pc:docMk/>
       </pc:docMkLst>
       <pc:sldChg chg="addSp delSp modSp mod modTransition modAnim">
-        <pc:chgData name="Camilo Daleles Rennó" userId="eac9aab033b2f962" providerId="LiveId" clId="{435231E9-EFF7-4B35-A063-2CE70FCF688A}" dt="2025-06-09T13:00:50.505" v="12" actId="6549"/>
+        <pc:chgData name="Camilo Daleles Rennó" userId="eac9aab033b2f962" providerId="LiveId" clId="{435231E9-EFF7-4B35-A063-2CE70FCF688A}" dt="2025-06-12T14:30:44.477" v="13"/>
         <pc:sldMkLst>
           <pc:docMk/>
           <pc:sldMk cId="0" sldId="345"/>
@@ -212,23 +212,7 @@
           </ac:spMkLst>
         </pc:spChg>
         <pc:picChg chg="add del mod">
-          <ac:chgData name="Camilo Daleles Rennó" userId="eac9aab033b2f962" providerId="LiveId" clId="{435231E9-EFF7-4B35-A063-2CE70FCF688A}" dt="2025-06-09T12:41:56.159" v="10"/>
-          <ac:picMkLst>
-            <pc:docMk/>
-            <pc:sldMk cId="0" sldId="345"/>
-            <ac:picMk id="8" creationId="{D286D80D-6621-4F5B-C06A-73B862E84597}"/>
-          </ac:picMkLst>
-        </pc:picChg>
-        <pc:picChg chg="add del mod ord">
-          <ac:chgData name="Camilo Daleles Rennó" userId="eac9aab033b2f962" providerId="LiveId" clId="{435231E9-EFF7-4B35-A063-2CE70FCF688A}" dt="2025-06-09T12:42:30.593" v="11"/>
-          <ac:picMkLst>
-            <pc:docMk/>
-            <pc:sldMk cId="0" sldId="345"/>
-            <ac:picMk id="10" creationId="{70ABD6FB-B281-E700-6D16-D523D81C1859}"/>
-          </ac:picMkLst>
-        </pc:picChg>
-        <pc:picChg chg="add mod">
-          <ac:chgData name="Camilo Daleles Rennó" userId="eac9aab033b2f962" providerId="LiveId" clId="{435231E9-EFF7-4B35-A063-2CE70FCF688A}" dt="2025-06-09T12:42:30.593" v="11"/>
+          <ac:chgData name="Camilo Daleles Rennó" userId="eac9aab033b2f962" providerId="LiveId" clId="{435231E9-EFF7-4B35-A063-2CE70FCF688A}" dt="2025-06-12T14:30:44.477" v="13"/>
           <ac:picMkLst>
             <pc:docMk/>
             <pc:sldMk cId="0" sldId="345"/>
@@ -237,29 +221,13 @@
         </pc:picChg>
       </pc:sldChg>
       <pc:sldChg chg="addSp delSp modSp mod modTransition modAnim">
-        <pc:chgData name="Camilo Daleles Rennó" userId="eac9aab033b2f962" providerId="LiveId" clId="{435231E9-EFF7-4B35-A063-2CE70FCF688A}" dt="2025-06-09T12:42:30.593" v="11"/>
+        <pc:chgData name="Camilo Daleles Rennó" userId="eac9aab033b2f962" providerId="LiveId" clId="{435231E9-EFF7-4B35-A063-2CE70FCF688A}" dt="2025-06-12T14:30:44.477" v="13"/>
         <pc:sldMkLst>
           <pc:docMk/>
           <pc:sldMk cId="0" sldId="366"/>
         </pc:sldMkLst>
         <pc:picChg chg="add del mod">
-          <ac:chgData name="Camilo Daleles Rennó" userId="eac9aab033b2f962" providerId="LiveId" clId="{435231E9-EFF7-4B35-A063-2CE70FCF688A}" dt="2025-06-09T12:41:56.159" v="10"/>
-          <ac:picMkLst>
-            <pc:docMk/>
-            <pc:sldMk cId="0" sldId="366"/>
-            <ac:picMk id="5" creationId="{7B531300-187C-47EE-0127-8A4BF0F7A55A}"/>
-          </ac:picMkLst>
-        </pc:picChg>
-        <pc:picChg chg="add del mod ord">
-          <ac:chgData name="Camilo Daleles Rennó" userId="eac9aab033b2f962" providerId="LiveId" clId="{435231E9-EFF7-4B35-A063-2CE70FCF688A}" dt="2025-06-09T12:42:30.593" v="11"/>
-          <ac:picMkLst>
-            <pc:docMk/>
-            <pc:sldMk cId="0" sldId="366"/>
-            <ac:picMk id="6" creationId="{D68B8141-BC9D-7B68-7620-797A4AC25EE9}"/>
-          </ac:picMkLst>
-        </pc:picChg>
-        <pc:picChg chg="add mod">
-          <ac:chgData name="Camilo Daleles Rennó" userId="eac9aab033b2f962" providerId="LiveId" clId="{435231E9-EFF7-4B35-A063-2CE70FCF688A}" dt="2025-06-09T12:42:30.593" v="11"/>
+          <ac:chgData name="Camilo Daleles Rennó" userId="eac9aab033b2f962" providerId="LiveId" clId="{435231E9-EFF7-4B35-A063-2CE70FCF688A}" dt="2025-06-12T14:30:44.477" v="13"/>
           <ac:picMkLst>
             <pc:docMk/>
             <pc:sldMk cId="0" sldId="366"/>
@@ -268,29 +236,13 @@
         </pc:picChg>
       </pc:sldChg>
       <pc:sldChg chg="addSp delSp modSp mod modTransition modAnim">
-        <pc:chgData name="Camilo Daleles Rennó" userId="eac9aab033b2f962" providerId="LiveId" clId="{435231E9-EFF7-4B35-A063-2CE70FCF688A}" dt="2025-06-09T12:42:30.593" v="11"/>
+        <pc:chgData name="Camilo Daleles Rennó" userId="eac9aab033b2f962" providerId="LiveId" clId="{435231E9-EFF7-4B35-A063-2CE70FCF688A}" dt="2025-06-12T14:30:44.477" v="13"/>
         <pc:sldMkLst>
           <pc:docMk/>
           <pc:sldMk cId="33346296" sldId="374"/>
         </pc:sldMkLst>
         <pc:picChg chg="add del mod">
-          <ac:chgData name="Camilo Daleles Rennó" userId="eac9aab033b2f962" providerId="LiveId" clId="{435231E9-EFF7-4B35-A063-2CE70FCF688A}" dt="2025-06-09T12:41:56.159" v="10"/>
-          <ac:picMkLst>
-            <pc:docMk/>
-            <pc:sldMk cId="33346296" sldId="374"/>
-            <ac:picMk id="8" creationId="{8077F5D0-7FF3-7C3B-93E5-AB355AB072F8}"/>
-          </ac:picMkLst>
-        </pc:picChg>
-        <pc:picChg chg="add del mod ord">
-          <ac:chgData name="Camilo Daleles Rennó" userId="eac9aab033b2f962" providerId="LiveId" clId="{435231E9-EFF7-4B35-A063-2CE70FCF688A}" dt="2025-06-09T12:42:30.593" v="11"/>
-          <ac:picMkLst>
-            <pc:docMk/>
-            <pc:sldMk cId="33346296" sldId="374"/>
-            <ac:picMk id="10" creationId="{9F8761B9-D9AD-5B7C-E239-4B29AEC42F95}"/>
-          </ac:picMkLst>
-        </pc:picChg>
-        <pc:picChg chg="add mod">
-          <ac:chgData name="Camilo Daleles Rennó" userId="eac9aab033b2f962" providerId="LiveId" clId="{435231E9-EFF7-4B35-A063-2CE70FCF688A}" dt="2025-06-09T12:42:30.593" v="11"/>
+          <ac:chgData name="Camilo Daleles Rennó" userId="eac9aab033b2f962" providerId="LiveId" clId="{435231E9-EFF7-4B35-A063-2CE70FCF688A}" dt="2025-06-12T14:30:44.477" v="13"/>
           <ac:picMkLst>
             <pc:docMk/>
             <pc:sldMk cId="33346296" sldId="374"/>
@@ -299,29 +251,13 @@
         </pc:picChg>
       </pc:sldChg>
       <pc:sldChg chg="addSp delSp modSp mod modTransition modAnim">
-        <pc:chgData name="Camilo Daleles Rennó" userId="eac9aab033b2f962" providerId="LiveId" clId="{435231E9-EFF7-4B35-A063-2CE70FCF688A}" dt="2025-06-09T12:42:30.593" v="11"/>
+        <pc:chgData name="Camilo Daleles Rennó" userId="eac9aab033b2f962" providerId="LiveId" clId="{435231E9-EFF7-4B35-A063-2CE70FCF688A}" dt="2025-06-12T14:30:44.477" v="13"/>
         <pc:sldMkLst>
           <pc:docMk/>
           <pc:sldMk cId="1916879497" sldId="375"/>
         </pc:sldMkLst>
         <pc:picChg chg="add del mod">
-          <ac:chgData name="Camilo Daleles Rennó" userId="eac9aab033b2f962" providerId="LiveId" clId="{435231E9-EFF7-4B35-A063-2CE70FCF688A}" dt="2025-06-09T12:41:56.159" v="10"/>
-          <ac:picMkLst>
-            <pc:docMk/>
-            <pc:sldMk cId="1916879497" sldId="375"/>
-            <ac:picMk id="79" creationId="{D568EDE2-3457-B433-030C-DA8566EF2575}"/>
-          </ac:picMkLst>
-        </pc:picChg>
-        <pc:picChg chg="add del mod ord">
-          <ac:chgData name="Camilo Daleles Rennó" userId="eac9aab033b2f962" providerId="LiveId" clId="{435231E9-EFF7-4B35-A063-2CE70FCF688A}" dt="2025-06-09T12:42:30.593" v="11"/>
-          <ac:picMkLst>
-            <pc:docMk/>
-            <pc:sldMk cId="1916879497" sldId="375"/>
-            <ac:picMk id="80" creationId="{C7A7DD8F-E39D-2ACA-8BC5-C8E6BB74409E}"/>
-          </ac:picMkLst>
-        </pc:picChg>
-        <pc:picChg chg="add mod">
-          <ac:chgData name="Camilo Daleles Rennó" userId="eac9aab033b2f962" providerId="LiveId" clId="{435231E9-EFF7-4B35-A063-2CE70FCF688A}" dt="2025-06-09T12:42:30.593" v="11"/>
+          <ac:chgData name="Camilo Daleles Rennó" userId="eac9aab033b2f962" providerId="LiveId" clId="{435231E9-EFF7-4B35-A063-2CE70FCF688A}" dt="2025-06-12T14:30:44.477" v="13"/>
           <ac:picMkLst>
             <pc:docMk/>
             <pc:sldMk cId="1916879497" sldId="375"/>
@@ -330,29 +266,13 @@
         </pc:picChg>
       </pc:sldChg>
       <pc:sldChg chg="addSp delSp modSp mod modTransition modAnim">
-        <pc:chgData name="Camilo Daleles Rennó" userId="eac9aab033b2f962" providerId="LiveId" clId="{435231E9-EFF7-4B35-A063-2CE70FCF688A}" dt="2025-06-09T12:42:30.593" v="11"/>
+        <pc:chgData name="Camilo Daleles Rennó" userId="eac9aab033b2f962" providerId="LiveId" clId="{435231E9-EFF7-4B35-A063-2CE70FCF688A}" dt="2025-06-12T14:30:44.477" v="13"/>
         <pc:sldMkLst>
           <pc:docMk/>
           <pc:sldMk cId="2239123633" sldId="377"/>
         </pc:sldMkLst>
         <pc:picChg chg="add del mod">
-          <ac:chgData name="Camilo Daleles Rennó" userId="eac9aab033b2f962" providerId="LiveId" clId="{435231E9-EFF7-4B35-A063-2CE70FCF688A}" dt="2025-06-09T12:41:56.159" v="10"/>
-          <ac:picMkLst>
-            <pc:docMk/>
-            <pc:sldMk cId="2239123633" sldId="377"/>
-            <ac:picMk id="6" creationId="{974318C2-49BA-500A-EA70-973BA755C982}"/>
-          </ac:picMkLst>
-        </pc:picChg>
-        <pc:picChg chg="add del mod ord">
-          <ac:chgData name="Camilo Daleles Rennó" userId="eac9aab033b2f962" providerId="LiveId" clId="{435231E9-EFF7-4B35-A063-2CE70FCF688A}" dt="2025-06-09T12:42:30.593" v="11"/>
-          <ac:picMkLst>
-            <pc:docMk/>
-            <pc:sldMk cId="2239123633" sldId="377"/>
-            <ac:picMk id="7" creationId="{27C5C9FB-370E-B26D-E7D4-979BF5DBA281}"/>
-          </ac:picMkLst>
-        </pc:picChg>
-        <pc:picChg chg="add mod">
-          <ac:chgData name="Camilo Daleles Rennó" userId="eac9aab033b2f962" providerId="LiveId" clId="{435231E9-EFF7-4B35-A063-2CE70FCF688A}" dt="2025-06-09T12:42:30.593" v="11"/>
+          <ac:chgData name="Camilo Daleles Rennó" userId="eac9aab033b2f962" providerId="LiveId" clId="{435231E9-EFF7-4B35-A063-2CE70FCF688A}" dt="2025-06-12T14:30:44.477" v="13"/>
           <ac:picMkLst>
             <pc:docMk/>
             <pc:sldMk cId="2239123633" sldId="377"/>
@@ -361,29 +281,13 @@
         </pc:picChg>
       </pc:sldChg>
       <pc:sldChg chg="addSp delSp modSp mod modTransition modAnim">
-        <pc:chgData name="Camilo Daleles Rennó" userId="eac9aab033b2f962" providerId="LiveId" clId="{435231E9-EFF7-4B35-A063-2CE70FCF688A}" dt="2025-06-09T12:42:30.593" v="11"/>
+        <pc:chgData name="Camilo Daleles Rennó" userId="eac9aab033b2f962" providerId="LiveId" clId="{435231E9-EFF7-4B35-A063-2CE70FCF688A}" dt="2025-06-12T14:30:44.477" v="13"/>
         <pc:sldMkLst>
           <pc:docMk/>
           <pc:sldMk cId="983261099" sldId="388"/>
         </pc:sldMkLst>
         <pc:picChg chg="add del mod">
-          <ac:chgData name="Camilo Daleles Rennó" userId="eac9aab033b2f962" providerId="LiveId" clId="{435231E9-EFF7-4B35-A063-2CE70FCF688A}" dt="2025-06-09T12:41:56.159" v="10"/>
-          <ac:picMkLst>
-            <pc:docMk/>
-            <pc:sldMk cId="983261099" sldId="388"/>
-            <ac:picMk id="5" creationId="{9C146D13-C44A-81AE-7380-149D2EB06AE2}"/>
-          </ac:picMkLst>
-        </pc:picChg>
-        <pc:picChg chg="add del mod ord">
-          <ac:chgData name="Camilo Daleles Rennó" userId="eac9aab033b2f962" providerId="LiveId" clId="{435231E9-EFF7-4B35-A063-2CE70FCF688A}" dt="2025-06-09T12:42:30.593" v="11"/>
-          <ac:picMkLst>
-            <pc:docMk/>
-            <pc:sldMk cId="983261099" sldId="388"/>
-            <ac:picMk id="6" creationId="{81281036-E549-94A8-66E9-73EEC75005BC}"/>
-          </ac:picMkLst>
-        </pc:picChg>
-        <pc:picChg chg="add mod">
-          <ac:chgData name="Camilo Daleles Rennó" userId="eac9aab033b2f962" providerId="LiveId" clId="{435231E9-EFF7-4B35-A063-2CE70FCF688A}" dt="2025-06-09T12:42:30.593" v="11"/>
+          <ac:chgData name="Camilo Daleles Rennó" userId="eac9aab033b2f962" providerId="LiveId" clId="{435231E9-EFF7-4B35-A063-2CE70FCF688A}" dt="2025-06-12T14:30:44.477" v="13"/>
           <ac:picMkLst>
             <pc:docMk/>
             <pc:sldMk cId="983261099" sldId="388"/>
@@ -392,29 +296,13 @@
         </pc:picChg>
       </pc:sldChg>
       <pc:sldChg chg="addSp delSp modSp mod modTransition modAnim">
-        <pc:chgData name="Camilo Daleles Rennó" userId="eac9aab033b2f962" providerId="LiveId" clId="{435231E9-EFF7-4B35-A063-2CE70FCF688A}" dt="2025-06-09T12:42:30.593" v="11"/>
+        <pc:chgData name="Camilo Daleles Rennó" userId="eac9aab033b2f962" providerId="LiveId" clId="{435231E9-EFF7-4B35-A063-2CE70FCF688A}" dt="2025-06-12T14:30:44.477" v="13"/>
         <pc:sldMkLst>
           <pc:docMk/>
           <pc:sldMk cId="1877254047" sldId="393"/>
         </pc:sldMkLst>
         <pc:picChg chg="add del mod">
-          <ac:chgData name="Camilo Daleles Rennó" userId="eac9aab033b2f962" providerId="LiveId" clId="{435231E9-EFF7-4B35-A063-2CE70FCF688A}" dt="2025-06-09T12:41:56.159" v="10"/>
-          <ac:picMkLst>
-            <pc:docMk/>
-            <pc:sldMk cId="1877254047" sldId="393"/>
-            <ac:picMk id="5" creationId="{AF87929F-C015-ED89-673B-9A31C683B7D1}"/>
-          </ac:picMkLst>
-        </pc:picChg>
-        <pc:picChg chg="add del mod ord">
-          <ac:chgData name="Camilo Daleles Rennó" userId="eac9aab033b2f962" providerId="LiveId" clId="{435231E9-EFF7-4B35-A063-2CE70FCF688A}" dt="2025-06-09T12:42:30.593" v="11"/>
-          <ac:picMkLst>
-            <pc:docMk/>
-            <pc:sldMk cId="1877254047" sldId="393"/>
-            <ac:picMk id="6" creationId="{B01CFB83-8109-3A28-C96B-86C1ABB73688}"/>
-          </ac:picMkLst>
-        </pc:picChg>
-        <pc:picChg chg="add mod">
-          <ac:chgData name="Camilo Daleles Rennó" userId="eac9aab033b2f962" providerId="LiveId" clId="{435231E9-EFF7-4B35-A063-2CE70FCF688A}" dt="2025-06-09T12:42:30.593" v="11"/>
+          <ac:chgData name="Camilo Daleles Rennó" userId="eac9aab033b2f962" providerId="LiveId" clId="{435231E9-EFF7-4B35-A063-2CE70FCF688A}" dt="2025-06-12T14:30:44.477" v="13"/>
           <ac:picMkLst>
             <pc:docMk/>
             <pc:sldMk cId="1877254047" sldId="393"/>
@@ -423,29 +311,13 @@
         </pc:picChg>
       </pc:sldChg>
       <pc:sldChg chg="addSp delSp modSp mod modTransition modAnim">
-        <pc:chgData name="Camilo Daleles Rennó" userId="eac9aab033b2f962" providerId="LiveId" clId="{435231E9-EFF7-4B35-A063-2CE70FCF688A}" dt="2025-06-09T12:42:30.593" v="11"/>
+        <pc:chgData name="Camilo Daleles Rennó" userId="eac9aab033b2f962" providerId="LiveId" clId="{435231E9-EFF7-4B35-A063-2CE70FCF688A}" dt="2025-06-12T14:30:44.477" v="13"/>
         <pc:sldMkLst>
           <pc:docMk/>
           <pc:sldMk cId="2956632756" sldId="394"/>
         </pc:sldMkLst>
         <pc:picChg chg="add del mod">
-          <ac:chgData name="Camilo Daleles Rennó" userId="eac9aab033b2f962" providerId="LiveId" clId="{435231E9-EFF7-4B35-A063-2CE70FCF688A}" dt="2025-06-09T12:41:56.159" v="10"/>
-          <ac:picMkLst>
-            <pc:docMk/>
-            <pc:sldMk cId="2956632756" sldId="394"/>
-            <ac:picMk id="6" creationId="{44094A92-B9DA-11F2-40EE-F2C66DFE4246}"/>
-          </ac:picMkLst>
-        </pc:picChg>
-        <pc:picChg chg="add del mod ord">
-          <ac:chgData name="Camilo Daleles Rennó" userId="eac9aab033b2f962" providerId="LiveId" clId="{435231E9-EFF7-4B35-A063-2CE70FCF688A}" dt="2025-06-09T12:42:30.593" v="11"/>
-          <ac:picMkLst>
-            <pc:docMk/>
-            <pc:sldMk cId="2956632756" sldId="394"/>
-            <ac:picMk id="8" creationId="{67AFB0FD-9F3F-C085-3055-467CA2BF9898}"/>
-          </ac:picMkLst>
-        </pc:picChg>
-        <pc:picChg chg="add mod">
-          <ac:chgData name="Camilo Daleles Rennó" userId="eac9aab033b2f962" providerId="LiveId" clId="{435231E9-EFF7-4B35-A063-2CE70FCF688A}" dt="2025-06-09T12:42:30.593" v="11"/>
+          <ac:chgData name="Camilo Daleles Rennó" userId="eac9aab033b2f962" providerId="LiveId" clId="{435231E9-EFF7-4B35-A063-2CE70FCF688A}" dt="2025-06-12T14:30:44.477" v="13"/>
           <ac:picMkLst>
             <pc:docMk/>
             <pc:sldMk cId="2956632756" sldId="394"/>
@@ -454,29 +326,13 @@
         </pc:picChg>
       </pc:sldChg>
       <pc:sldChg chg="addSp delSp modSp mod modTransition modAnim">
-        <pc:chgData name="Camilo Daleles Rennó" userId="eac9aab033b2f962" providerId="LiveId" clId="{435231E9-EFF7-4B35-A063-2CE70FCF688A}" dt="2025-06-09T12:42:30.593" v="11"/>
+        <pc:chgData name="Camilo Daleles Rennó" userId="eac9aab033b2f962" providerId="LiveId" clId="{435231E9-EFF7-4B35-A063-2CE70FCF688A}" dt="2025-06-12T14:30:44.477" v="13"/>
         <pc:sldMkLst>
           <pc:docMk/>
           <pc:sldMk cId="3928394977" sldId="395"/>
         </pc:sldMkLst>
         <pc:picChg chg="add del mod">
-          <ac:chgData name="Camilo Daleles Rennó" userId="eac9aab033b2f962" providerId="LiveId" clId="{435231E9-EFF7-4B35-A063-2CE70FCF688A}" dt="2025-06-09T12:41:56.159" v="10"/>
-          <ac:picMkLst>
-            <pc:docMk/>
-            <pc:sldMk cId="3928394977" sldId="395"/>
-            <ac:picMk id="14" creationId="{8C57CF06-4DC5-C092-4656-09B14D0198E3}"/>
-          </ac:picMkLst>
-        </pc:picChg>
-        <pc:picChg chg="add del mod ord">
-          <ac:chgData name="Camilo Daleles Rennó" userId="eac9aab033b2f962" providerId="LiveId" clId="{435231E9-EFF7-4B35-A063-2CE70FCF688A}" dt="2025-06-09T12:42:30.593" v="11"/>
-          <ac:picMkLst>
-            <pc:docMk/>
-            <pc:sldMk cId="3928394977" sldId="395"/>
-            <ac:picMk id="17" creationId="{17E7F14A-850A-1699-6B71-16D6DB4B93B3}"/>
-          </ac:picMkLst>
-        </pc:picChg>
-        <pc:picChg chg="add mod">
-          <ac:chgData name="Camilo Daleles Rennó" userId="eac9aab033b2f962" providerId="LiveId" clId="{435231E9-EFF7-4B35-A063-2CE70FCF688A}" dt="2025-06-09T12:42:30.593" v="11"/>
+          <ac:chgData name="Camilo Daleles Rennó" userId="eac9aab033b2f962" providerId="LiveId" clId="{435231E9-EFF7-4B35-A063-2CE70FCF688A}" dt="2025-06-12T14:30:44.477" v="13"/>
           <ac:picMkLst>
             <pc:docMk/>
             <pc:sldMk cId="3928394977" sldId="395"/>
@@ -657,7 +513,7 @@
               <a:pPr>
                 <a:defRPr/>
               </a:pPr>
-              <a:t>09/06/2025</a:t>
+              <a:t>12/06/2025</a:t>
             </a:fld>
             <a:endParaRPr lang="pt-BR" dirty="0"/>
           </a:p>
@@ -4576,7 +4432,7 @@
                   <a:schemeClr val="accent2"/>
                 </a:solidFill>
                 <a:latin typeface="Arial Unicode MS" pitchFamily="34" charset="-128"/>
-                <a:hlinkClick r:id="rId4">
+                <a:hlinkClick r:id="rId2">
                   <a:extLst>
                     <a:ext uri="{A12FA001-AC4F-418D-AE19-62706E023703}">
                       <ahyp:hlinkClr xmlns:ahyp="http://schemas.microsoft.com/office/drawing/2018/hyperlinkcolor" val="tx"/>
@@ -4592,7 +4448,7 @@
                   <a:schemeClr val="accent2"/>
                 </a:solidFill>
                 <a:latin typeface="Arial Unicode MS" pitchFamily="34" charset="-128"/>
-                <a:hlinkClick r:id="rId4">
+                <a:hlinkClick r:id="rId2">
                   <a:extLst>
                     <a:ext uri="{A12FA001-AC4F-418D-AE19-62706E023703}">
                       <ahyp:hlinkClr xmlns:ahyp="http://schemas.microsoft.com/office/drawing/2018/hyperlinkcolor" val="tx"/>
@@ -4614,7 +4470,7 @@
                   <a:schemeClr val="accent2"/>
                 </a:solidFill>
                 <a:latin typeface="Arial Unicode MS" pitchFamily="34" charset="-128"/>
-                <a:hlinkClick r:id="rId5">
+                <a:hlinkClick r:id="rId3">
                   <a:extLst>
                     <a:ext uri="{A12FA001-AC4F-418D-AE19-62706E023703}">
                       <ahyp:hlinkClr xmlns:ahyp="http://schemas.microsoft.com/office/drawing/2018/hyperlinkcolor" val="tx"/>
@@ -4633,314 +4489,11 @@
           </a:p>
         </p:txBody>
       </p:sp>
-      <p:pic>
-        <p:nvPicPr>
-          <p:cNvPr id="11" name="Áudio 10">
-            <a:hlinkClick r:id="" action="ppaction://media"/>
-            <a:extLst>
-              <a:ext uri="{FF2B5EF4-FFF2-40B4-BE49-F238E27FC236}">
-                <a16:creationId xmlns:a16="http://schemas.microsoft.com/office/drawing/2014/main" id="{7BC73855-528A-64EC-1889-FC03BB10769B}"/>
-              </a:ext>
-            </a:extLst>
-          </p:cNvPr>
-          <p:cNvPicPr>
-            <a:picLocks noChangeAspect="1"/>
-          </p:cNvPicPr>
-          <p:nvPr>
-            <a:audioFile r:link="rId2"/>
-            <p:extLst>
-              <p:ext uri="{DAA4B4D4-6D71-4841-9C94-3DE7FCFB9230}">
-                <p14:media xmlns:p14="http://schemas.microsoft.com/office/powerpoint/2010/main" r:embed="rId1"/>
-              </p:ext>
-            </p:extLst>
-          </p:nvPr>
-        </p:nvPicPr>
-        <p:blipFill>
-          <a:blip r:embed="rId6"/>
-          <a:srcRect l="-118750" t="-118750" r="-118750" b="-118750"/>
-          <a:stretch>
-            <a:fillRect/>
-          </a:stretch>
-        </p:blipFill>
-        <p:spPr>
-          <a:xfrm>
-            <a:off x="7004304" y="4718304"/>
-            <a:ext cx="2057400" cy="2057400"/>
-          </a:xfrm>
-          <a:prstGeom prst="ellipse">
-            <a:avLst/>
-          </a:prstGeom>
-        </p:spPr>
-      </p:pic>
     </p:spTree>
   </p:cSld>
   <p:clrMapOvr>
     <a:masterClrMapping/>
   </p:clrMapOvr>
-  <mc:AlternateContent xmlns:mc="http://schemas.openxmlformats.org/markup-compatibility/2006">
-    <mc:Choice xmlns:p14="http://schemas.microsoft.com/office/powerpoint/2010/main" Requires="p14">
-      <p:transition spd="slow" p14:dur="2000" advTm="14414"/>
-    </mc:Choice>
-    <mc:Fallback>
-      <p:transition spd="slow" advTm="14414"/>
-    </mc:Fallback>
-  </mc:AlternateContent>
-  <p:timing>
-    <p:tnLst>
-      <p:par>
-        <p:cTn id="1" dur="indefinite" restart="never" nodeType="tmRoot">
-          <p:childTnLst>
-            <p:seq concurrent="1" nextAc="seek">
-              <p:cTn id="2" dur="indefinite" nodeType="mainSeq">
-                <p:childTnLst>
-                  <p:par>
-                    <p:cTn id="3" fill="hold">
-                      <p:stCondLst>
-                        <p:cond delay="indefinite"/>
-                        <p:cond evt="onBegin" delay="0">
-                          <p:tn val="2"/>
-                        </p:cond>
-                      </p:stCondLst>
-                      <p:childTnLst>
-                        <p:par>
-                          <p:cTn id="4" fill="hold">
-                            <p:stCondLst>
-                              <p:cond delay="0"/>
-                            </p:stCondLst>
-                            <p:childTnLst>
-                              <p:par>
-                                <p:cTn id="5" presetID="1" presetClass="mediacall" presetSubtype="0" fill="hold" nodeType="afterEffect">
-                                  <p:stCondLst>
-                                    <p:cond delay="0"/>
-                                  </p:stCondLst>
-                                  <p:childTnLst>
-                                    <p:cmd type="call" cmd="playFrom(0.0)">
-                                      <p:cBhvr>
-                                        <p:cTn id="6" dur="1" fill="hold"/>
-                                        <p:tgtEl>
-                                          <p:spTgt spid="11"/>
-                                        </p:tgtEl>
-                                      </p:cBhvr>
-                                    </p:cmd>
-                                  </p:childTnLst>
-                                </p:cTn>
-                              </p:par>
-                            </p:childTnLst>
-                          </p:cTn>
-                        </p:par>
-                      </p:childTnLst>
-                    </p:cTn>
-                  </p:par>
-                </p:childTnLst>
-              </p:cTn>
-              <p:prevCondLst>
-                <p:cond evt="onPrev" delay="0">
-                  <p:tgtEl>
-                    <p:sldTgt/>
-                  </p:tgtEl>
-                </p:cond>
-              </p:prevCondLst>
-              <p:nextCondLst>
-                <p:cond evt="onNext" delay="0">
-                  <p:tgtEl>
-                    <p:sldTgt/>
-                  </p:tgtEl>
-                </p:cond>
-              </p:nextCondLst>
-            </p:seq>
-            <p:audio isNarration="1">
-              <p:cMediaNode vol="80000" showWhenStopped="0">
-                <p:cTn id="7" fill="hold" display="0">
-                  <p:stCondLst>
-                    <p:cond delay="indefinite"/>
-                  </p:stCondLst>
-                  <p:endCondLst>
-                    <p:cond evt="onStopAudio" delay="0">
-                      <p:tgtEl>
-                        <p:sldTgt/>
-                      </p:tgtEl>
-                    </p:cond>
-                  </p:endCondLst>
-                </p:cTn>
-                <p:tgtEl>
-                  <p:spTgt spid="11"/>
-                </p:tgtEl>
-              </p:cMediaNode>
-            </p:audio>
-          </p:childTnLst>
-        </p:cTn>
-      </p:par>
-    </p:tnLst>
-  </p:timing>
-  <p:extLst>
-    <p:ext uri="{3A86A75C-4F4B-4683-9AE1-C65F6400EC91}">
-      <p14:laserTraceLst xmlns:p14="http://schemas.microsoft.com/office/powerpoint/2010/main">
-        <p14:tracePtLst>
-          <p14:tracePt t="9776" x="3473450" y="6573838"/>
-          <p14:tracePt t="9782" x="3563938" y="6345238"/>
-          <p14:tracePt t="9798" x="3694113" y="5775325"/>
-          <p14:tracePt t="9815" x="3749675" y="5084763"/>
-          <p14:tracePt t="9831" x="3856038" y="4392613"/>
-          <p14:tracePt t="9848" x="3970338" y="3790950"/>
-          <p14:tracePt t="9865" x="4132263" y="3335338"/>
-          <p14:tracePt t="9882" x="4344988" y="3140075"/>
-          <p14:tracePt t="9899" x="4652963" y="3001963"/>
-          <p14:tracePt t="9915" x="5011738" y="2952750"/>
-          <p14:tracePt t="9931" x="5394325" y="2968625"/>
-          <p14:tracePt t="9950" x="5970588" y="3074988"/>
-          <p14:tracePt t="9965" x="6191250" y="3148013"/>
-          <p14:tracePt t="9982" x="6321425" y="3205163"/>
-          <p14:tracePt t="9998" x="6378575" y="3246438"/>
-          <p14:tracePt t="10015" x="6402388" y="3270250"/>
-          <p14:tracePt t="10031" x="6410325" y="3294063"/>
-          <p14:tracePt t="10048" x="6410325" y="3303588"/>
-          <p14:tracePt t="10065" x="6353175" y="3319463"/>
-          <p14:tracePt t="10081" x="6191250" y="3327400"/>
-          <p14:tracePt t="10098" x="5954713" y="3327400"/>
-          <p14:tracePt t="10115" x="5662613" y="3327400"/>
-          <p14:tracePt t="10132" x="5483225" y="3319463"/>
-          <p14:tracePt t="10133" x="5441950" y="3311525"/>
-          <p14:tracePt t="10149" x="5384800" y="3311525"/>
-          <p14:tracePt t="10165" x="5295900" y="3319463"/>
-          <p14:tracePt t="10182" x="5165725" y="3408363"/>
-          <p14:tracePt t="10198" x="5027613" y="3619500"/>
-          <p14:tracePt t="10215" x="4962525" y="3986213"/>
-          <p14:tracePt t="10231" x="4994275" y="4303713"/>
-          <p14:tracePt t="10248" x="5133975" y="4522788"/>
-          <p14:tracePt t="10265" x="5303838" y="4629150"/>
-          <p14:tracePt t="10282" x="5483225" y="4645025"/>
-          <p14:tracePt t="10298" x="5719763" y="4530725"/>
-          <p14:tracePt t="10315" x="5954713" y="4214813"/>
-          <p14:tracePt t="10332" x="6003925" y="3840163"/>
-          <p14:tracePt t="10333" x="5954713" y="3603625"/>
-          <p14:tracePt t="10350" x="5702300" y="3189288"/>
-          <p14:tracePt t="10365" x="5491163" y="3009900"/>
-          <p14:tracePt t="10382" x="5345113" y="2944813"/>
-          <p14:tracePt t="10398" x="5149850" y="2944813"/>
-          <p14:tracePt t="10415" x="4897438" y="3082925"/>
-          <p14:tracePt t="10431" x="4686300" y="3343275"/>
-          <p14:tracePt t="10448" x="4491038" y="3684588"/>
-          <p14:tracePt t="10465" x="4441825" y="3897313"/>
-          <p14:tracePt t="10482" x="4457700" y="4043363"/>
-          <p14:tracePt t="10499" x="4548188" y="4116388"/>
-          <p14:tracePt t="10515" x="4759325" y="4132263"/>
-          <p14:tracePt t="10532" x="5141913" y="4010025"/>
-          <p14:tracePt t="10533" x="5368925" y="3897313"/>
-          <p14:tracePt t="10550" x="5727700" y="3660775"/>
-          <p14:tracePt t="10565" x="5824538" y="3465513"/>
-          <p14:tracePt t="10582" x="5767388" y="3327400"/>
-          <p14:tracePt t="10598" x="5589588" y="3246438"/>
-          <p14:tracePt t="10615" x="5272088" y="3221038"/>
-          <p14:tracePt t="10631" x="4994275" y="3228975"/>
-          <p14:tracePt t="10648" x="4929188" y="3270250"/>
-          <p14:tracePt t="10665" x="4832350" y="3376613"/>
-          <p14:tracePt t="10681" x="4808538" y="3473450"/>
-          <p14:tracePt t="10698" x="4840288" y="3579813"/>
-          <p14:tracePt t="10715" x="5003800" y="3668713"/>
-          <p14:tracePt t="10732" x="5353050" y="3749675"/>
-          <p14:tracePt t="10733" x="5605463" y="3759200"/>
-          <p14:tracePt t="10749" x="6061075" y="3733800"/>
-          <p14:tracePt t="10765" x="6280150" y="3676650"/>
-          <p14:tracePt t="10781" x="6321425" y="3644900"/>
-          <p14:tracePt t="10798" x="6264275" y="3603625"/>
-          <p14:tracePt t="10814" x="6061075" y="3571875"/>
-          <p14:tracePt t="10831" x="5816600" y="3579813"/>
-          <p14:tracePt t="10848" x="5629275" y="3619500"/>
-          <p14:tracePt t="10865" x="5524500" y="3668713"/>
-          <p14:tracePt t="10881" x="5483225" y="3725863"/>
-          <p14:tracePt t="10898" x="5491163" y="3783013"/>
-          <p14:tracePt t="10915" x="5605463" y="3889375"/>
-          <p14:tracePt t="10931" x="5832475" y="3962400"/>
-          <p14:tracePt t="10949" x="6370638" y="4067175"/>
-          <p14:tracePt t="10965" x="6646863" y="4100513"/>
-          <p14:tracePt t="10981" x="6743700" y="4108450"/>
-          <p14:tracePt t="10998" x="6769100" y="4116388"/>
-          <p14:tracePt t="11015" x="6784975" y="4116388"/>
-          <p14:tracePt t="11031" x="6800850" y="4132263"/>
-          <p14:tracePt t="11048" x="6826250" y="4157663"/>
-          <p14:tracePt t="11065" x="6850063" y="4165600"/>
-          <p14:tracePt t="11082" x="6907213" y="4181475"/>
-          <p14:tracePt t="11098" x="6954838" y="4197350"/>
-          <p14:tracePt t="11115" x="7011988" y="4214813"/>
-          <p14:tracePt t="11132" x="7061200" y="4214813"/>
-          <p14:tracePt t="11133" x="7085013" y="4214813"/>
-          <p14:tracePt t="11149" x="7134225" y="4222750"/>
-          <p14:tracePt t="11165" x="7159625" y="4222750"/>
-          <p14:tracePt t="11181" x="7183438" y="4222750"/>
-          <p14:tracePt t="11198" x="7199313" y="4222750"/>
-          <p14:tracePt t="11221" x="7199313" y="4230688"/>
-          <p14:tracePt t="11232" x="7167563" y="4246563"/>
-          <p14:tracePt t="11248" x="7029450" y="4295775"/>
-          <p14:tracePt t="11265" x="6850063" y="4368800"/>
-          <p14:tracePt t="11282" x="6670675" y="4441825"/>
-          <p14:tracePt t="11298" x="6540500" y="4491038"/>
-          <p14:tracePt t="11315" x="6451600" y="4514850"/>
-          <p14:tracePt t="11332" x="6394450" y="4514850"/>
-          <p14:tracePt t="11333" x="6378575" y="4506913"/>
-          <p14:tracePt t="11350" x="6321425" y="4433888"/>
-          <p14:tracePt t="11365" x="6215063" y="4279900"/>
-          <p14:tracePt t="11381" x="6069013" y="4043363"/>
-          <p14:tracePt t="11398" x="6011863" y="3832225"/>
-          <p14:tracePt t="11415" x="6019800" y="3684588"/>
-          <p14:tracePt t="11431" x="6134100" y="3603625"/>
-          <p14:tracePt t="11448" x="6321425" y="3563938"/>
-          <p14:tracePt t="11465" x="6686550" y="3611563"/>
-          <p14:tracePt t="11481" x="7232650" y="3832225"/>
-          <p14:tracePt t="11498" x="7639050" y="4051300"/>
-          <p14:tracePt t="11515" x="7777163" y="4197350"/>
-          <p14:tracePt t="11531" x="7793038" y="4287838"/>
-          <p14:tracePt t="11533" x="7785100" y="4327525"/>
-          <p14:tracePt t="11550" x="7670800" y="4410075"/>
-          <p14:tracePt t="11565" x="7524750" y="4449763"/>
-          <p14:tracePt t="11581" x="7402513" y="4475163"/>
-          <p14:tracePt t="11598" x="7354888" y="4475163"/>
-          <p14:tracePt t="11615" x="7313613" y="4475163"/>
-          <p14:tracePt t="11632" x="7280275" y="4457700"/>
-          <p14:tracePt t="11648" x="7240588" y="4425950"/>
-          <p14:tracePt t="11665" x="7215188" y="4352925"/>
-          <p14:tracePt t="11682" x="7207250" y="4303713"/>
-          <p14:tracePt t="11698" x="7215188" y="4246563"/>
-          <p14:tracePt t="11715" x="7297738" y="4197350"/>
-          <p14:tracePt t="11731" x="7386638" y="4165600"/>
-          <p14:tracePt t="11749" x="7516813" y="4149725"/>
-          <p14:tracePt t="11765" x="7631113" y="4149725"/>
-          <p14:tracePt t="11781" x="7727950" y="4149725"/>
-          <p14:tracePt t="11798" x="7735888" y="4149725"/>
-          <p14:tracePt t="11815" x="7745413" y="4149725"/>
-          <p14:tracePt t="11831" x="7735888" y="4165600"/>
-          <p14:tracePt t="11848" x="7654925" y="4181475"/>
-          <p14:tracePt t="11865" x="7532688" y="4222750"/>
-          <p14:tracePt t="11881" x="7386638" y="4246563"/>
-          <p14:tracePt t="11898" x="7240588" y="4279900"/>
-          <p14:tracePt t="11915" x="7118350" y="4295775"/>
-          <p14:tracePt t="11931" x="7037388" y="4319588"/>
-          <p14:tracePt t="11949" x="7011988" y="4319588"/>
-          <p14:tracePt t="11965" x="7004050" y="4319588"/>
-          <p14:tracePt t="12013" x="7037388" y="4311650"/>
-          <p14:tracePt t="12021" x="7102475" y="4295775"/>
-          <p14:tracePt t="12031" x="7175500" y="4270375"/>
-          <p14:tracePt t="12048" x="7378700" y="4222750"/>
-          <p14:tracePt t="12065" x="7485063" y="4197350"/>
-          <p14:tracePt t="12081" x="7508875" y="4197350"/>
-          <p14:tracePt t="12117" x="7500938" y="4181475"/>
-          <p14:tracePt t="12126" x="7475538" y="4173538"/>
-          <p14:tracePt t="12133" x="7402513" y="4165600"/>
-          <p14:tracePt t="12150" x="7199313" y="4116388"/>
-          <p14:tracePt t="12165" x="7069138" y="4092575"/>
-          <p14:tracePt t="12181" x="7011988" y="4075113"/>
-          <p14:tracePt t="12198" x="6996113" y="4067175"/>
-          <p14:tracePt t="12215" x="6980238" y="4051300"/>
-          <p14:tracePt t="12231" x="6972300" y="4051300"/>
-          <p14:tracePt t="12248" x="6964363" y="4051300"/>
-          <p14:tracePt t="12265" x="6964363" y="4035425"/>
-          <p14:tracePt t="12281" x="6964363" y="4010025"/>
-          <p14:tracePt t="12298" x="6988175" y="3978275"/>
-          <p14:tracePt t="12315" x="7011988" y="3954463"/>
-          <p14:tracePt t="12331" x="7019925" y="3954463"/>
-        </p14:tracePtLst>
-      </p14:laserTraceLst>
-    </p:ext>
-  </p:extLst>
 </p:sld>
 </file>
 
@@ -5257,45 +4810,6 @@
           </a:p>
         </p:txBody>
       </p:sp>
-      <p:pic>
-        <p:nvPicPr>
-          <p:cNvPr id="11" name="Áudio 10">
-            <a:hlinkClick r:id="" action="ppaction://media"/>
-            <a:extLst>
-              <a:ext uri="{FF2B5EF4-FFF2-40B4-BE49-F238E27FC236}">
-                <a16:creationId xmlns:a16="http://schemas.microsoft.com/office/drawing/2014/main" id="{FB357070-E09F-48FA-B3EF-666CF1D0134C}"/>
-              </a:ext>
-            </a:extLst>
-          </p:cNvPr>
-          <p:cNvPicPr>
-            <a:picLocks noChangeAspect="1"/>
-          </p:cNvPicPr>
-          <p:nvPr>
-            <a:audioFile r:link="rId2"/>
-            <p:extLst>
-              <p:ext uri="{DAA4B4D4-6D71-4841-9C94-3DE7FCFB9230}">
-                <p14:media xmlns:p14="http://schemas.microsoft.com/office/powerpoint/2010/main" r:embed="rId1"/>
-              </p:ext>
-            </p:extLst>
-          </p:nvPr>
-        </p:nvPicPr>
-        <p:blipFill>
-          <a:blip r:embed="rId4"/>
-          <a:srcRect l="-118750" t="-118750" r="-118750" b="-118750"/>
-          <a:stretch>
-            <a:fillRect/>
-          </a:stretch>
-        </p:blipFill>
-        <p:spPr>
-          <a:xfrm>
-            <a:off x="7004304" y="4718304"/>
-            <a:ext cx="2057400" cy="2057400"/>
-          </a:xfrm>
-          <a:prstGeom prst="ellipse">
-            <a:avLst/>
-          </a:prstGeom>
-        </p:spPr>
-      </p:pic>
     </p:spTree>
     <p:extLst>
       <p:ext uri="{BB962C8B-B14F-4D97-AF65-F5344CB8AC3E}">
@@ -5306,101 +4820,6 @@
   <p:clrMapOvr>
     <a:masterClrMapping/>
   </p:clrMapOvr>
-  <mc:AlternateContent xmlns:mc="http://schemas.openxmlformats.org/markup-compatibility/2006">
-    <mc:Choice xmlns:p14="http://schemas.microsoft.com/office/powerpoint/2010/main" Requires="p14">
-      <p:transition spd="slow" p14:dur="2000" advTm="2259"/>
-    </mc:Choice>
-    <mc:Fallback>
-      <p:transition spd="slow" advTm="2259"/>
-    </mc:Fallback>
-  </mc:AlternateContent>
-  <p:timing>
-    <p:tnLst>
-      <p:par>
-        <p:cTn id="1" dur="indefinite" restart="never" nodeType="tmRoot">
-          <p:childTnLst>
-            <p:seq concurrent="1" nextAc="seek">
-              <p:cTn id="2" dur="indefinite" nodeType="mainSeq">
-                <p:childTnLst>
-                  <p:par>
-                    <p:cTn id="3" fill="hold">
-                      <p:stCondLst>
-                        <p:cond delay="indefinite"/>
-                        <p:cond evt="onBegin" delay="0">
-                          <p:tn val="2"/>
-                        </p:cond>
-                      </p:stCondLst>
-                      <p:childTnLst>
-                        <p:par>
-                          <p:cTn id="4" fill="hold">
-                            <p:stCondLst>
-                              <p:cond delay="0"/>
-                            </p:stCondLst>
-                            <p:childTnLst>
-                              <p:par>
-                                <p:cTn id="5" presetID="1" presetClass="mediacall" presetSubtype="0" fill="hold" nodeType="afterEffect">
-                                  <p:stCondLst>
-                                    <p:cond delay="0"/>
-                                  </p:stCondLst>
-                                  <p:childTnLst>
-                                    <p:cmd type="call" cmd="playFrom(0.0)">
-                                      <p:cBhvr>
-                                        <p:cTn id="6" dur="1" fill="hold"/>
-                                        <p:tgtEl>
-                                          <p:spTgt spid="11"/>
-                                        </p:tgtEl>
-                                      </p:cBhvr>
-                                    </p:cmd>
-                                  </p:childTnLst>
-                                </p:cTn>
-                              </p:par>
-                            </p:childTnLst>
-                          </p:cTn>
-                        </p:par>
-                      </p:childTnLst>
-                    </p:cTn>
-                  </p:par>
-                </p:childTnLst>
-              </p:cTn>
-              <p:prevCondLst>
-                <p:cond evt="onPrev" delay="0">
-                  <p:tgtEl>
-                    <p:sldTgt/>
-                  </p:tgtEl>
-                </p:cond>
-              </p:prevCondLst>
-              <p:nextCondLst>
-                <p:cond evt="onNext" delay="0">
-                  <p:tgtEl>
-                    <p:sldTgt/>
-                  </p:tgtEl>
-                </p:cond>
-              </p:nextCondLst>
-            </p:seq>
-            <p:audio isNarration="1">
-              <p:cMediaNode vol="80000" showWhenStopped="0">
-                <p:cTn id="7" fill="hold" display="0">
-                  <p:stCondLst>
-                    <p:cond delay="indefinite"/>
-                  </p:stCondLst>
-                  <p:endCondLst>
-                    <p:cond evt="onStopAudio" delay="0">
-                      <p:tgtEl>
-                        <p:sldTgt/>
-                      </p:tgtEl>
-                    </p:cond>
-                  </p:endCondLst>
-                </p:cTn>
-                <p:tgtEl>
-                  <p:spTgt spid="11"/>
-                </p:tgtEl>
-              </p:cMediaNode>
-            </p:audio>
-          </p:childTnLst>
-        </p:cTn>
-      </p:par>
-    </p:tnLst>
-  </p:timing>
 </p:sld>
 </file>
 
@@ -5444,7 +4863,7 @@
             <p:nvPr/>
           </p:nvPicPr>
           <p:blipFill>
-            <a:blip r:embed="rId5" cstate="print">
+            <a:blip r:embed="rId3" cstate="print">
               <a:extLst>
                 <a:ext uri="{28A0092B-C50C-407E-A947-70E740481C1C}">
                   <a14:useLocalDpi xmlns:a14="http://schemas.microsoft.com/office/drawing/2010/main" val="0"/>
@@ -7255,7 +6674,7 @@
             <p:nvPr/>
           </p:nvPicPr>
           <p:blipFill>
-            <a:blip r:embed="rId6" cstate="print">
+            <a:blip r:embed="rId4" cstate="print">
               <a:extLst>
                 <a:ext uri="{28A0092B-C50C-407E-A947-70E740481C1C}">
                   <a14:useLocalDpi xmlns:a14="http://schemas.microsoft.com/office/drawing/2010/main" val="0"/>
@@ -7309,7 +6728,7 @@
             <p:nvPr/>
           </p:nvPicPr>
           <p:blipFill>
-            <a:blip r:embed="rId7" cstate="print">
+            <a:blip r:embed="rId5" cstate="print">
               <a:extLst>
                 <a:ext uri="{28A0092B-C50C-407E-A947-70E740481C1C}">
                   <a14:useLocalDpi xmlns:a14="http://schemas.microsoft.com/office/drawing/2010/main" val="0"/>
@@ -7380,7 +6799,7 @@
             <p:nvPr/>
           </p:nvPicPr>
           <p:blipFill>
-            <a:blip r:embed="rId8" cstate="print">
+            <a:blip r:embed="rId6" cstate="print">
               <a:extLst>
                 <a:ext uri="{28A0092B-C50C-407E-A947-70E740481C1C}">
                   <a14:useLocalDpi xmlns:a14="http://schemas.microsoft.com/office/drawing/2010/main" val="0"/>
@@ -7434,7 +6853,7 @@
             <p:nvPr/>
           </p:nvPicPr>
           <p:blipFill>
-            <a:blip r:embed="rId9" cstate="print">
+            <a:blip r:embed="rId7" cstate="print">
               <a:extLst>
                 <a:ext uri="{28A0092B-C50C-407E-A947-70E740481C1C}">
                   <a14:useLocalDpi xmlns:a14="http://schemas.microsoft.com/office/drawing/2010/main" val="0"/>
@@ -7488,7 +6907,7 @@
             <p:nvPr/>
           </p:nvPicPr>
           <p:blipFill>
-            <a:blip r:embed="rId10" cstate="print">
+            <a:blip r:embed="rId8" cstate="print">
               <a:extLst>
                 <a:ext uri="{28A0092B-C50C-407E-A947-70E740481C1C}">
                   <a14:useLocalDpi xmlns:a14="http://schemas.microsoft.com/office/drawing/2010/main" val="0"/>
@@ -7542,7 +6961,7 @@
             <p:nvPr/>
           </p:nvPicPr>
           <p:blipFill>
-            <a:blip r:embed="rId11" cstate="print">
+            <a:blip r:embed="rId9" cstate="print">
               <a:extLst>
                 <a:ext uri="{28A0092B-C50C-407E-A947-70E740481C1C}">
                   <a14:useLocalDpi xmlns:a14="http://schemas.microsoft.com/office/drawing/2010/main" val="0"/>
@@ -7596,7 +7015,7 @@
             <p:nvPr/>
           </p:nvPicPr>
           <p:blipFill>
-            <a:blip r:embed="rId12" cstate="print">
+            <a:blip r:embed="rId10" cstate="print">
               <a:extLst>
                 <a:ext uri="{28A0092B-C50C-407E-A947-70E740481C1C}">
                   <a14:useLocalDpi xmlns:a14="http://schemas.microsoft.com/office/drawing/2010/main" val="0"/>
@@ -7923,45 +7342,6 @@
           </a:p>
         </p:txBody>
       </p:sp>
-      <p:pic>
-        <p:nvPicPr>
-          <p:cNvPr id="81" name="Áudio 80">
-            <a:hlinkClick r:id="" action="ppaction://media"/>
-            <a:extLst>
-              <a:ext uri="{FF2B5EF4-FFF2-40B4-BE49-F238E27FC236}">
-                <a16:creationId xmlns:a16="http://schemas.microsoft.com/office/drawing/2014/main" id="{B0DE8F5F-567A-BF98-7BE6-8F0B77209FB4}"/>
-              </a:ext>
-            </a:extLst>
-          </p:cNvPr>
-          <p:cNvPicPr>
-            <a:picLocks noChangeAspect="1"/>
-          </p:cNvPicPr>
-          <p:nvPr>
-            <a:audioFile r:link="rId3"/>
-            <p:extLst>
-              <p:ext uri="{DAA4B4D4-6D71-4841-9C94-3DE7FCFB9230}">
-                <p14:media xmlns:p14="http://schemas.microsoft.com/office/powerpoint/2010/main" r:embed="rId2"/>
-              </p:ext>
-            </p:extLst>
-          </p:nvPr>
-        </p:nvPicPr>
-        <p:blipFill>
-          <a:blip r:embed="rId13"/>
-          <a:srcRect l="-118750" t="-118750" r="-118750" b="-118750"/>
-          <a:stretch>
-            <a:fillRect/>
-          </a:stretch>
-        </p:blipFill>
-        <p:spPr>
-          <a:xfrm>
-            <a:off x="7004304" y="4718304"/>
-            <a:ext cx="2057400" cy="2057400"/>
-          </a:xfrm>
-          <a:prstGeom prst="ellipse">
-            <a:avLst/>
-          </a:prstGeom>
-        </p:spPr>
-      </p:pic>
     </p:spTree>
     <p:custDataLst>
       <p:tags r:id="rId1"/>
@@ -7977,12 +7357,12 @@
   </p:clrMapOvr>
   <mc:AlternateContent xmlns:mc="http://schemas.openxmlformats.org/markup-compatibility/2006">
     <mc:Choice xmlns:p14="http://schemas.microsoft.com/office/powerpoint/2010/main" Requires="p14">
-      <p:transition spd="slow" p14:dur="2000" advTm="7495">
+      <p:transition spd="slow" p14:dur="2000">
         <p:cut/>
       </p:transition>
     </mc:Choice>
     <mc:Fallback>
-      <p:transition spd="slow" advTm="7495">
+      <p:transition spd="slow">
         <p:cut/>
       </p:transition>
     </mc:Fallback>
@@ -7999,9 +7379,6 @@
                     <p:cTn id="3" fill="hold">
                       <p:stCondLst>
                         <p:cond delay="indefinite"/>
-                        <p:cond evt="onBegin" delay="0">
-                          <p:tn val="2"/>
-                        </p:cond>
                       </p:stCondLst>
                       <p:childTnLst>
                         <p:par>
@@ -8011,49 +7388,14 @@
                             </p:stCondLst>
                             <p:childTnLst>
                               <p:par>
-                                <p:cTn id="5" presetID="1" presetClass="mediacall" presetSubtype="0" fill="hold" nodeType="afterEffect">
-                                  <p:stCondLst>
-                                    <p:cond delay="0"/>
-                                  </p:stCondLst>
-                                  <p:childTnLst>
-                                    <p:cmd type="call" cmd="playFrom(0.0)">
-                                      <p:cBhvr>
-                                        <p:cTn id="6" dur="1" fill="hold"/>
-                                        <p:tgtEl>
-                                          <p:spTgt spid="81"/>
-                                        </p:tgtEl>
-                                      </p:cBhvr>
-                                    </p:cmd>
-                                  </p:childTnLst>
-                                </p:cTn>
-                              </p:par>
-                            </p:childTnLst>
-                          </p:cTn>
-                        </p:par>
-                      </p:childTnLst>
-                    </p:cTn>
-                  </p:par>
-                  <p:par>
-                    <p:cTn id="7" fill="hold">
-                      <p:stCondLst>
-                        <p:cond delay="indefinite"/>
-                      </p:stCondLst>
-                      <p:childTnLst>
-                        <p:par>
-                          <p:cTn id="8" fill="hold">
-                            <p:stCondLst>
-                              <p:cond delay="0"/>
-                            </p:stCondLst>
-                            <p:childTnLst>
-                              <p:par>
-                                <p:cTn id="9" presetID="1" presetClass="entr" presetSubtype="0" fill="hold" nodeType="clickEffect">
+                                <p:cTn id="5" presetID="1" presetClass="entr" presetSubtype="0" fill="hold" nodeType="clickEffect">
                                   <p:stCondLst>
                                     <p:cond delay="0"/>
                                   </p:stCondLst>
                                   <p:childTnLst>
                                     <p:set>
                                       <p:cBhvr>
-                                        <p:cTn id="10" dur="1" fill="hold">
+                                        <p:cTn id="6" dur="1" fill="hold">
                                           <p:stCondLst>
                                             <p:cond delay="0"/>
                                           </p:stCondLst>
@@ -8073,14 +7415,14 @@
                                 </p:cTn>
                               </p:par>
                               <p:par>
-                                <p:cTn id="11" presetID="1" presetClass="entr" presetSubtype="0" fill="hold" nodeType="withEffect">
+                                <p:cTn id="7" presetID="1" presetClass="entr" presetSubtype="0" fill="hold" nodeType="withEffect">
                                   <p:stCondLst>
                                     <p:cond delay="0"/>
                                   </p:stCondLst>
                                   <p:childTnLst>
                                     <p:set>
                                       <p:cBhvr>
-                                        <p:cTn id="12" dur="1" fill="hold">
+                                        <p:cTn id="8" dur="1" fill="hold">
                                           <p:stCondLst>
                                             <p:cond delay="0"/>
                                           </p:stCondLst>
@@ -8100,14 +7442,14 @@
                                 </p:cTn>
                               </p:par>
                               <p:par>
-                                <p:cTn id="13" presetID="1" presetClass="entr" presetSubtype="0" fill="hold" nodeType="withEffect">
+                                <p:cTn id="9" presetID="1" presetClass="entr" presetSubtype="0" fill="hold" nodeType="withEffect">
                                   <p:stCondLst>
                                     <p:cond delay="0"/>
                                   </p:stCondLst>
                                   <p:childTnLst>
                                     <p:set>
                                       <p:cBhvr>
-                                        <p:cTn id="14" dur="1" fill="hold">
+                                        <p:cTn id="10" dur="1" fill="hold">
                                           <p:stCondLst>
                                             <p:cond delay="0"/>
                                           </p:stCondLst>
@@ -8133,26 +7475,26 @@
                     </p:cTn>
                   </p:par>
                   <p:par>
-                    <p:cTn id="15" fill="hold">
+                    <p:cTn id="11" fill="hold">
                       <p:stCondLst>
                         <p:cond delay="indefinite"/>
                       </p:stCondLst>
                       <p:childTnLst>
                         <p:par>
-                          <p:cTn id="16" fill="hold">
+                          <p:cTn id="12" fill="hold">
                             <p:stCondLst>
                               <p:cond delay="0"/>
                             </p:stCondLst>
                             <p:childTnLst>
                               <p:par>
-                                <p:cTn id="17" presetID="1" presetClass="entr" presetSubtype="0" fill="hold" grpId="0" nodeType="clickEffect">
+                                <p:cTn id="13" presetID="1" presetClass="entr" presetSubtype="0" fill="hold" grpId="0" nodeType="clickEffect">
                                   <p:stCondLst>
                                     <p:cond delay="0"/>
                                   </p:stCondLst>
                                   <p:childTnLst>
                                     <p:set>
                                       <p:cBhvr>
-                                        <p:cTn id="18" dur="1" fill="hold">
+                                        <p:cTn id="14" dur="1" fill="hold">
                                           <p:stCondLst>
                                             <p:cond delay="0"/>
                                           </p:stCondLst>
@@ -8194,25 +7536,6 @@
                 </p:cond>
               </p:nextCondLst>
             </p:seq>
-            <p:audio isNarration="1">
-              <p:cMediaNode vol="80000" showWhenStopped="0">
-                <p:cTn id="19" fill="hold" display="0">
-                  <p:stCondLst>
-                    <p:cond delay="indefinite"/>
-                  </p:stCondLst>
-                  <p:endCondLst>
-                    <p:cond evt="onStopAudio" delay="0">
-                      <p:tgtEl>
-                        <p:sldTgt/>
-                      </p:tgtEl>
-                    </p:cond>
-                  </p:endCondLst>
-                </p:cTn>
-                <p:tgtEl>
-                  <p:spTgt spid="81"/>
-                </p:tgtEl>
-              </p:cMediaNode>
-            </p:audio>
           </p:childTnLst>
         </p:cTn>
       </p:par>
@@ -8413,166 +7736,11 @@
           </a:p>
         </p:txBody>
       </p:sp>
-      <p:pic>
-        <p:nvPicPr>
-          <p:cNvPr id="7" name="Áudio 6">
-            <a:hlinkClick r:id="" action="ppaction://media"/>
-            <a:extLst>
-              <a:ext uri="{FF2B5EF4-FFF2-40B4-BE49-F238E27FC236}">
-                <a16:creationId xmlns:a16="http://schemas.microsoft.com/office/drawing/2014/main" id="{D000FDAB-8734-1D51-1D9A-3F3440C2A53A}"/>
-              </a:ext>
-            </a:extLst>
-          </p:cNvPr>
-          <p:cNvPicPr>
-            <a:picLocks noChangeAspect="1"/>
-          </p:cNvPicPr>
-          <p:nvPr>
-            <a:audioFile r:link="rId2"/>
-            <p:extLst>
-              <p:ext uri="{DAA4B4D4-6D71-4841-9C94-3DE7FCFB9230}">
-                <p14:media xmlns:p14="http://schemas.microsoft.com/office/powerpoint/2010/main" r:embed="rId1"/>
-              </p:ext>
-            </p:extLst>
-          </p:nvPr>
-        </p:nvPicPr>
-        <p:blipFill>
-          <a:blip r:embed="rId4"/>
-          <a:srcRect l="-118750" t="-118750" r="-118750" b="-118750"/>
-          <a:stretch>
-            <a:fillRect/>
-          </a:stretch>
-        </p:blipFill>
-        <p:spPr>
-          <a:xfrm>
-            <a:off x="7004304" y="4718304"/>
-            <a:ext cx="2057400" cy="2057400"/>
-          </a:xfrm>
-          <a:prstGeom prst="ellipse">
-            <a:avLst/>
-          </a:prstGeom>
-        </p:spPr>
-      </p:pic>
     </p:spTree>
   </p:cSld>
   <p:clrMapOvr>
     <a:masterClrMapping/>
   </p:clrMapOvr>
-  <mc:AlternateContent xmlns:mc="http://schemas.openxmlformats.org/markup-compatibility/2006">
-    <mc:Choice xmlns:p14="http://schemas.microsoft.com/office/powerpoint/2010/main" Requires="p14">
-      <p:transition spd="slow" p14:dur="2000" advTm="2703"/>
-    </mc:Choice>
-    <mc:Fallback>
-      <p:transition spd="slow" advTm="2703"/>
-    </mc:Fallback>
-  </mc:AlternateContent>
-  <p:timing>
-    <p:tnLst>
-      <p:par>
-        <p:cTn id="1" dur="indefinite" restart="never" nodeType="tmRoot">
-          <p:childTnLst>
-            <p:seq concurrent="1" nextAc="seek">
-              <p:cTn id="2" dur="indefinite" nodeType="mainSeq">
-                <p:childTnLst>
-                  <p:par>
-                    <p:cTn id="3" fill="hold">
-                      <p:stCondLst>
-                        <p:cond delay="indefinite"/>
-                        <p:cond evt="onBegin" delay="0">
-                          <p:tn val="2"/>
-                        </p:cond>
-                      </p:stCondLst>
-                      <p:childTnLst>
-                        <p:par>
-                          <p:cTn id="4" fill="hold">
-                            <p:stCondLst>
-                              <p:cond delay="0"/>
-                            </p:stCondLst>
-                            <p:childTnLst>
-                              <p:par>
-                                <p:cTn id="5" presetID="1" presetClass="mediacall" presetSubtype="0" fill="hold" nodeType="afterEffect">
-                                  <p:stCondLst>
-                                    <p:cond delay="0"/>
-                                  </p:stCondLst>
-                                  <p:childTnLst>
-                                    <p:cmd type="call" cmd="playFrom(0.0)">
-                                      <p:cBhvr>
-                                        <p:cTn id="6" dur="1" fill="hold"/>
-                                        <p:tgtEl>
-                                          <p:spTgt spid="7"/>
-                                        </p:tgtEl>
-                                      </p:cBhvr>
-                                    </p:cmd>
-                                  </p:childTnLst>
-                                </p:cTn>
-                              </p:par>
-                            </p:childTnLst>
-                          </p:cTn>
-                        </p:par>
-                      </p:childTnLst>
-                    </p:cTn>
-                  </p:par>
-                </p:childTnLst>
-              </p:cTn>
-              <p:prevCondLst>
-                <p:cond evt="onPrev" delay="0">
-                  <p:tgtEl>
-                    <p:sldTgt/>
-                  </p:tgtEl>
-                </p:cond>
-              </p:prevCondLst>
-              <p:nextCondLst>
-                <p:cond evt="onNext" delay="0">
-                  <p:tgtEl>
-                    <p:sldTgt/>
-                  </p:tgtEl>
-                </p:cond>
-              </p:nextCondLst>
-            </p:seq>
-            <p:audio isNarration="1">
-              <p:cMediaNode vol="80000" showWhenStopped="0">
-                <p:cTn id="7" fill="hold" display="0">
-                  <p:stCondLst>
-                    <p:cond delay="indefinite"/>
-                  </p:stCondLst>
-                  <p:endCondLst>
-                    <p:cond evt="onStopAudio" delay="0">
-                      <p:tgtEl>
-                        <p:sldTgt/>
-                      </p:tgtEl>
-                    </p:cond>
-                  </p:endCondLst>
-                </p:cTn>
-                <p:tgtEl>
-                  <p:spTgt spid="7"/>
-                </p:tgtEl>
-              </p:cMediaNode>
-            </p:audio>
-          </p:childTnLst>
-        </p:cTn>
-      </p:par>
-    </p:tnLst>
-  </p:timing>
-  <p:extLst>
-    <p:ext uri="{3A86A75C-4F4B-4683-9AE1-C65F6400EC91}">
-      <p14:laserTraceLst xmlns:p14="http://schemas.microsoft.com/office/powerpoint/2010/main">
-        <p14:tracePtLst>
-          <p14:tracePt t="1293" x="7029450" y="3954463"/>
-          <p14:tracePt t="1301" x="7029450" y="4002088"/>
-          <p14:tracePt t="1317" x="7019925" y="3994150"/>
-          <p14:tracePt t="1324" x="7019925" y="4002088"/>
-          <p14:tracePt t="1335" x="7037388" y="4002088"/>
-          <p14:tracePt t="1352" x="8794750" y="4368800"/>
-          <p14:tracePt t="1398" x="933450" y="5791200"/>
-          <p14:tracePt t="1405" x="1752600" y="5981700"/>
-          <p14:tracePt t="1420" x="2400300" y="6140450"/>
-          <p14:tracePt t="1436" x="3289300" y="6261100"/>
-          <p14:tracePt t="1453" x="3759200" y="6254750"/>
-          <p14:tracePt t="1469" x="3797300" y="6254750"/>
-          <p14:tracePt t="1487" x="3803650" y="6254750"/>
-        </p14:tracePtLst>
-      </p14:laserTraceLst>
-    </p:ext>
-  </p:extLst>
 </p:sld>
 </file>
 
@@ -8879,45 +8047,6 @@
           </a:p>
         </p:txBody>
       </p:sp>
-      <p:pic>
-        <p:nvPicPr>
-          <p:cNvPr id="7" name="Áudio 6">
-            <a:hlinkClick r:id="" action="ppaction://media"/>
-            <a:extLst>
-              <a:ext uri="{FF2B5EF4-FFF2-40B4-BE49-F238E27FC236}">
-                <a16:creationId xmlns:a16="http://schemas.microsoft.com/office/drawing/2014/main" id="{16CFF5A2-BEC4-70E1-ECCC-A33817FE0F69}"/>
-              </a:ext>
-            </a:extLst>
-          </p:cNvPr>
-          <p:cNvPicPr>
-            <a:picLocks noChangeAspect="1"/>
-          </p:cNvPicPr>
-          <p:nvPr>
-            <a:audioFile r:link="rId2"/>
-            <p:extLst>
-              <p:ext uri="{DAA4B4D4-6D71-4841-9C94-3DE7FCFB9230}">
-                <p14:media xmlns:p14="http://schemas.microsoft.com/office/powerpoint/2010/main" r:embed="rId1"/>
-              </p:ext>
-            </p:extLst>
-          </p:nvPr>
-        </p:nvPicPr>
-        <p:blipFill>
-          <a:blip r:embed="rId4"/>
-          <a:srcRect l="-118750" t="-118750" r="-118750" b="-118750"/>
-          <a:stretch>
-            <a:fillRect/>
-          </a:stretch>
-        </p:blipFill>
-        <p:spPr>
-          <a:xfrm>
-            <a:off x="7004304" y="4718304"/>
-            <a:ext cx="2057400" cy="2057400"/>
-          </a:xfrm>
-          <a:prstGeom prst="ellipse">
-            <a:avLst/>
-          </a:prstGeom>
-        </p:spPr>
-      </p:pic>
     </p:spTree>
     <p:extLst>
       <p:ext uri="{BB962C8B-B14F-4D97-AF65-F5344CB8AC3E}">
@@ -8930,103 +8059,16 @@
   </p:clrMapOvr>
   <mc:AlternateContent xmlns:mc="http://schemas.openxmlformats.org/markup-compatibility/2006">
     <mc:Choice xmlns:p14="http://schemas.microsoft.com/office/powerpoint/2010/main" Requires="p14">
-      <p:transition spd="slow" p14:dur="2000" advTm="433">
+      <p:transition spd="slow" p14:dur="2000">
         <p:cut/>
       </p:transition>
     </mc:Choice>
     <mc:Fallback>
-      <p:transition spd="slow" advTm="433">
+      <p:transition spd="slow">
         <p:cut/>
       </p:transition>
     </mc:Fallback>
   </mc:AlternateContent>
-  <p:timing>
-    <p:tnLst>
-      <p:par>
-        <p:cTn id="1" dur="indefinite" restart="never" nodeType="tmRoot">
-          <p:childTnLst>
-            <p:seq concurrent="1" nextAc="seek">
-              <p:cTn id="2" dur="indefinite" nodeType="mainSeq">
-                <p:childTnLst>
-                  <p:par>
-                    <p:cTn id="3" fill="hold">
-                      <p:stCondLst>
-                        <p:cond delay="indefinite"/>
-                        <p:cond evt="onBegin" delay="0">
-                          <p:tn val="2"/>
-                        </p:cond>
-                      </p:stCondLst>
-                      <p:childTnLst>
-                        <p:par>
-                          <p:cTn id="4" fill="hold">
-                            <p:stCondLst>
-                              <p:cond delay="0"/>
-                            </p:stCondLst>
-                            <p:childTnLst>
-                              <p:par>
-                                <p:cTn id="5" presetID="1" presetClass="mediacall" presetSubtype="0" fill="hold" nodeType="afterEffect">
-                                  <p:stCondLst>
-                                    <p:cond delay="0"/>
-                                  </p:stCondLst>
-                                  <p:childTnLst>
-                                    <p:cmd type="call" cmd="playFrom(0.0)">
-                                      <p:cBhvr>
-                                        <p:cTn id="6" dur="1" fill="hold"/>
-                                        <p:tgtEl>
-                                          <p:spTgt spid="7"/>
-                                        </p:tgtEl>
-                                      </p:cBhvr>
-                                    </p:cmd>
-                                  </p:childTnLst>
-                                </p:cTn>
-                              </p:par>
-                            </p:childTnLst>
-                          </p:cTn>
-                        </p:par>
-                      </p:childTnLst>
-                    </p:cTn>
-                  </p:par>
-                </p:childTnLst>
-              </p:cTn>
-              <p:prevCondLst>
-                <p:cond evt="onPrev" delay="0">
-                  <p:tgtEl>
-                    <p:sldTgt/>
-                  </p:tgtEl>
-                </p:cond>
-              </p:prevCondLst>
-              <p:nextCondLst>
-                <p:cond evt="onNext" delay="0">
-                  <p:tgtEl>
-                    <p:sldTgt/>
-                  </p:tgtEl>
-                </p:cond>
-              </p:nextCondLst>
-            </p:seq>
-            <p:audio isNarration="1">
-              <p:cMediaNode vol="80000" showWhenStopped="0">
-                <p:cTn id="7" fill="hold" display="0">
-                  <p:stCondLst>
-                    <p:cond delay="indefinite"/>
-                  </p:stCondLst>
-                  <p:endCondLst>
-                    <p:cond evt="onStopAudio" delay="0">
-                      <p:tgtEl>
-                        <p:sldTgt/>
-                      </p:tgtEl>
-                    </p:cond>
-                  </p:endCondLst>
-                </p:cTn>
-                <p:tgtEl>
-                  <p:spTgt spid="7"/>
-                </p:tgtEl>
-              </p:cMediaNode>
-            </p:audio>
-          </p:childTnLst>
-        </p:cTn>
-      </p:par>
-    </p:tnLst>
-  </p:timing>
 </p:sld>
 </file>
 
@@ -9372,45 +8414,6 @@
           </a:p>
         </p:txBody>
       </p:sp>
-      <p:pic>
-        <p:nvPicPr>
-          <p:cNvPr id="7" name="Áudio 6">
-            <a:hlinkClick r:id="" action="ppaction://media"/>
-            <a:extLst>
-              <a:ext uri="{FF2B5EF4-FFF2-40B4-BE49-F238E27FC236}">
-                <a16:creationId xmlns:a16="http://schemas.microsoft.com/office/drawing/2014/main" id="{5027E456-2CF7-1AB7-D60D-16D56DB9E74B}"/>
-              </a:ext>
-            </a:extLst>
-          </p:cNvPr>
-          <p:cNvPicPr>
-            <a:picLocks noChangeAspect="1"/>
-          </p:cNvPicPr>
-          <p:nvPr>
-            <a:audioFile r:link="rId2"/>
-            <p:extLst>
-              <p:ext uri="{DAA4B4D4-6D71-4841-9C94-3DE7FCFB9230}">
-                <p14:media xmlns:p14="http://schemas.microsoft.com/office/powerpoint/2010/main" r:embed="rId1"/>
-              </p:ext>
-            </p:extLst>
-          </p:nvPr>
-        </p:nvPicPr>
-        <p:blipFill>
-          <a:blip r:embed="rId4"/>
-          <a:srcRect l="-118750" t="-118750" r="-118750" b="-118750"/>
-          <a:stretch>
-            <a:fillRect/>
-          </a:stretch>
-        </p:blipFill>
-        <p:spPr>
-          <a:xfrm>
-            <a:off x="7004304" y="4718304"/>
-            <a:ext cx="2057400" cy="2057400"/>
-          </a:xfrm>
-          <a:prstGeom prst="ellipse">
-            <a:avLst/>
-          </a:prstGeom>
-        </p:spPr>
-      </p:pic>
     </p:spTree>
     <p:extLst>
       <p:ext uri="{BB962C8B-B14F-4D97-AF65-F5344CB8AC3E}">
@@ -9423,103 +8426,16 @@
   </p:clrMapOvr>
   <mc:AlternateContent xmlns:mc="http://schemas.openxmlformats.org/markup-compatibility/2006">
     <mc:Choice xmlns:p14="http://schemas.microsoft.com/office/powerpoint/2010/main" Requires="p14">
-      <p:transition spd="slow" p14:dur="2000" advTm="622">
+      <p:transition spd="slow" p14:dur="2000">
         <p:cut/>
       </p:transition>
     </mc:Choice>
     <mc:Fallback>
-      <p:transition spd="slow" advTm="622">
+      <p:transition spd="slow">
         <p:cut/>
       </p:transition>
     </mc:Fallback>
   </mc:AlternateContent>
-  <p:timing>
-    <p:tnLst>
-      <p:par>
-        <p:cTn id="1" dur="indefinite" restart="never" nodeType="tmRoot">
-          <p:childTnLst>
-            <p:seq concurrent="1" nextAc="seek">
-              <p:cTn id="2" dur="indefinite" nodeType="mainSeq">
-                <p:childTnLst>
-                  <p:par>
-                    <p:cTn id="3" fill="hold">
-                      <p:stCondLst>
-                        <p:cond delay="indefinite"/>
-                        <p:cond evt="onBegin" delay="0">
-                          <p:tn val="2"/>
-                        </p:cond>
-                      </p:stCondLst>
-                      <p:childTnLst>
-                        <p:par>
-                          <p:cTn id="4" fill="hold">
-                            <p:stCondLst>
-                              <p:cond delay="0"/>
-                            </p:stCondLst>
-                            <p:childTnLst>
-                              <p:par>
-                                <p:cTn id="5" presetID="1" presetClass="mediacall" presetSubtype="0" fill="hold" nodeType="afterEffect">
-                                  <p:stCondLst>
-                                    <p:cond delay="0"/>
-                                  </p:stCondLst>
-                                  <p:childTnLst>
-                                    <p:cmd type="call" cmd="playFrom(0.0)">
-                                      <p:cBhvr>
-                                        <p:cTn id="6" dur="1" fill="hold"/>
-                                        <p:tgtEl>
-                                          <p:spTgt spid="7"/>
-                                        </p:tgtEl>
-                                      </p:cBhvr>
-                                    </p:cmd>
-                                  </p:childTnLst>
-                                </p:cTn>
-                              </p:par>
-                            </p:childTnLst>
-                          </p:cTn>
-                        </p:par>
-                      </p:childTnLst>
-                    </p:cTn>
-                  </p:par>
-                </p:childTnLst>
-              </p:cTn>
-              <p:prevCondLst>
-                <p:cond evt="onPrev" delay="0">
-                  <p:tgtEl>
-                    <p:sldTgt/>
-                  </p:tgtEl>
-                </p:cond>
-              </p:prevCondLst>
-              <p:nextCondLst>
-                <p:cond evt="onNext" delay="0">
-                  <p:tgtEl>
-                    <p:sldTgt/>
-                  </p:tgtEl>
-                </p:cond>
-              </p:nextCondLst>
-            </p:seq>
-            <p:audio isNarration="1">
-              <p:cMediaNode vol="80000" showWhenStopped="0">
-                <p:cTn id="7" fill="hold" display="0">
-                  <p:stCondLst>
-                    <p:cond delay="indefinite"/>
-                  </p:stCondLst>
-                  <p:endCondLst>
-                    <p:cond evt="onStopAudio" delay="0">
-                      <p:tgtEl>
-                        <p:sldTgt/>
-                      </p:tgtEl>
-                    </p:cond>
-                  </p:endCondLst>
-                </p:cTn>
-                <p:tgtEl>
-                  <p:spTgt spid="7"/>
-                </p:tgtEl>
-              </p:cMediaNode>
-            </p:audio>
-          </p:childTnLst>
-        </p:cTn>
-      </p:par>
-    </p:tnLst>
-  </p:timing>
 </p:sld>
 </file>
 
@@ -9549,7 +8465,7 @@
           <p:nvPr/>
         </p:nvPicPr>
         <p:blipFill>
-          <a:blip r:embed="rId4" cstate="print"/>
+          <a:blip r:embed="rId2" cstate="print"/>
           <a:stretch>
             <a:fillRect/>
           </a:stretch>
@@ -9698,45 +8614,6 @@
           </a:p>
         </p:txBody>
       </p:sp>
-      <p:pic>
-        <p:nvPicPr>
-          <p:cNvPr id="8" name="Áudio 7">
-            <a:hlinkClick r:id="" action="ppaction://media"/>
-            <a:extLst>
-              <a:ext uri="{FF2B5EF4-FFF2-40B4-BE49-F238E27FC236}">
-                <a16:creationId xmlns:a16="http://schemas.microsoft.com/office/drawing/2014/main" id="{C116E63C-A925-7AE5-14FF-BE1E92DB89DD}"/>
-              </a:ext>
-            </a:extLst>
-          </p:cNvPr>
-          <p:cNvPicPr>
-            <a:picLocks noChangeAspect="1"/>
-          </p:cNvPicPr>
-          <p:nvPr>
-            <a:audioFile r:link="rId2"/>
-            <p:extLst>
-              <p:ext uri="{DAA4B4D4-6D71-4841-9C94-3DE7FCFB9230}">
-                <p14:media xmlns:p14="http://schemas.microsoft.com/office/powerpoint/2010/main" r:embed="rId1"/>
-              </p:ext>
-            </p:extLst>
-          </p:nvPr>
-        </p:nvPicPr>
-        <p:blipFill>
-          <a:blip r:embed="rId5"/>
-          <a:srcRect l="-118750" t="-118750" r="-118750" b="-118750"/>
-          <a:stretch>
-            <a:fillRect/>
-          </a:stretch>
-        </p:blipFill>
-        <p:spPr>
-          <a:xfrm>
-            <a:off x="7004304" y="4718304"/>
-            <a:ext cx="2057400" cy="2057400"/>
-          </a:xfrm>
-          <a:prstGeom prst="ellipse">
-            <a:avLst/>
-          </a:prstGeom>
-        </p:spPr>
-      </p:pic>
     </p:spTree>
     <p:extLst>
       <p:ext uri="{BB962C8B-B14F-4D97-AF65-F5344CB8AC3E}">
@@ -9747,101 +8624,6 @@
   <p:clrMapOvr>
     <a:masterClrMapping/>
   </p:clrMapOvr>
-  <mc:AlternateContent xmlns:mc="http://schemas.openxmlformats.org/markup-compatibility/2006">
-    <mc:Choice xmlns:p14="http://schemas.microsoft.com/office/powerpoint/2010/main" Requires="p14">
-      <p:transition spd="slow" p14:dur="2000" advTm="627"/>
-    </mc:Choice>
-    <mc:Fallback>
-      <p:transition spd="slow" advTm="627"/>
-    </mc:Fallback>
-  </mc:AlternateContent>
-  <p:timing>
-    <p:tnLst>
-      <p:par>
-        <p:cTn id="1" dur="indefinite" restart="never" nodeType="tmRoot">
-          <p:childTnLst>
-            <p:seq concurrent="1" nextAc="seek">
-              <p:cTn id="2" dur="indefinite" nodeType="mainSeq">
-                <p:childTnLst>
-                  <p:par>
-                    <p:cTn id="3" fill="hold">
-                      <p:stCondLst>
-                        <p:cond delay="indefinite"/>
-                        <p:cond evt="onBegin" delay="0">
-                          <p:tn val="2"/>
-                        </p:cond>
-                      </p:stCondLst>
-                      <p:childTnLst>
-                        <p:par>
-                          <p:cTn id="4" fill="hold">
-                            <p:stCondLst>
-                              <p:cond delay="0"/>
-                            </p:stCondLst>
-                            <p:childTnLst>
-                              <p:par>
-                                <p:cTn id="5" presetID="1" presetClass="mediacall" presetSubtype="0" fill="hold" nodeType="afterEffect">
-                                  <p:stCondLst>
-                                    <p:cond delay="0"/>
-                                  </p:stCondLst>
-                                  <p:childTnLst>
-                                    <p:cmd type="call" cmd="playFrom(0.0)">
-                                      <p:cBhvr>
-                                        <p:cTn id="6" dur="1" fill="hold"/>
-                                        <p:tgtEl>
-                                          <p:spTgt spid="8"/>
-                                        </p:tgtEl>
-                                      </p:cBhvr>
-                                    </p:cmd>
-                                  </p:childTnLst>
-                                </p:cTn>
-                              </p:par>
-                            </p:childTnLst>
-                          </p:cTn>
-                        </p:par>
-                      </p:childTnLst>
-                    </p:cTn>
-                  </p:par>
-                </p:childTnLst>
-              </p:cTn>
-              <p:prevCondLst>
-                <p:cond evt="onPrev" delay="0">
-                  <p:tgtEl>
-                    <p:sldTgt/>
-                  </p:tgtEl>
-                </p:cond>
-              </p:prevCondLst>
-              <p:nextCondLst>
-                <p:cond evt="onNext" delay="0">
-                  <p:tgtEl>
-                    <p:sldTgt/>
-                  </p:tgtEl>
-                </p:cond>
-              </p:nextCondLst>
-            </p:seq>
-            <p:audio isNarration="1">
-              <p:cMediaNode vol="80000" showWhenStopped="0">
-                <p:cTn id="7" fill="hold" display="0">
-                  <p:stCondLst>
-                    <p:cond delay="indefinite"/>
-                  </p:stCondLst>
-                  <p:endCondLst>
-                    <p:cond evt="onStopAudio" delay="0">
-                      <p:tgtEl>
-                        <p:sldTgt/>
-                      </p:tgtEl>
-                    </p:cond>
-                  </p:endCondLst>
-                </p:cTn>
-                <p:tgtEl>
-                  <p:spTgt spid="8"/>
-                </p:tgtEl>
-              </p:cMediaNode>
-            </p:audio>
-          </p:childTnLst>
-        </p:cTn>
-      </p:par>
-    </p:tnLst>
-  </p:timing>
 </p:sld>
 </file>
 
@@ -9871,7 +8653,7 @@
           <p:nvPr/>
         </p:nvPicPr>
         <p:blipFill rotWithShape="1">
-          <a:blip r:embed="rId4" cstate="print">
+          <a:blip r:embed="rId2" cstate="print">
             <a:extLst>
               <a:ext uri="{28A0092B-C50C-407E-A947-70E740481C1C}">
                 <a14:useLocalDpi xmlns:a14="http://schemas.microsoft.com/office/drawing/2010/main" val="0"/>
@@ -9956,45 +8738,6 @@
           </a:p>
         </p:txBody>
       </p:sp>
-      <p:pic>
-        <p:nvPicPr>
-          <p:cNvPr id="9" name="Áudio 8">
-            <a:hlinkClick r:id="" action="ppaction://media"/>
-            <a:extLst>
-              <a:ext uri="{FF2B5EF4-FFF2-40B4-BE49-F238E27FC236}">
-                <a16:creationId xmlns:a16="http://schemas.microsoft.com/office/drawing/2014/main" id="{E3A7E23F-2F3C-AAF2-CA7E-D1FD75B53958}"/>
-              </a:ext>
-            </a:extLst>
-          </p:cNvPr>
-          <p:cNvPicPr>
-            <a:picLocks noChangeAspect="1"/>
-          </p:cNvPicPr>
-          <p:nvPr>
-            <a:audioFile r:link="rId2"/>
-            <p:extLst>
-              <p:ext uri="{DAA4B4D4-6D71-4841-9C94-3DE7FCFB9230}">
-                <p14:media xmlns:p14="http://schemas.microsoft.com/office/powerpoint/2010/main" r:embed="rId1"/>
-              </p:ext>
-            </p:extLst>
-          </p:nvPr>
-        </p:nvPicPr>
-        <p:blipFill>
-          <a:blip r:embed="rId5"/>
-          <a:srcRect l="-118750" t="-118750" r="-118750" b="-118750"/>
-          <a:stretch>
-            <a:fillRect/>
-          </a:stretch>
-        </p:blipFill>
-        <p:spPr>
-          <a:xfrm>
-            <a:off x="7004304" y="4718304"/>
-            <a:ext cx="2057400" cy="2057400"/>
-          </a:xfrm>
-          <a:prstGeom prst="ellipse">
-            <a:avLst/>
-          </a:prstGeom>
-        </p:spPr>
-      </p:pic>
     </p:spTree>
     <p:extLst>
       <p:ext uri="{BB962C8B-B14F-4D97-AF65-F5344CB8AC3E}">
@@ -10005,101 +8748,6 @@
   <p:clrMapOvr>
     <a:masterClrMapping/>
   </p:clrMapOvr>
-  <mc:AlternateContent xmlns:mc="http://schemas.openxmlformats.org/markup-compatibility/2006">
-    <mc:Choice xmlns:p14="http://schemas.microsoft.com/office/powerpoint/2010/main" Requires="p14">
-      <p:transition spd="slow" p14:dur="2000" advTm="645"/>
-    </mc:Choice>
-    <mc:Fallback>
-      <p:transition spd="slow" advTm="645"/>
-    </mc:Fallback>
-  </mc:AlternateContent>
-  <p:timing>
-    <p:tnLst>
-      <p:par>
-        <p:cTn id="1" dur="indefinite" restart="never" nodeType="tmRoot">
-          <p:childTnLst>
-            <p:seq concurrent="1" nextAc="seek">
-              <p:cTn id="2" dur="indefinite" nodeType="mainSeq">
-                <p:childTnLst>
-                  <p:par>
-                    <p:cTn id="3" fill="hold">
-                      <p:stCondLst>
-                        <p:cond delay="indefinite"/>
-                        <p:cond evt="onBegin" delay="0">
-                          <p:tn val="2"/>
-                        </p:cond>
-                      </p:stCondLst>
-                      <p:childTnLst>
-                        <p:par>
-                          <p:cTn id="4" fill="hold">
-                            <p:stCondLst>
-                              <p:cond delay="0"/>
-                            </p:stCondLst>
-                            <p:childTnLst>
-                              <p:par>
-                                <p:cTn id="5" presetID="1" presetClass="mediacall" presetSubtype="0" fill="hold" nodeType="afterEffect">
-                                  <p:stCondLst>
-                                    <p:cond delay="0"/>
-                                  </p:stCondLst>
-                                  <p:childTnLst>
-                                    <p:cmd type="call" cmd="playFrom(0.0)">
-                                      <p:cBhvr>
-                                        <p:cTn id="6" dur="1" fill="hold"/>
-                                        <p:tgtEl>
-                                          <p:spTgt spid="9"/>
-                                        </p:tgtEl>
-                                      </p:cBhvr>
-                                    </p:cmd>
-                                  </p:childTnLst>
-                                </p:cTn>
-                              </p:par>
-                            </p:childTnLst>
-                          </p:cTn>
-                        </p:par>
-                      </p:childTnLst>
-                    </p:cTn>
-                  </p:par>
-                </p:childTnLst>
-              </p:cTn>
-              <p:prevCondLst>
-                <p:cond evt="onPrev" delay="0">
-                  <p:tgtEl>
-                    <p:sldTgt/>
-                  </p:tgtEl>
-                </p:cond>
-              </p:prevCondLst>
-              <p:nextCondLst>
-                <p:cond evt="onNext" delay="0">
-                  <p:tgtEl>
-                    <p:sldTgt/>
-                  </p:tgtEl>
-                </p:cond>
-              </p:nextCondLst>
-            </p:seq>
-            <p:audio isNarration="1">
-              <p:cMediaNode vol="80000" showWhenStopped="0">
-                <p:cTn id="7" fill="hold" display="0">
-                  <p:stCondLst>
-                    <p:cond delay="indefinite"/>
-                  </p:stCondLst>
-                  <p:endCondLst>
-                    <p:cond evt="onStopAudio" delay="0">
-                      <p:tgtEl>
-                        <p:sldTgt/>
-                      </p:tgtEl>
-                    </p:cond>
-                  </p:endCondLst>
-                </p:cTn>
-                <p:tgtEl>
-                  <p:spTgt spid="9"/>
-                </p:tgtEl>
-              </p:cMediaNode>
-            </p:audio>
-          </p:childTnLst>
-        </p:cTn>
-      </p:par>
-    </p:tnLst>
-  </p:timing>
 </p:sld>
 </file>
 
@@ -10129,7 +8777,7 @@
           <p:nvPr/>
         </p:nvPicPr>
         <p:blipFill>
-          <a:blip r:embed="rId5" cstate="print"/>
+          <a:blip r:embed="rId3" cstate="print"/>
           <a:stretch>
             <a:fillRect/>
           </a:stretch>
@@ -10366,45 +9014,6 @@
           </a:p>
         </p:txBody>
       </p:sp>
-      <p:pic>
-        <p:nvPicPr>
-          <p:cNvPr id="18" name="Áudio 17">
-            <a:hlinkClick r:id="" action="ppaction://media"/>
-            <a:extLst>
-              <a:ext uri="{FF2B5EF4-FFF2-40B4-BE49-F238E27FC236}">
-                <a16:creationId xmlns:a16="http://schemas.microsoft.com/office/drawing/2014/main" id="{B4D12F94-1633-C5AD-54A8-5B22A2EF6E43}"/>
-              </a:ext>
-            </a:extLst>
-          </p:cNvPr>
-          <p:cNvPicPr>
-            <a:picLocks noChangeAspect="1"/>
-          </p:cNvPicPr>
-          <p:nvPr>
-            <a:audioFile r:link="rId3"/>
-            <p:extLst>
-              <p:ext uri="{DAA4B4D4-6D71-4841-9C94-3DE7FCFB9230}">
-                <p14:media xmlns:p14="http://schemas.microsoft.com/office/powerpoint/2010/main" r:embed="rId2"/>
-              </p:ext>
-            </p:extLst>
-          </p:nvPr>
-        </p:nvPicPr>
-        <p:blipFill>
-          <a:blip r:embed="rId6"/>
-          <a:srcRect l="-118750" t="-118750" r="-118750" b="-118750"/>
-          <a:stretch>
-            <a:fillRect/>
-          </a:stretch>
-        </p:blipFill>
-        <p:spPr>
-          <a:xfrm>
-            <a:off x="7004304" y="4718304"/>
-            <a:ext cx="2057400" cy="2057400"/>
-          </a:xfrm>
-          <a:prstGeom prst="ellipse">
-            <a:avLst/>
-          </a:prstGeom>
-        </p:spPr>
-      </p:pic>
     </p:spTree>
     <p:custDataLst>
       <p:tags r:id="rId1"/>
@@ -10418,14 +9027,6 @@
   <p:clrMapOvr>
     <a:masterClrMapping/>
   </p:clrMapOvr>
-  <mc:AlternateContent xmlns:mc="http://schemas.openxmlformats.org/markup-compatibility/2006">
-    <mc:Choice xmlns:p14="http://schemas.microsoft.com/office/powerpoint/2010/main" Requires="p14">
-      <p:transition spd="slow" p14:dur="2000" advTm="2006"/>
-    </mc:Choice>
-    <mc:Fallback>
-      <p:transition spd="slow" advTm="2006"/>
-    </mc:Fallback>
-  </mc:AlternateContent>
   <p:timing>
     <p:tnLst>
       <p:par>
@@ -10438,9 +9039,6 @@
                     <p:cTn id="3" fill="hold">
                       <p:stCondLst>
                         <p:cond delay="indefinite"/>
-                        <p:cond evt="onBegin" delay="0">
-                          <p:tn val="2"/>
-                        </p:cond>
                       </p:stCondLst>
                       <p:childTnLst>
                         <p:par>
@@ -10450,20 +9048,46 @@
                             </p:stCondLst>
                             <p:childTnLst>
                               <p:par>
-                                <p:cTn id="5" presetID="1" presetClass="mediacall" presetSubtype="0" fill="hold" nodeType="afterEffect">
+                                <p:cTn id="5" presetID="1" presetClass="entr" presetSubtype="0" fill="hold" grpId="0" nodeType="clickEffect">
                                   <p:stCondLst>
                                     <p:cond delay="0"/>
                                   </p:stCondLst>
                                   <p:childTnLst>
-                                    <p:cmd type="call" cmd="playFrom(0.0)">
+                                    <p:set>
                                       <p:cBhvr>
-                                        <p:cTn id="6" dur="1" fill="hold"/>
+                                        <p:cTn id="6" dur="1" fill="hold">
+                                          <p:stCondLst>
+                                            <p:cond delay="0"/>
+                                          </p:stCondLst>
+                                        </p:cTn>
                                         <p:tgtEl>
-                                          <p:spTgt spid="18"/>
+                                          <p:spTgt spid="4"/>
                                         </p:tgtEl>
+                                        <p:attrNameLst>
+                                          <p:attrName>style.visibility</p:attrName>
+                                        </p:attrNameLst>
                                       </p:cBhvr>
-                                    </p:cmd>
+                                      <p:to>
+                                        <p:strVal val="visible"/>
+                                      </p:to>
+                                    </p:set>
                                   </p:childTnLst>
+                                  <p:subTnLst>
+                                    <p:set>
+                                      <p:cBhvr override="childStyle">
+                                        <p:cTn dur="1" fill="hold" display="0" masterRel="nextClick" afterEffect="1"/>
+                                        <p:tgtEl>
+                                          <p:spTgt spid="4"/>
+                                        </p:tgtEl>
+                                        <p:attrNameLst>
+                                          <p:attrName>style.visibility</p:attrName>
+                                        </p:attrNameLst>
+                                      </p:cBhvr>
+                                      <p:to>
+                                        <p:strVal val="hidden"/>
+                                      </p:to>
+                                    </p:set>
+                                  </p:subTnLst>
                                 </p:cTn>
                               </p:par>
                             </p:childTnLst>
@@ -10498,7 +9122,7 @@
                                           </p:stCondLst>
                                         </p:cTn>
                                         <p:tgtEl>
-                                          <p:spTgt spid="4"/>
+                                          <p:spTgt spid="9"/>
                                         </p:tgtEl>
                                         <p:attrNameLst>
                                           <p:attrName>style.visibility</p:attrName>
@@ -10514,7 +9138,7 @@
                                       <p:cBhvr override="childStyle">
                                         <p:cTn dur="1" fill="hold" display="0" masterRel="nextClick" afterEffect="1"/>
                                         <p:tgtEl>
-                                          <p:spTgt spid="4"/>
+                                          <p:spTgt spid="9"/>
                                         </p:tgtEl>
                                         <p:attrNameLst>
                                           <p:attrName>style.visibility</p:attrName>
@@ -10559,7 +9183,7 @@
                                           </p:stCondLst>
                                         </p:cTn>
                                         <p:tgtEl>
-                                          <p:spTgt spid="9"/>
+                                          <p:spTgt spid="11"/>
                                         </p:tgtEl>
                                         <p:attrNameLst>
                                           <p:attrName>style.visibility</p:attrName>
@@ -10575,7 +9199,7 @@
                                       <p:cBhvr override="childStyle">
                                         <p:cTn dur="1" fill="hold" display="0" masterRel="nextClick" afterEffect="1"/>
                                         <p:tgtEl>
-                                          <p:spTgt spid="9"/>
+                                          <p:spTgt spid="11"/>
                                         </p:tgtEl>
                                         <p:attrNameLst>
                                           <p:attrName>style.visibility</p:attrName>
@@ -10620,67 +9244,6 @@
                                           </p:stCondLst>
                                         </p:cTn>
                                         <p:tgtEl>
-                                          <p:spTgt spid="11"/>
-                                        </p:tgtEl>
-                                        <p:attrNameLst>
-                                          <p:attrName>style.visibility</p:attrName>
-                                        </p:attrNameLst>
-                                      </p:cBhvr>
-                                      <p:to>
-                                        <p:strVal val="visible"/>
-                                      </p:to>
-                                    </p:set>
-                                  </p:childTnLst>
-                                  <p:subTnLst>
-                                    <p:set>
-                                      <p:cBhvr override="childStyle">
-                                        <p:cTn dur="1" fill="hold" display="0" masterRel="nextClick" afterEffect="1"/>
-                                        <p:tgtEl>
-                                          <p:spTgt spid="11"/>
-                                        </p:tgtEl>
-                                        <p:attrNameLst>
-                                          <p:attrName>style.visibility</p:attrName>
-                                        </p:attrNameLst>
-                                      </p:cBhvr>
-                                      <p:to>
-                                        <p:strVal val="hidden"/>
-                                      </p:to>
-                                    </p:set>
-                                  </p:subTnLst>
-                                </p:cTn>
-                              </p:par>
-                            </p:childTnLst>
-                          </p:cTn>
-                        </p:par>
-                      </p:childTnLst>
-                    </p:cTn>
-                  </p:par>
-                  <p:par>
-                    <p:cTn id="19" fill="hold">
-                      <p:stCondLst>
-                        <p:cond delay="indefinite"/>
-                      </p:stCondLst>
-                      <p:childTnLst>
-                        <p:par>
-                          <p:cTn id="20" fill="hold">
-                            <p:stCondLst>
-                              <p:cond delay="0"/>
-                            </p:stCondLst>
-                            <p:childTnLst>
-                              <p:par>
-                                <p:cTn id="21" presetID="1" presetClass="entr" presetSubtype="0" fill="hold" grpId="0" nodeType="clickEffect">
-                                  <p:stCondLst>
-                                    <p:cond delay="0"/>
-                                  </p:stCondLst>
-                                  <p:childTnLst>
-                                    <p:set>
-                                      <p:cBhvr>
-                                        <p:cTn id="22" dur="1" fill="hold">
-                                          <p:stCondLst>
-                                            <p:cond delay="0"/>
-                                          </p:stCondLst>
-                                        </p:cTn>
-                                        <p:tgtEl>
                                           <p:spTgt spid="10"/>
                                         </p:tgtEl>
                                         <p:attrNameLst>
@@ -10717,25 +9280,6 @@
                 </p:cond>
               </p:nextCondLst>
             </p:seq>
-            <p:audio isNarration="1">
-              <p:cMediaNode vol="80000" showWhenStopped="0">
-                <p:cTn id="23" fill="hold" display="0">
-                  <p:stCondLst>
-                    <p:cond delay="indefinite"/>
-                  </p:stCondLst>
-                  <p:endCondLst>
-                    <p:cond evt="onStopAudio" delay="0">
-                      <p:tgtEl>
-                        <p:sldTgt/>
-                      </p:tgtEl>
-                    </p:cond>
-                  </p:endCondLst>
-                </p:cTn>
-                <p:tgtEl>
-                  <p:spTgt spid="18"/>
-                </p:tgtEl>
-              </p:cMediaNode>
-            </p:audio>
           </p:childTnLst>
         </p:cTn>
       </p:par>

--- a/ppt/00Apres.pptx
+++ b/ppt/00Apres.pptx
@@ -167,13 +167,140 @@
 <file path=ppt/revisionInfo.xml><?xml version="1.0" encoding="utf-8"?>
 <p1510:revInfo xmlns:a="http://schemas.openxmlformats.org/drawingml/2006/main" xmlns:r="http://schemas.openxmlformats.org/officeDocument/2006/relationships" xmlns:p1510="http://schemas.microsoft.com/office/powerpoint/2015/10/main">
   <p1510:revLst>
-    <p1510:client id="{435231E9-EFF7-4B35-A063-2CE70FCF688A}" v="4" dt="2025-06-12T14:30:44.493"/>
+    <p1510:client id="{F2158640-15C1-4F25-A17A-24B8B41F7D90}" v="4" dt="2025-06-16T02:12:23.013"/>
   </p1510:revLst>
 </p1510:revInfo>
 </file>
 
 <file path=ppt/changesInfos/changesInfo1.xml><?xml version="1.0" encoding="utf-8"?>
 <pc:chgInfo xmlns:a="http://schemas.openxmlformats.org/drawingml/2006/main" xmlns:r="http://schemas.openxmlformats.org/officeDocument/2006/relationships" xmlns:ac="http://schemas.microsoft.com/office/drawing/2013/main/command" xmlns:pc="http://schemas.microsoft.com/office/powerpoint/2013/main/command">
+  <pc:docChgLst>
+    <pc:chgData name="Camilo Daleles Rennó" userId="eac9aab033b2f962" providerId="LiveId" clId="{F2158640-15C1-4F25-A17A-24B8B41F7D90}"/>
+    <pc:docChg chg="undo redo custSel modSld">
+      <pc:chgData name="Camilo Daleles Rennó" userId="eac9aab033b2f962" providerId="LiveId" clId="{F2158640-15C1-4F25-A17A-24B8B41F7D90}" dt="2025-06-16T02:12:23.013" v="127"/>
+      <pc:docMkLst>
+        <pc:docMk/>
+      </pc:docMkLst>
+      <pc:sldChg chg="addSp delSp modSp mod addAnim delAnim modAnim">
+        <pc:chgData name="Camilo Daleles Rennó" userId="eac9aab033b2f962" providerId="LiveId" clId="{F2158640-15C1-4F25-A17A-24B8B41F7D90}" dt="2025-06-16T02:10:57.899" v="126" actId="1035"/>
+        <pc:sldMkLst>
+          <pc:docMk/>
+          <pc:sldMk cId="2956632756" sldId="394"/>
+        </pc:sldMkLst>
+        <pc:spChg chg="del">
+          <ac:chgData name="Camilo Daleles Rennó" userId="eac9aab033b2f962" providerId="LiveId" clId="{F2158640-15C1-4F25-A17A-24B8B41F7D90}" dt="2025-06-16T01:48:38.728" v="0" actId="478"/>
+          <ac:spMkLst>
+            <pc:docMk/>
+            <pc:sldMk cId="2956632756" sldId="394"/>
+            <ac:spMk id="2" creationId="{00000000-0000-0000-0000-000000000000}"/>
+          </ac:spMkLst>
+        </pc:spChg>
+        <pc:spChg chg="add del mod">
+          <ac:chgData name="Camilo Daleles Rennó" userId="eac9aab033b2f962" providerId="LiveId" clId="{F2158640-15C1-4F25-A17A-24B8B41F7D90}" dt="2025-06-16T01:58:30.929" v="83" actId="21"/>
+          <ac:spMkLst>
+            <pc:docMk/>
+            <pc:sldMk cId="2956632756" sldId="394"/>
+            <ac:spMk id="6" creationId="{4C6BF194-C996-C851-56D8-C4F059D6A25B}"/>
+          </ac:spMkLst>
+        </pc:spChg>
+        <pc:picChg chg="del mod">
+          <ac:chgData name="Camilo Daleles Rennó" userId="eac9aab033b2f962" providerId="LiveId" clId="{F2158640-15C1-4F25-A17A-24B8B41F7D90}" dt="2025-06-16T01:55:38.530" v="5" actId="478"/>
+          <ac:picMkLst>
+            <pc:docMk/>
+            <pc:sldMk cId="2956632756" sldId="394"/>
+            <ac:picMk id="4" creationId="{00000000-0000-0000-0000-000000000000}"/>
+          </ac:picMkLst>
+        </pc:picChg>
+        <pc:picChg chg="add del mod">
+          <ac:chgData name="Camilo Daleles Rennó" userId="eac9aab033b2f962" providerId="LiveId" clId="{F2158640-15C1-4F25-A17A-24B8B41F7D90}" dt="2025-06-16T02:10:51.313" v="125" actId="478"/>
+          <ac:picMkLst>
+            <pc:docMk/>
+            <pc:sldMk cId="2956632756" sldId="394"/>
+            <ac:picMk id="5" creationId="{3E10ECAB-B872-10E2-3670-133847EB6AC6}"/>
+          </ac:picMkLst>
+        </pc:picChg>
+        <pc:picChg chg="add mod">
+          <ac:chgData name="Camilo Daleles Rennó" userId="eac9aab033b2f962" providerId="LiveId" clId="{F2158640-15C1-4F25-A17A-24B8B41F7D90}" dt="2025-06-16T02:10:57.899" v="126" actId="1035"/>
+          <ac:picMkLst>
+            <pc:docMk/>
+            <pc:sldMk cId="2956632756" sldId="394"/>
+            <ac:picMk id="9" creationId="{4F03EC55-8767-F28F-A029-D73269292570}"/>
+          </ac:picMkLst>
+        </pc:picChg>
+      </pc:sldChg>
+      <pc:sldChg chg="addSp delSp modSp mod modAnim">
+        <pc:chgData name="Camilo Daleles Rennó" userId="eac9aab033b2f962" providerId="LiveId" clId="{F2158640-15C1-4F25-A17A-24B8B41F7D90}" dt="2025-06-16T02:12:23.013" v="127"/>
+        <pc:sldMkLst>
+          <pc:docMk/>
+          <pc:sldMk cId="3928394977" sldId="395"/>
+        </pc:sldMkLst>
+        <pc:spChg chg="mod">
+          <ac:chgData name="Camilo Daleles Rennó" userId="eac9aab033b2f962" providerId="LiveId" clId="{F2158640-15C1-4F25-A17A-24B8B41F7D90}" dt="2025-06-16T02:10:12.344" v="113" actId="1035"/>
+          <ac:spMkLst>
+            <pc:docMk/>
+            <pc:sldMk cId="3928394977" sldId="395"/>
+            <ac:spMk id="4" creationId="{00000000-0000-0000-0000-000000000000}"/>
+          </ac:spMkLst>
+        </pc:spChg>
+        <pc:spChg chg="add mod">
+          <ac:chgData name="Camilo Daleles Rennó" userId="eac9aab033b2f962" providerId="LiveId" clId="{F2158640-15C1-4F25-A17A-24B8B41F7D90}" dt="2025-06-16T02:10:12.344" v="113" actId="1035"/>
+          <ac:spMkLst>
+            <pc:docMk/>
+            <pc:sldMk cId="3928394977" sldId="395"/>
+            <ac:spMk id="7" creationId="{4C6BF194-C996-C851-56D8-C4F059D6A25B}"/>
+          </ac:spMkLst>
+        </pc:spChg>
+        <pc:spChg chg="mod">
+          <ac:chgData name="Camilo Daleles Rennó" userId="eac9aab033b2f962" providerId="LiveId" clId="{F2158640-15C1-4F25-A17A-24B8B41F7D90}" dt="2025-06-16T02:10:12.344" v="113" actId="1035"/>
+          <ac:spMkLst>
+            <pc:docMk/>
+            <pc:sldMk cId="3928394977" sldId="395"/>
+            <ac:spMk id="9" creationId="{00000000-0000-0000-0000-000000000000}"/>
+          </ac:spMkLst>
+        </pc:spChg>
+        <pc:spChg chg="mod">
+          <ac:chgData name="Camilo Daleles Rennó" userId="eac9aab033b2f962" providerId="LiveId" clId="{F2158640-15C1-4F25-A17A-24B8B41F7D90}" dt="2025-06-16T02:10:12.344" v="113" actId="1035"/>
+          <ac:spMkLst>
+            <pc:docMk/>
+            <pc:sldMk cId="3928394977" sldId="395"/>
+            <ac:spMk id="10" creationId="{00000000-0000-0000-0000-000000000000}"/>
+          </ac:spMkLst>
+        </pc:spChg>
+        <pc:spChg chg="mod">
+          <ac:chgData name="Camilo Daleles Rennó" userId="eac9aab033b2f962" providerId="LiveId" clId="{F2158640-15C1-4F25-A17A-24B8B41F7D90}" dt="2025-06-16T02:10:12.344" v="113" actId="1035"/>
+          <ac:spMkLst>
+            <pc:docMk/>
+            <pc:sldMk cId="3928394977" sldId="395"/>
+            <ac:spMk id="11" creationId="{00000000-0000-0000-0000-000000000000}"/>
+          </ac:spMkLst>
+        </pc:spChg>
+        <pc:picChg chg="add del mod">
+          <ac:chgData name="Camilo Daleles Rennó" userId="eac9aab033b2f962" providerId="LiveId" clId="{F2158640-15C1-4F25-A17A-24B8B41F7D90}" dt="2025-06-16T01:57:27.373" v="18" actId="478"/>
+          <ac:picMkLst>
+            <pc:docMk/>
+            <pc:sldMk cId="3928394977" sldId="395"/>
+            <ac:picMk id="2" creationId="{00000000-0000-0000-0000-000000000000}"/>
+          </ac:picMkLst>
+        </pc:picChg>
+        <pc:picChg chg="add del mod ord modCrop">
+          <ac:chgData name="Camilo Daleles Rennó" userId="eac9aab033b2f962" providerId="LiveId" clId="{F2158640-15C1-4F25-A17A-24B8B41F7D90}" dt="2025-06-16T02:09:58.575" v="105" actId="478"/>
+          <ac:picMkLst>
+            <pc:docMk/>
+            <pc:sldMk cId="3928394977" sldId="395"/>
+            <ac:picMk id="6" creationId="{B43F150C-2FBE-23EF-DC1B-ED2B9F9FA4C0}"/>
+          </ac:picMkLst>
+        </pc:picChg>
+        <pc:picChg chg="add mod ord">
+          <ac:chgData name="Camilo Daleles Rennó" userId="eac9aab033b2f962" providerId="LiveId" clId="{F2158640-15C1-4F25-A17A-24B8B41F7D90}" dt="2025-06-16T02:09:56.165" v="104" actId="167"/>
+          <ac:picMkLst>
+            <pc:docMk/>
+            <pc:sldMk cId="3928394977" sldId="395"/>
+            <ac:picMk id="12" creationId="{029AA786-4420-9D8E-AEDB-4F8F7B19233C}"/>
+          </ac:picMkLst>
+        </pc:picChg>
+      </pc:sldChg>
+    </pc:docChg>
+  </pc:docChgLst>
   <pc:docChgLst>
     <pc:chgData name="Camilo Rennó" userId="eac9aab033b2f962" providerId="LiveId" clId="{5395F24D-1F66-4E6A-99E7-5137BBD24C62}"/>
     <pc:docChg chg="modSld">
@@ -211,14 +338,6 @@
             <ac:spMk id="3074" creationId="{00000000-0000-0000-0000-000000000000}"/>
           </ac:spMkLst>
         </pc:spChg>
-        <pc:picChg chg="add del mod">
-          <ac:chgData name="Camilo Daleles Rennó" userId="eac9aab033b2f962" providerId="LiveId" clId="{435231E9-EFF7-4B35-A063-2CE70FCF688A}" dt="2025-06-12T14:30:44.477" v="13"/>
-          <ac:picMkLst>
-            <pc:docMk/>
-            <pc:sldMk cId="0" sldId="345"/>
-            <ac:picMk id="11" creationId="{7BC73855-528A-64EC-1889-FC03BB10769B}"/>
-          </ac:picMkLst>
-        </pc:picChg>
       </pc:sldChg>
       <pc:sldChg chg="addSp delSp modSp mod modTransition modAnim">
         <pc:chgData name="Camilo Daleles Rennó" userId="eac9aab033b2f962" providerId="LiveId" clId="{435231E9-EFF7-4B35-A063-2CE70FCF688A}" dt="2025-06-12T14:30:44.477" v="13"/>
@@ -226,14 +345,6 @@
           <pc:docMk/>
           <pc:sldMk cId="0" sldId="366"/>
         </pc:sldMkLst>
-        <pc:picChg chg="add del mod">
-          <ac:chgData name="Camilo Daleles Rennó" userId="eac9aab033b2f962" providerId="LiveId" clId="{435231E9-EFF7-4B35-A063-2CE70FCF688A}" dt="2025-06-12T14:30:44.477" v="13"/>
-          <ac:picMkLst>
-            <pc:docMk/>
-            <pc:sldMk cId="0" sldId="366"/>
-            <ac:picMk id="7" creationId="{D000FDAB-8734-1D51-1D9A-3F3440C2A53A}"/>
-          </ac:picMkLst>
-        </pc:picChg>
       </pc:sldChg>
       <pc:sldChg chg="addSp delSp modSp mod modTransition modAnim">
         <pc:chgData name="Camilo Daleles Rennó" userId="eac9aab033b2f962" providerId="LiveId" clId="{435231E9-EFF7-4B35-A063-2CE70FCF688A}" dt="2025-06-12T14:30:44.477" v="13"/>
@@ -241,14 +352,6 @@
           <pc:docMk/>
           <pc:sldMk cId="33346296" sldId="374"/>
         </pc:sldMkLst>
-        <pc:picChg chg="add del mod">
-          <ac:chgData name="Camilo Daleles Rennó" userId="eac9aab033b2f962" providerId="LiveId" clId="{435231E9-EFF7-4B35-A063-2CE70FCF688A}" dt="2025-06-12T14:30:44.477" v="13"/>
-          <ac:picMkLst>
-            <pc:docMk/>
-            <pc:sldMk cId="33346296" sldId="374"/>
-            <ac:picMk id="11" creationId="{FB357070-E09F-48FA-B3EF-666CF1D0134C}"/>
-          </ac:picMkLst>
-        </pc:picChg>
       </pc:sldChg>
       <pc:sldChg chg="addSp delSp modSp mod modTransition modAnim">
         <pc:chgData name="Camilo Daleles Rennó" userId="eac9aab033b2f962" providerId="LiveId" clId="{435231E9-EFF7-4B35-A063-2CE70FCF688A}" dt="2025-06-12T14:30:44.477" v="13"/>
@@ -256,14 +359,6 @@
           <pc:docMk/>
           <pc:sldMk cId="1916879497" sldId="375"/>
         </pc:sldMkLst>
-        <pc:picChg chg="add del mod">
-          <ac:chgData name="Camilo Daleles Rennó" userId="eac9aab033b2f962" providerId="LiveId" clId="{435231E9-EFF7-4B35-A063-2CE70FCF688A}" dt="2025-06-12T14:30:44.477" v="13"/>
-          <ac:picMkLst>
-            <pc:docMk/>
-            <pc:sldMk cId="1916879497" sldId="375"/>
-            <ac:picMk id="81" creationId="{B0DE8F5F-567A-BF98-7BE6-8F0B77209FB4}"/>
-          </ac:picMkLst>
-        </pc:picChg>
       </pc:sldChg>
       <pc:sldChg chg="addSp delSp modSp mod modTransition modAnim">
         <pc:chgData name="Camilo Daleles Rennó" userId="eac9aab033b2f962" providerId="LiveId" clId="{435231E9-EFF7-4B35-A063-2CE70FCF688A}" dt="2025-06-12T14:30:44.477" v="13"/>
@@ -271,14 +366,6 @@
           <pc:docMk/>
           <pc:sldMk cId="2239123633" sldId="377"/>
         </pc:sldMkLst>
-        <pc:picChg chg="add del mod">
-          <ac:chgData name="Camilo Daleles Rennó" userId="eac9aab033b2f962" providerId="LiveId" clId="{435231E9-EFF7-4B35-A063-2CE70FCF688A}" dt="2025-06-12T14:30:44.477" v="13"/>
-          <ac:picMkLst>
-            <pc:docMk/>
-            <pc:sldMk cId="2239123633" sldId="377"/>
-            <ac:picMk id="8" creationId="{C116E63C-A925-7AE5-14FF-BE1E92DB89DD}"/>
-          </ac:picMkLst>
-        </pc:picChg>
       </pc:sldChg>
       <pc:sldChg chg="addSp delSp modSp mod modTransition modAnim">
         <pc:chgData name="Camilo Daleles Rennó" userId="eac9aab033b2f962" providerId="LiveId" clId="{435231E9-EFF7-4B35-A063-2CE70FCF688A}" dt="2025-06-12T14:30:44.477" v="13"/>
@@ -286,14 +373,6 @@
           <pc:docMk/>
           <pc:sldMk cId="983261099" sldId="388"/>
         </pc:sldMkLst>
-        <pc:picChg chg="add del mod">
-          <ac:chgData name="Camilo Daleles Rennó" userId="eac9aab033b2f962" providerId="LiveId" clId="{435231E9-EFF7-4B35-A063-2CE70FCF688A}" dt="2025-06-12T14:30:44.477" v="13"/>
-          <ac:picMkLst>
-            <pc:docMk/>
-            <pc:sldMk cId="983261099" sldId="388"/>
-            <ac:picMk id="7" creationId="{16CFF5A2-BEC4-70E1-ECCC-A33817FE0F69}"/>
-          </ac:picMkLst>
-        </pc:picChg>
       </pc:sldChg>
       <pc:sldChg chg="addSp delSp modSp mod modTransition modAnim">
         <pc:chgData name="Camilo Daleles Rennó" userId="eac9aab033b2f962" providerId="LiveId" clId="{435231E9-EFF7-4B35-A063-2CE70FCF688A}" dt="2025-06-12T14:30:44.477" v="13"/>
@@ -301,14 +380,6 @@
           <pc:docMk/>
           <pc:sldMk cId="1877254047" sldId="393"/>
         </pc:sldMkLst>
-        <pc:picChg chg="add del mod">
-          <ac:chgData name="Camilo Daleles Rennó" userId="eac9aab033b2f962" providerId="LiveId" clId="{435231E9-EFF7-4B35-A063-2CE70FCF688A}" dt="2025-06-12T14:30:44.477" v="13"/>
-          <ac:picMkLst>
-            <pc:docMk/>
-            <pc:sldMk cId="1877254047" sldId="393"/>
-            <ac:picMk id="7" creationId="{5027E456-2CF7-1AB7-D60D-16D56DB9E74B}"/>
-          </ac:picMkLst>
-        </pc:picChg>
       </pc:sldChg>
       <pc:sldChg chg="addSp delSp modSp mod modTransition modAnim">
         <pc:chgData name="Camilo Daleles Rennó" userId="eac9aab033b2f962" providerId="LiveId" clId="{435231E9-EFF7-4B35-A063-2CE70FCF688A}" dt="2025-06-12T14:30:44.477" v="13"/>
@@ -316,14 +387,6 @@
           <pc:docMk/>
           <pc:sldMk cId="2956632756" sldId="394"/>
         </pc:sldMkLst>
-        <pc:picChg chg="add del mod">
-          <ac:chgData name="Camilo Daleles Rennó" userId="eac9aab033b2f962" providerId="LiveId" clId="{435231E9-EFF7-4B35-A063-2CE70FCF688A}" dt="2025-06-12T14:30:44.477" v="13"/>
-          <ac:picMkLst>
-            <pc:docMk/>
-            <pc:sldMk cId="2956632756" sldId="394"/>
-            <ac:picMk id="9" creationId="{E3A7E23F-2F3C-AAF2-CA7E-D1FD75B53958}"/>
-          </ac:picMkLst>
-        </pc:picChg>
       </pc:sldChg>
       <pc:sldChg chg="addSp delSp modSp mod modTransition modAnim">
         <pc:chgData name="Camilo Daleles Rennó" userId="eac9aab033b2f962" providerId="LiveId" clId="{435231E9-EFF7-4B35-A063-2CE70FCF688A}" dt="2025-06-12T14:30:44.477" v="13"/>
@@ -331,14 +394,6 @@
           <pc:docMk/>
           <pc:sldMk cId="3928394977" sldId="395"/>
         </pc:sldMkLst>
-        <pc:picChg chg="add del mod">
-          <ac:chgData name="Camilo Daleles Rennó" userId="eac9aab033b2f962" providerId="LiveId" clId="{435231E9-EFF7-4B35-A063-2CE70FCF688A}" dt="2025-06-12T14:30:44.477" v="13"/>
-          <ac:picMkLst>
-            <pc:docMk/>
-            <pc:sldMk cId="3928394977" sldId="395"/>
-            <ac:picMk id="18" creationId="{B4D12F94-1633-C5AD-54A8-5B22A2EF6E43}"/>
-          </ac:picMkLst>
-        </pc:picChg>
       </pc:sldChg>
     </pc:docChg>
   </pc:docChgLst>
@@ -393,22 +448,6 @@
           <pc:docMk/>
           <pc:sldMk cId="2956632756" sldId="394"/>
         </pc:sldMkLst>
-        <pc:spChg chg="mod">
-          <ac:chgData name="Camilo Daleles Rennó" userId="eac9aab033b2f962" providerId="LiveId" clId="{ADCD9CA3-E248-4E12-A9F9-5574C4A5A6AF}" dt="2025-05-08T13:09:36.502" v="16"/>
-          <ac:spMkLst>
-            <pc:docMk/>
-            <pc:sldMk cId="2956632756" sldId="394"/>
-            <ac:spMk id="2" creationId="{00000000-0000-0000-0000-000000000000}"/>
-          </ac:spMkLst>
-        </pc:spChg>
-        <pc:picChg chg="mod modCrop">
-          <ac:chgData name="Camilo Daleles Rennó" userId="eac9aab033b2f962" providerId="LiveId" clId="{ADCD9CA3-E248-4E12-A9F9-5574C4A5A6AF}" dt="2025-05-08T13:09:53.444" v="17" actId="732"/>
-          <ac:picMkLst>
-            <pc:docMk/>
-            <pc:sldMk cId="2956632756" sldId="394"/>
-            <ac:picMk id="4" creationId="{00000000-0000-0000-0000-000000000000}"/>
-          </ac:picMkLst>
-        </pc:picChg>
       </pc:sldChg>
     </pc:docChg>
   </pc:docChgLst>
@@ -513,7 +552,7 @@
               <a:pPr>
                 <a:defRPr/>
               </a:pPr>
-              <a:t>12/06/2025</a:t>
+              <a:t>15/06/2025</a:t>
             </a:fld>
             <a:endParaRPr lang="pt-BR" dirty="0"/>
           </a:p>
@@ -7355,13 +7394,13 @@
   <p:clrMapOvr>
     <a:masterClrMapping/>
   </p:clrMapOvr>
-  <mc:AlternateContent xmlns:mc="http://schemas.openxmlformats.org/markup-compatibility/2006">
-    <mc:Choice xmlns:p14="http://schemas.microsoft.com/office/powerpoint/2010/main" Requires="p14">
+  <mc:AlternateContent xmlns:mc="http://schemas.openxmlformats.org/markup-compatibility/2006" xmlns:p14="http://schemas.microsoft.com/office/powerpoint/2010/main">
+    <mc:Choice Requires="p14">
       <p:transition spd="slow" p14:dur="2000">
         <p:cut/>
       </p:transition>
     </mc:Choice>
-    <mc:Fallback>
+    <mc:Fallback xmlns="">
       <p:transition spd="slow">
         <p:cut/>
       </p:transition>
@@ -8057,13 +8096,13 @@
   <p:clrMapOvr>
     <a:masterClrMapping/>
   </p:clrMapOvr>
-  <mc:AlternateContent xmlns:mc="http://schemas.openxmlformats.org/markup-compatibility/2006">
-    <mc:Choice xmlns:p14="http://schemas.microsoft.com/office/powerpoint/2010/main" Requires="p14">
+  <mc:AlternateContent xmlns:mc="http://schemas.openxmlformats.org/markup-compatibility/2006" xmlns:p14="http://schemas.microsoft.com/office/powerpoint/2010/main">
+    <mc:Choice Requires="p14">
       <p:transition spd="slow" p14:dur="2000">
         <p:cut/>
       </p:transition>
     </mc:Choice>
-    <mc:Fallback>
+    <mc:Fallback xmlns="">
       <p:transition spd="slow">
         <p:cut/>
       </p:transition>
@@ -8424,13 +8463,13 @@
   <p:clrMapOvr>
     <a:masterClrMapping/>
   </p:clrMapOvr>
-  <mc:AlternateContent xmlns:mc="http://schemas.openxmlformats.org/markup-compatibility/2006">
-    <mc:Choice xmlns:p14="http://schemas.microsoft.com/office/powerpoint/2010/main" Requires="p14">
+  <mc:AlternateContent xmlns:mc="http://schemas.openxmlformats.org/markup-compatibility/2006" xmlns:p14="http://schemas.microsoft.com/office/powerpoint/2010/main">
+    <mc:Choice Requires="p14">
       <p:transition spd="slow" p14:dur="2000">
         <p:cut/>
       </p:transition>
     </mc:Choice>
-    <mc:Fallback>
+    <mc:Fallback xmlns="">
       <p:transition spd="slow">
         <p:cut/>
       </p:transition>
@@ -8644,35 +8683,6 @@
           <a:chExt cx="0" cy="0"/>
         </a:xfrm>
       </p:grpSpPr>
-      <p:pic>
-        <p:nvPicPr>
-          <p:cNvPr id="4" name="Imagem 3"/>
-          <p:cNvPicPr>
-            <a:picLocks noChangeAspect="1"/>
-          </p:cNvPicPr>
-          <p:nvPr/>
-        </p:nvPicPr>
-        <p:blipFill rotWithShape="1">
-          <a:blip r:embed="rId2" cstate="print">
-            <a:extLst>
-              <a:ext uri="{28A0092B-C50C-407E-A947-70E740481C1C}">
-                <a14:useLocalDpi xmlns:a14="http://schemas.microsoft.com/office/drawing/2010/main" val="0"/>
-              </a:ext>
-            </a:extLst>
-          </a:blip>
-          <a:srcRect/>
-          <a:stretch/>
-        </p:blipFill>
-        <p:spPr>
-          <a:xfrm>
-            <a:off x="557213" y="1038225"/>
-            <a:ext cx="8010525" cy="4551015"/>
-          </a:xfrm>
-          <a:prstGeom prst="rect">
-            <a:avLst/>
-          </a:prstGeom>
-        </p:spPr>
-      </p:pic>
       <p:sp>
         <p:nvSpPr>
           <p:cNvPr id="7" name="Espaço Reservado para Número de Slide 1"/>
@@ -8703,41 +8713,36 @@
           </a:p>
         </p:txBody>
       </p:sp>
-      <p:sp>
-        <p:nvSpPr>
-          <p:cNvPr id="2" name="Retângulo 1"/>
-          <p:cNvSpPr/>
+      <p:pic>
+        <p:nvPicPr>
+          <p:cNvPr id="9" name="Imagem 8">
+            <a:extLst>
+              <a:ext uri="{FF2B5EF4-FFF2-40B4-BE49-F238E27FC236}">
+                <a16:creationId xmlns:a16="http://schemas.microsoft.com/office/drawing/2014/main" id="{4F03EC55-8767-F28F-A029-D73269292570}"/>
+              </a:ext>
+            </a:extLst>
+          </p:cNvPr>
+          <p:cNvPicPr>
+            <a:picLocks noChangeAspect="1"/>
+          </p:cNvPicPr>
           <p:nvPr/>
-        </p:nvSpPr>
+        </p:nvPicPr>
+        <p:blipFill>
+          <a:blip r:embed="rId2"/>
+          <a:stretch>
+            <a:fillRect/>
+          </a:stretch>
+        </p:blipFill>
         <p:spPr>
           <a:xfrm>
-            <a:off x="557213" y="699671"/>
-            <a:ext cx="4411785" cy="338554"/>
+            <a:off x="481012" y="1196752"/>
+            <a:ext cx="8181975" cy="3876675"/>
           </a:xfrm>
           <a:prstGeom prst="rect">
             <a:avLst/>
           </a:prstGeom>
         </p:spPr>
-        <p:txBody>
-          <a:bodyPr wrap="none">
-            <a:spAutoFit/>
-          </a:bodyPr>
-          <a:lstStyle/>
-          <a:p>
-            <a:r>
-              <a:rPr lang="pt-BR" kern="0" dirty="0">
-                <a:latin typeface="Arial" panose="020B0604020202020204" pitchFamily="34" charset="0"/>
-                <a:cs typeface="Arial" panose="020B0604020202020204" pitchFamily="34" charset="0"/>
-              </a:rPr>
-              <a:t>http://urlib.net/8JMKD2USNRW34T/4D6DMD2</a:t>
-            </a:r>
-            <a:endParaRPr lang="pt-BR" dirty="0">
-              <a:latin typeface="Arial" panose="020B0604020202020204" pitchFamily="34" charset="0"/>
-              <a:cs typeface="Arial" panose="020B0604020202020204" pitchFamily="34" charset="0"/>
-            </a:endParaRPr>
-          </a:p>
-        </p:txBody>
-      </p:sp>
+      </p:pic>
     </p:spTree>
     <p:extLst>
       <p:ext uri="{BB962C8B-B14F-4D97-AF65-F5344CB8AC3E}">
@@ -8770,14 +8775,20 @@
       </p:grpSpPr>
       <p:pic>
         <p:nvPicPr>
-          <p:cNvPr id="2" name="Imagem 1"/>
+          <p:cNvPr id="12" name="Imagem 11">
+            <a:extLst>
+              <a:ext uri="{FF2B5EF4-FFF2-40B4-BE49-F238E27FC236}">
+                <a16:creationId xmlns:a16="http://schemas.microsoft.com/office/drawing/2014/main" id="{029AA786-4420-9D8E-AEDB-4F8F7B19233C}"/>
+              </a:ext>
+            </a:extLst>
+          </p:cNvPr>
           <p:cNvPicPr>
             <a:picLocks noChangeAspect="1"/>
           </p:cNvPicPr>
           <p:nvPr/>
         </p:nvPicPr>
         <p:blipFill>
-          <a:blip r:embed="rId3" cstate="print"/>
+          <a:blip r:embed="rId3"/>
           <a:stretch>
             <a:fillRect/>
           </a:stretch>
@@ -8785,7 +8796,7 @@
         <p:spPr>
           <a:xfrm>
             <a:off x="557213" y="350093"/>
-            <a:ext cx="8039100" cy="6229350"/>
+            <a:ext cx="8181975" cy="6238875"/>
           </a:xfrm>
           <a:prstGeom prst="rect">
             <a:avLst/>
@@ -8830,7 +8841,7 @@
         </p:nvSpPr>
         <p:spPr>
           <a:xfrm>
-            <a:off x="2526748" y="1749755"/>
+            <a:off x="2526748" y="1774807"/>
             <a:ext cx="1728192" cy="570097"/>
           </a:xfrm>
           <a:prstGeom prst="ellipse">
@@ -8878,7 +8889,7 @@
         </p:nvSpPr>
         <p:spPr>
           <a:xfrm>
-            <a:off x="4499992" y="2476527"/>
+            <a:off x="4499992" y="2501579"/>
             <a:ext cx="936104" cy="448417"/>
           </a:xfrm>
           <a:prstGeom prst="ellipse">
@@ -8926,7 +8937,7 @@
         </p:nvSpPr>
         <p:spPr>
           <a:xfrm>
-            <a:off x="2555776" y="3645112"/>
+            <a:off x="2555776" y="3670164"/>
             <a:ext cx="2412268" cy="792000"/>
           </a:xfrm>
           <a:prstGeom prst="ellipse">
@@ -8974,8 +8985,62 @@
         </p:nvSpPr>
         <p:spPr>
           <a:xfrm>
-            <a:off x="2843808" y="3133482"/>
+            <a:off x="2843808" y="3158534"/>
             <a:ext cx="2592288" cy="468000"/>
+          </a:xfrm>
+          <a:prstGeom prst="ellipse">
+            <a:avLst/>
+          </a:prstGeom>
+          <a:noFill/>
+          <a:ln w="38100">
+            <a:solidFill>
+              <a:srgbClr val="FF0000"/>
+            </a:solidFill>
+          </a:ln>
+        </p:spPr>
+        <p:style>
+          <a:lnRef idx="2">
+            <a:schemeClr val="accent1">
+              <a:shade val="50000"/>
+            </a:schemeClr>
+          </a:lnRef>
+          <a:fillRef idx="1">
+            <a:schemeClr val="accent1"/>
+          </a:fillRef>
+          <a:effectRef idx="0">
+            <a:schemeClr val="accent1"/>
+          </a:effectRef>
+          <a:fontRef idx="minor">
+            <a:schemeClr val="lt1"/>
+          </a:fontRef>
+        </p:style>
+        <p:txBody>
+          <a:bodyPr rtlCol="0" anchor="ctr"/>
+          <a:lstStyle/>
+          <a:p>
+            <a:pPr algn="ctr"/>
+            <a:endParaRPr lang="pt-BR" dirty="0">
+              <a:latin typeface="Tahoma" panose="020B0604030504040204" pitchFamily="34" charset="0"/>
+            </a:endParaRPr>
+          </a:p>
+        </p:txBody>
+      </p:sp>
+      <p:sp>
+        <p:nvSpPr>
+          <p:cNvPr id="7" name="Elipse 6">
+            <a:extLst>
+              <a:ext uri="{FF2B5EF4-FFF2-40B4-BE49-F238E27FC236}">
+                <a16:creationId xmlns:a16="http://schemas.microsoft.com/office/drawing/2014/main" id="{4C6BF194-C996-C851-56D8-C4F059D6A25B}"/>
+              </a:ext>
+            </a:extLst>
+          </p:cNvPr>
+          <p:cNvSpPr/>
+          <p:nvPr/>
+        </p:nvSpPr>
+        <p:spPr>
+          <a:xfrm>
+            <a:off x="599034" y="2248672"/>
+            <a:ext cx="936104" cy="570097"/>
           </a:xfrm>
           <a:prstGeom prst="ellipse">
             <a:avLst/>
@@ -9255,6 +9320,83 @@
                                       </p:to>
                                     </p:set>
                                   </p:childTnLst>
+                                  <p:subTnLst>
+                                    <p:set>
+                                      <p:cBhvr override="childStyle">
+                                        <p:cTn dur="1" fill="hold" display="0" masterRel="nextClick" afterEffect="1"/>
+                                        <p:tgtEl>
+                                          <p:spTgt spid="10"/>
+                                        </p:tgtEl>
+                                        <p:attrNameLst>
+                                          <p:attrName>style.visibility</p:attrName>
+                                        </p:attrNameLst>
+                                      </p:cBhvr>
+                                      <p:to>
+                                        <p:strVal val="hidden"/>
+                                      </p:to>
+                                    </p:set>
+                                  </p:subTnLst>
+                                </p:cTn>
+                              </p:par>
+                            </p:childTnLst>
+                          </p:cTn>
+                        </p:par>
+                      </p:childTnLst>
+                    </p:cTn>
+                  </p:par>
+                  <p:par>
+                    <p:cTn id="19" fill="hold">
+                      <p:stCondLst>
+                        <p:cond delay="indefinite"/>
+                      </p:stCondLst>
+                      <p:childTnLst>
+                        <p:par>
+                          <p:cTn id="20" fill="hold">
+                            <p:stCondLst>
+                              <p:cond delay="0"/>
+                            </p:stCondLst>
+                            <p:childTnLst>
+                              <p:par>
+                                <p:cTn id="21" presetID="1" presetClass="entr" presetSubtype="0" fill="hold" grpId="0" nodeType="clickEffect">
+                                  <p:stCondLst>
+                                    <p:cond delay="0"/>
+                                  </p:stCondLst>
+                                  <p:childTnLst>
+                                    <p:set>
+                                      <p:cBhvr>
+                                        <p:cTn id="22" dur="1" fill="hold">
+                                          <p:stCondLst>
+                                            <p:cond delay="0"/>
+                                          </p:stCondLst>
+                                        </p:cTn>
+                                        <p:tgtEl>
+                                          <p:spTgt spid="7"/>
+                                        </p:tgtEl>
+                                        <p:attrNameLst>
+                                          <p:attrName>style.visibility</p:attrName>
+                                        </p:attrNameLst>
+                                      </p:cBhvr>
+                                      <p:to>
+                                        <p:strVal val="visible"/>
+                                      </p:to>
+                                    </p:set>
+                                  </p:childTnLst>
+                                  <p:subTnLst>
+                                    <p:set>
+                                      <p:cBhvr override="childStyle">
+                                        <p:cTn dur="1" fill="hold" display="0" masterRel="nextClick" afterEffect="1"/>
+                                        <p:tgtEl>
+                                          <p:spTgt spid="7"/>
+                                        </p:tgtEl>
+                                        <p:attrNameLst>
+                                          <p:attrName>style.visibility</p:attrName>
+                                        </p:attrNameLst>
+                                      </p:cBhvr>
+                                      <p:to>
+                                        <p:strVal val="hidden"/>
+                                      </p:to>
+                                    </p:set>
+                                  </p:subTnLst>
                                 </p:cTn>
                               </p:par>
                             </p:childTnLst>
@@ -9289,6 +9431,7 @@
       <p:bldP spid="9" grpId="0" animBg="1"/>
       <p:bldP spid="10" grpId="0" animBg="1"/>
       <p:bldP spid="11" grpId="0" animBg="1"/>
+      <p:bldP spid="7" grpId="0" animBg="1"/>
     </p:bldLst>
   </p:timing>
 </p:sld>

--- a/ppt/00Apres.pptx
+++ b/ppt/00Apres.pptx
@@ -167,7 +167,7 @@
 <file path=ppt/revisionInfo.xml><?xml version="1.0" encoding="utf-8"?>
 <p1510:revInfo xmlns:a="http://schemas.openxmlformats.org/drawingml/2006/main" xmlns:r="http://schemas.openxmlformats.org/officeDocument/2006/relationships" xmlns:p1510="http://schemas.microsoft.com/office/powerpoint/2015/10/main">
   <p1510:revLst>
-    <p1510:client id="{F2158640-15C1-4F25-A17A-24B8B41F7D90}" v="4" dt="2025-06-16T02:12:23.013"/>
+    <p1510:client id="{3426566D-49FA-4B81-9F00-F82D742F381B}" v="1" dt="2026-05-18T17:11:50.350"/>
   </p1510:revLst>
 </p1510:revInfo>
 </file>
@@ -175,279 +175,34 @@
 <file path=ppt/changesInfos/changesInfo1.xml><?xml version="1.0" encoding="utf-8"?>
 <pc:chgInfo xmlns:a="http://schemas.openxmlformats.org/drawingml/2006/main" xmlns:r="http://schemas.openxmlformats.org/officeDocument/2006/relationships" xmlns:ac="http://schemas.microsoft.com/office/drawing/2013/main/command" xmlns:pc="http://schemas.microsoft.com/office/powerpoint/2013/main/command">
   <pc:docChgLst>
-    <pc:chgData name="Camilo Daleles Rennó" userId="eac9aab033b2f962" providerId="LiveId" clId="{F2158640-15C1-4F25-A17A-24B8B41F7D90}"/>
-    <pc:docChg chg="undo redo custSel modSld">
-      <pc:chgData name="Camilo Daleles Rennó" userId="eac9aab033b2f962" providerId="LiveId" clId="{F2158640-15C1-4F25-A17A-24B8B41F7D90}" dt="2025-06-16T02:12:23.013" v="127"/>
-      <pc:docMkLst>
-        <pc:docMk/>
-      </pc:docMkLst>
-      <pc:sldChg chg="addSp delSp modSp mod addAnim delAnim modAnim">
-        <pc:chgData name="Camilo Daleles Rennó" userId="eac9aab033b2f962" providerId="LiveId" clId="{F2158640-15C1-4F25-A17A-24B8B41F7D90}" dt="2025-06-16T02:10:57.899" v="126" actId="1035"/>
-        <pc:sldMkLst>
-          <pc:docMk/>
-          <pc:sldMk cId="2956632756" sldId="394"/>
-        </pc:sldMkLst>
-        <pc:spChg chg="del">
-          <ac:chgData name="Camilo Daleles Rennó" userId="eac9aab033b2f962" providerId="LiveId" clId="{F2158640-15C1-4F25-A17A-24B8B41F7D90}" dt="2025-06-16T01:48:38.728" v="0" actId="478"/>
-          <ac:spMkLst>
-            <pc:docMk/>
-            <pc:sldMk cId="2956632756" sldId="394"/>
-            <ac:spMk id="2" creationId="{00000000-0000-0000-0000-000000000000}"/>
-          </ac:spMkLst>
-        </pc:spChg>
-        <pc:spChg chg="add del mod">
-          <ac:chgData name="Camilo Daleles Rennó" userId="eac9aab033b2f962" providerId="LiveId" clId="{F2158640-15C1-4F25-A17A-24B8B41F7D90}" dt="2025-06-16T01:58:30.929" v="83" actId="21"/>
-          <ac:spMkLst>
-            <pc:docMk/>
-            <pc:sldMk cId="2956632756" sldId="394"/>
-            <ac:spMk id="6" creationId="{4C6BF194-C996-C851-56D8-C4F059D6A25B}"/>
-          </ac:spMkLst>
-        </pc:spChg>
-        <pc:picChg chg="del mod">
-          <ac:chgData name="Camilo Daleles Rennó" userId="eac9aab033b2f962" providerId="LiveId" clId="{F2158640-15C1-4F25-A17A-24B8B41F7D90}" dt="2025-06-16T01:55:38.530" v="5" actId="478"/>
-          <ac:picMkLst>
-            <pc:docMk/>
-            <pc:sldMk cId="2956632756" sldId="394"/>
-            <ac:picMk id="4" creationId="{00000000-0000-0000-0000-000000000000}"/>
-          </ac:picMkLst>
-        </pc:picChg>
-        <pc:picChg chg="add del mod">
-          <ac:chgData name="Camilo Daleles Rennó" userId="eac9aab033b2f962" providerId="LiveId" clId="{F2158640-15C1-4F25-A17A-24B8B41F7D90}" dt="2025-06-16T02:10:51.313" v="125" actId="478"/>
-          <ac:picMkLst>
-            <pc:docMk/>
-            <pc:sldMk cId="2956632756" sldId="394"/>
-            <ac:picMk id="5" creationId="{3E10ECAB-B872-10E2-3670-133847EB6AC6}"/>
-          </ac:picMkLst>
-        </pc:picChg>
-        <pc:picChg chg="add mod">
-          <ac:chgData name="Camilo Daleles Rennó" userId="eac9aab033b2f962" providerId="LiveId" clId="{F2158640-15C1-4F25-A17A-24B8B41F7D90}" dt="2025-06-16T02:10:57.899" v="126" actId="1035"/>
-          <ac:picMkLst>
-            <pc:docMk/>
-            <pc:sldMk cId="2956632756" sldId="394"/>
-            <ac:picMk id="9" creationId="{4F03EC55-8767-F28F-A029-D73269292570}"/>
-          </ac:picMkLst>
-        </pc:picChg>
-      </pc:sldChg>
-      <pc:sldChg chg="addSp delSp modSp mod modAnim">
-        <pc:chgData name="Camilo Daleles Rennó" userId="eac9aab033b2f962" providerId="LiveId" clId="{F2158640-15C1-4F25-A17A-24B8B41F7D90}" dt="2025-06-16T02:12:23.013" v="127"/>
-        <pc:sldMkLst>
-          <pc:docMk/>
-          <pc:sldMk cId="3928394977" sldId="395"/>
-        </pc:sldMkLst>
-        <pc:spChg chg="mod">
-          <ac:chgData name="Camilo Daleles Rennó" userId="eac9aab033b2f962" providerId="LiveId" clId="{F2158640-15C1-4F25-A17A-24B8B41F7D90}" dt="2025-06-16T02:10:12.344" v="113" actId="1035"/>
-          <ac:spMkLst>
-            <pc:docMk/>
-            <pc:sldMk cId="3928394977" sldId="395"/>
-            <ac:spMk id="4" creationId="{00000000-0000-0000-0000-000000000000}"/>
-          </ac:spMkLst>
-        </pc:spChg>
-        <pc:spChg chg="add mod">
-          <ac:chgData name="Camilo Daleles Rennó" userId="eac9aab033b2f962" providerId="LiveId" clId="{F2158640-15C1-4F25-A17A-24B8B41F7D90}" dt="2025-06-16T02:10:12.344" v="113" actId="1035"/>
-          <ac:spMkLst>
-            <pc:docMk/>
-            <pc:sldMk cId="3928394977" sldId="395"/>
-            <ac:spMk id="7" creationId="{4C6BF194-C996-C851-56D8-C4F059D6A25B}"/>
-          </ac:spMkLst>
-        </pc:spChg>
-        <pc:spChg chg="mod">
-          <ac:chgData name="Camilo Daleles Rennó" userId="eac9aab033b2f962" providerId="LiveId" clId="{F2158640-15C1-4F25-A17A-24B8B41F7D90}" dt="2025-06-16T02:10:12.344" v="113" actId="1035"/>
-          <ac:spMkLst>
-            <pc:docMk/>
-            <pc:sldMk cId="3928394977" sldId="395"/>
-            <ac:spMk id="9" creationId="{00000000-0000-0000-0000-000000000000}"/>
-          </ac:spMkLst>
-        </pc:spChg>
-        <pc:spChg chg="mod">
-          <ac:chgData name="Camilo Daleles Rennó" userId="eac9aab033b2f962" providerId="LiveId" clId="{F2158640-15C1-4F25-A17A-24B8B41F7D90}" dt="2025-06-16T02:10:12.344" v="113" actId="1035"/>
-          <ac:spMkLst>
-            <pc:docMk/>
-            <pc:sldMk cId="3928394977" sldId="395"/>
-            <ac:spMk id="10" creationId="{00000000-0000-0000-0000-000000000000}"/>
-          </ac:spMkLst>
-        </pc:spChg>
-        <pc:spChg chg="mod">
-          <ac:chgData name="Camilo Daleles Rennó" userId="eac9aab033b2f962" providerId="LiveId" clId="{F2158640-15C1-4F25-A17A-24B8B41F7D90}" dt="2025-06-16T02:10:12.344" v="113" actId="1035"/>
-          <ac:spMkLst>
-            <pc:docMk/>
-            <pc:sldMk cId="3928394977" sldId="395"/>
-            <ac:spMk id="11" creationId="{00000000-0000-0000-0000-000000000000}"/>
-          </ac:spMkLst>
-        </pc:spChg>
-        <pc:picChg chg="add del mod">
-          <ac:chgData name="Camilo Daleles Rennó" userId="eac9aab033b2f962" providerId="LiveId" clId="{F2158640-15C1-4F25-A17A-24B8B41F7D90}" dt="2025-06-16T01:57:27.373" v="18" actId="478"/>
-          <ac:picMkLst>
-            <pc:docMk/>
-            <pc:sldMk cId="3928394977" sldId="395"/>
-            <ac:picMk id="2" creationId="{00000000-0000-0000-0000-000000000000}"/>
-          </ac:picMkLst>
-        </pc:picChg>
-        <pc:picChg chg="add del mod ord modCrop">
-          <ac:chgData name="Camilo Daleles Rennó" userId="eac9aab033b2f962" providerId="LiveId" clId="{F2158640-15C1-4F25-A17A-24B8B41F7D90}" dt="2025-06-16T02:09:58.575" v="105" actId="478"/>
-          <ac:picMkLst>
-            <pc:docMk/>
-            <pc:sldMk cId="3928394977" sldId="395"/>
-            <ac:picMk id="6" creationId="{B43F150C-2FBE-23EF-DC1B-ED2B9F9FA4C0}"/>
-          </ac:picMkLst>
-        </pc:picChg>
-        <pc:picChg chg="add mod ord">
-          <ac:chgData name="Camilo Daleles Rennó" userId="eac9aab033b2f962" providerId="LiveId" clId="{F2158640-15C1-4F25-A17A-24B8B41F7D90}" dt="2025-06-16T02:09:56.165" v="104" actId="167"/>
-          <ac:picMkLst>
-            <pc:docMk/>
-            <pc:sldMk cId="3928394977" sldId="395"/>
-            <ac:picMk id="12" creationId="{029AA786-4420-9D8E-AEDB-4F8F7B19233C}"/>
-          </ac:picMkLst>
-        </pc:picChg>
-      </pc:sldChg>
-    </pc:docChg>
-  </pc:docChgLst>
-  <pc:docChgLst>
-    <pc:chgData name="Camilo Rennó" userId="eac9aab033b2f962" providerId="LiveId" clId="{5395F24D-1F66-4E6A-99E7-5137BBD24C62}"/>
-    <pc:docChg chg="modSld">
-      <pc:chgData name="Camilo Rennó" userId="eac9aab033b2f962" providerId="LiveId" clId="{5395F24D-1F66-4E6A-99E7-5137BBD24C62}" dt="2024-06-10T16:12:16.548" v="4"/>
-      <pc:docMkLst>
-        <pc:docMk/>
-      </pc:docMkLst>
-      <pc:sldChg chg="modAnim">
-        <pc:chgData name="Camilo Rennó" userId="eac9aab033b2f962" providerId="LiveId" clId="{5395F24D-1F66-4E6A-99E7-5137BBD24C62}" dt="2024-06-10T16:12:16.548" v="4"/>
-        <pc:sldMkLst>
-          <pc:docMk/>
-          <pc:sldMk cId="3928394977" sldId="395"/>
-        </pc:sldMkLst>
-      </pc:sldChg>
-    </pc:docChg>
-  </pc:docChgLst>
-  <pc:docChgLst>
-    <pc:chgData name="Camilo Daleles Rennó" userId="eac9aab033b2f962" providerId="LiveId" clId="{435231E9-EFF7-4B35-A063-2CE70FCF688A}"/>
-    <pc:docChg chg="modSld">
-      <pc:chgData name="Camilo Daleles Rennó" userId="eac9aab033b2f962" providerId="LiveId" clId="{435231E9-EFF7-4B35-A063-2CE70FCF688A}" dt="2025-06-12T14:30:44.477" v="13"/>
-      <pc:docMkLst>
-        <pc:docMk/>
-      </pc:docMkLst>
-      <pc:sldChg chg="addSp delSp modSp mod modTransition modAnim">
-        <pc:chgData name="Camilo Daleles Rennó" userId="eac9aab033b2f962" providerId="LiveId" clId="{435231E9-EFF7-4B35-A063-2CE70FCF688A}" dt="2025-06-12T14:30:44.477" v="13"/>
-        <pc:sldMkLst>
-          <pc:docMk/>
-          <pc:sldMk cId="0" sldId="345"/>
-        </pc:sldMkLst>
-        <pc:spChg chg="mod">
-          <ac:chgData name="Camilo Daleles Rennó" userId="eac9aab033b2f962" providerId="LiveId" clId="{435231E9-EFF7-4B35-A063-2CE70FCF688A}" dt="2025-06-09T13:00:50.505" v="12" actId="6549"/>
-          <ac:spMkLst>
-            <pc:docMk/>
-            <pc:sldMk cId="0" sldId="345"/>
-            <ac:spMk id="3074" creationId="{00000000-0000-0000-0000-000000000000}"/>
-          </ac:spMkLst>
-        </pc:spChg>
-      </pc:sldChg>
-      <pc:sldChg chg="addSp delSp modSp mod modTransition modAnim">
-        <pc:chgData name="Camilo Daleles Rennó" userId="eac9aab033b2f962" providerId="LiveId" clId="{435231E9-EFF7-4B35-A063-2CE70FCF688A}" dt="2025-06-12T14:30:44.477" v="13"/>
-        <pc:sldMkLst>
-          <pc:docMk/>
-          <pc:sldMk cId="0" sldId="366"/>
-        </pc:sldMkLst>
-      </pc:sldChg>
-      <pc:sldChg chg="addSp delSp modSp mod modTransition modAnim">
-        <pc:chgData name="Camilo Daleles Rennó" userId="eac9aab033b2f962" providerId="LiveId" clId="{435231E9-EFF7-4B35-A063-2CE70FCF688A}" dt="2025-06-12T14:30:44.477" v="13"/>
-        <pc:sldMkLst>
-          <pc:docMk/>
-          <pc:sldMk cId="33346296" sldId="374"/>
-        </pc:sldMkLst>
-      </pc:sldChg>
-      <pc:sldChg chg="addSp delSp modSp mod modTransition modAnim">
-        <pc:chgData name="Camilo Daleles Rennó" userId="eac9aab033b2f962" providerId="LiveId" clId="{435231E9-EFF7-4B35-A063-2CE70FCF688A}" dt="2025-06-12T14:30:44.477" v="13"/>
-        <pc:sldMkLst>
-          <pc:docMk/>
-          <pc:sldMk cId="1916879497" sldId="375"/>
-        </pc:sldMkLst>
-      </pc:sldChg>
-      <pc:sldChg chg="addSp delSp modSp mod modTransition modAnim">
-        <pc:chgData name="Camilo Daleles Rennó" userId="eac9aab033b2f962" providerId="LiveId" clId="{435231E9-EFF7-4B35-A063-2CE70FCF688A}" dt="2025-06-12T14:30:44.477" v="13"/>
-        <pc:sldMkLst>
-          <pc:docMk/>
-          <pc:sldMk cId="2239123633" sldId="377"/>
-        </pc:sldMkLst>
-      </pc:sldChg>
-      <pc:sldChg chg="addSp delSp modSp mod modTransition modAnim">
-        <pc:chgData name="Camilo Daleles Rennó" userId="eac9aab033b2f962" providerId="LiveId" clId="{435231E9-EFF7-4B35-A063-2CE70FCF688A}" dt="2025-06-12T14:30:44.477" v="13"/>
-        <pc:sldMkLst>
-          <pc:docMk/>
-          <pc:sldMk cId="983261099" sldId="388"/>
-        </pc:sldMkLst>
-      </pc:sldChg>
-      <pc:sldChg chg="addSp delSp modSp mod modTransition modAnim">
-        <pc:chgData name="Camilo Daleles Rennó" userId="eac9aab033b2f962" providerId="LiveId" clId="{435231E9-EFF7-4B35-A063-2CE70FCF688A}" dt="2025-06-12T14:30:44.477" v="13"/>
-        <pc:sldMkLst>
-          <pc:docMk/>
-          <pc:sldMk cId="1877254047" sldId="393"/>
-        </pc:sldMkLst>
-      </pc:sldChg>
-      <pc:sldChg chg="addSp delSp modSp mod modTransition modAnim">
-        <pc:chgData name="Camilo Daleles Rennó" userId="eac9aab033b2f962" providerId="LiveId" clId="{435231E9-EFF7-4B35-A063-2CE70FCF688A}" dt="2025-06-12T14:30:44.477" v="13"/>
-        <pc:sldMkLst>
-          <pc:docMk/>
-          <pc:sldMk cId="2956632756" sldId="394"/>
-        </pc:sldMkLst>
-      </pc:sldChg>
-      <pc:sldChg chg="addSp delSp modSp mod modTransition modAnim">
-        <pc:chgData name="Camilo Daleles Rennó" userId="eac9aab033b2f962" providerId="LiveId" clId="{435231E9-EFF7-4B35-A063-2CE70FCF688A}" dt="2025-06-12T14:30:44.477" v="13"/>
-        <pc:sldMkLst>
-          <pc:docMk/>
-          <pc:sldMk cId="3928394977" sldId="395"/>
-        </pc:sldMkLst>
-      </pc:sldChg>
-    </pc:docChg>
-  </pc:docChgLst>
-  <pc:docChgLst>
-    <pc:chgData name="Camilo Daleles Rennó" userId="eac9aab033b2f962" providerId="LiveId" clId="{ADCD9CA3-E248-4E12-A9F9-5574C4A5A6AF}"/>
+    <pc:chgData name="Camilo Daleles Rennó" userId="eac9aab033b2f962" providerId="LiveId" clId="{2F84B5F6-56BC-4922-A3EF-887C69771227}"/>
     <pc:docChg chg="custSel modSld">
-      <pc:chgData name="Camilo Daleles Rennó" userId="eac9aab033b2f962" providerId="LiveId" clId="{ADCD9CA3-E248-4E12-A9F9-5574C4A5A6AF}" dt="2025-05-08T13:26:00.041" v="19"/>
+      <pc:chgData name="Camilo Daleles Rennó" userId="eac9aab033b2f962" providerId="LiveId" clId="{2F84B5F6-56BC-4922-A3EF-887C69771227}" dt="2026-05-18T17:11:50.350" v="1"/>
       <pc:docMkLst>
         <pc:docMk/>
       </pc:docMkLst>
       <pc:sldChg chg="addSp delSp modSp mod">
-        <pc:chgData name="Camilo Daleles Rennó" userId="eac9aab033b2f962" providerId="LiveId" clId="{ADCD9CA3-E248-4E12-A9F9-5574C4A5A6AF}" dt="2025-05-08T13:26:00.041" v="19"/>
+        <pc:chgData name="Camilo Daleles Rennó" userId="eac9aab033b2f962" providerId="LiveId" clId="{2F84B5F6-56BC-4922-A3EF-887C69771227}" dt="2026-05-18T17:11:50.350" v="1"/>
         <pc:sldMkLst>
           <pc:docMk/>
           <pc:sldMk cId="0" sldId="345"/>
         </pc:sldMkLst>
         <pc:spChg chg="add mod">
-          <ac:chgData name="Camilo Daleles Rennó" userId="eac9aab033b2f962" providerId="LiveId" clId="{ADCD9CA3-E248-4E12-A9F9-5574C4A5A6AF}" dt="2025-05-08T13:26:00.041" v="19"/>
+          <ac:chgData name="Camilo Daleles Rennó" userId="eac9aab033b2f962" providerId="LiveId" clId="{2F84B5F6-56BC-4922-A3EF-887C69771227}" dt="2026-05-18T17:11:50.350" v="1"/>
+          <ac:spMkLst>
+            <pc:docMk/>
+            <pc:sldMk cId="0" sldId="345"/>
+            <ac:spMk id="2" creationId="{8D55D100-C5A2-C7CD-7248-EB7E281A3234}"/>
+          </ac:spMkLst>
+        </pc:spChg>
+        <pc:spChg chg="del">
+          <ac:chgData name="Camilo Daleles Rennó" userId="eac9aab033b2f962" providerId="LiveId" clId="{2F84B5F6-56BC-4922-A3EF-887C69771227}" dt="2026-05-18T17:11:48.464" v="0" actId="478"/>
           <ac:spMkLst>
             <pc:docMk/>
             <pc:sldMk cId="0" sldId="345"/>
             <ac:spMk id="3" creationId="{E6E7F81D-312B-50C8-5DBB-78A2CB6ECA06}"/>
           </ac:spMkLst>
         </pc:spChg>
-        <pc:spChg chg="mod">
-          <ac:chgData name="Camilo Daleles Rennó" userId="eac9aab033b2f962" providerId="LiveId" clId="{ADCD9CA3-E248-4E12-A9F9-5574C4A5A6AF}" dt="2025-05-07T16:15:26.324" v="1" actId="20577"/>
-          <ac:spMkLst>
-            <pc:docMk/>
-            <pc:sldMk cId="0" sldId="345"/>
-            <ac:spMk id="3074" creationId="{00000000-0000-0000-0000-000000000000}"/>
-          </ac:spMkLst>
-        </pc:spChg>
-      </pc:sldChg>
-      <pc:sldChg chg="modSp mod">
-        <pc:chgData name="Camilo Daleles Rennó" userId="eac9aab033b2f962" providerId="LiveId" clId="{ADCD9CA3-E248-4E12-A9F9-5574C4A5A6AF}" dt="2025-05-08T13:07:07.410" v="15" actId="20577"/>
-        <pc:sldMkLst>
-          <pc:docMk/>
-          <pc:sldMk cId="33346296" sldId="374"/>
-        </pc:sldMkLst>
-        <pc:spChg chg="mod">
-          <ac:chgData name="Camilo Daleles Rennó" userId="eac9aab033b2f962" providerId="LiveId" clId="{ADCD9CA3-E248-4E12-A9F9-5574C4A5A6AF}" dt="2025-05-08T13:07:07.410" v="15" actId="20577"/>
-          <ac:spMkLst>
-            <pc:docMk/>
-            <pc:sldMk cId="33346296" sldId="374"/>
-            <ac:spMk id="5" creationId="{00000000-0000-0000-0000-000000000000}"/>
-          </ac:spMkLst>
-        </pc:spChg>
-      </pc:sldChg>
-      <pc:sldChg chg="modSp mod">
-        <pc:chgData name="Camilo Daleles Rennó" userId="eac9aab033b2f962" providerId="LiveId" clId="{ADCD9CA3-E248-4E12-A9F9-5574C4A5A6AF}" dt="2025-05-08T13:09:53.444" v="17" actId="732"/>
-        <pc:sldMkLst>
-          <pc:docMk/>
-          <pc:sldMk cId="2956632756" sldId="394"/>
-        </pc:sldMkLst>
       </pc:sldChg>
     </pc:docChg>
   </pc:docChgLst>
@@ -552,7 +307,7 @@
               <a:pPr>
                 <a:defRPr/>
               </a:pPr>
-              <a:t>15/06/2025</a:t>
+              <a:t>18/05/2026</a:t>
             </a:fld>
             <a:endParaRPr lang="pt-BR" dirty="0"/>
           </a:p>
@@ -4358,10 +4113,10 @@
       </p:sp>
       <p:sp>
         <p:nvSpPr>
-          <p:cNvPr id="3" name="Rectangle 3">
+          <p:cNvPr id="2" name="Rectangle 3">
             <a:extLst>
               <a:ext uri="{FF2B5EF4-FFF2-40B4-BE49-F238E27FC236}">
-                <a16:creationId xmlns:a16="http://schemas.microsoft.com/office/drawing/2014/main" id="{E6E7F81D-312B-50C8-5DBB-78A2CB6ECA06}"/>
+                <a16:creationId xmlns:a16="http://schemas.microsoft.com/office/drawing/2014/main" id="{8D55D100-C5A2-C7CD-7248-EB7E281A3234}"/>
               </a:ext>
             </a:extLst>
           </p:cNvPr>
@@ -4372,8 +4127,8 @@
         </p:nvSpPr>
         <p:spPr bwMode="auto">
           <a:xfrm>
-            <a:off x="4427984" y="5903913"/>
-            <a:ext cx="4487416" cy="838200"/>
+            <a:off x="3851920" y="5903913"/>
+            <a:ext cx="5063480" cy="838200"/>
           </a:xfrm>
           <a:prstGeom prst="rect">
             <a:avLst/>
@@ -4466,65 +4221,14 @@
               <a:t>acesso do conteúdo do curso em </a:t>
             </a:r>
             <a:r>
-              <a:rPr lang="pt-BR" sz="1200" kern="0" dirty="0" err="1">
-                <a:solidFill>
-                  <a:schemeClr val="accent2"/>
-                </a:solidFill>
-                <a:latin typeface="Arial Unicode MS" pitchFamily="34" charset="-128"/>
-                <a:hlinkClick r:id="rId2">
-                  <a:extLst>
-                    <a:ext uri="{A12FA001-AC4F-418D-AE19-62706E023703}">
-                      <ahyp:hlinkClr xmlns:ahyp="http://schemas.microsoft.com/office/drawing/2018/hyperlinkcolor" val="tx"/>
-                    </a:ext>
-                  </a:extLst>
-                </a:hlinkClick>
-              </a:rPr>
-              <a:t>Bibdigital</a:t>
-            </a:r>
-            <a:r>
               <a:rPr lang="pt-BR" sz="1200" kern="0" dirty="0">
                 <a:solidFill>
                   <a:schemeClr val="accent2"/>
                 </a:solidFill>
                 <a:latin typeface="Arial Unicode MS" pitchFamily="34" charset="-128"/>
-                <a:hlinkClick r:id="rId2">
-                  <a:extLst>
-                    <a:ext uri="{A12FA001-AC4F-418D-AE19-62706E023703}">
-                      <ahyp:hlinkClr xmlns:ahyp="http://schemas.microsoft.com/office/drawing/2018/hyperlinkcolor" val="tx"/>
-                    </a:ext>
-                  </a:extLst>
-                </a:hlinkClick>
               </a:rPr>
-              <a:t> do INPE</a:t>
-            </a:r>
-            <a:r>
-              <a:rPr lang="pt-BR" sz="1200" kern="0" dirty="0">
-                <a:latin typeface="Arial Unicode MS" pitchFamily="34" charset="-128"/>
-              </a:rPr>
-              <a:t> ou </a:t>
-            </a:r>
-            <a:r>
-              <a:rPr lang="pt-BR" sz="1200" kern="0" dirty="0">
-                <a:solidFill>
-                  <a:schemeClr val="accent2"/>
-                </a:solidFill>
-                <a:latin typeface="Arial Unicode MS" pitchFamily="34" charset="-128"/>
-                <a:hlinkClick r:id="rId3">
-                  <a:extLst>
-                    <a:ext uri="{A12FA001-AC4F-418D-AE19-62706E023703}">
-                      <ahyp:hlinkClr xmlns:ahyp="http://schemas.microsoft.com/office/drawing/2018/hyperlinkcolor" val="tx"/>
-                    </a:ext>
-                  </a:extLst>
-                </a:hlinkClick>
-              </a:rPr>
-              <a:t>GitHub</a:t>
-            </a:r>
-            <a:endParaRPr lang="pt-BR" sz="1200" kern="0" dirty="0">
-              <a:solidFill>
-                <a:schemeClr val="accent2"/>
-              </a:solidFill>
-              <a:latin typeface="Arial Unicode MS" pitchFamily="34" charset="-128"/>
-            </a:endParaRPr>
+              <a:t>https://cdrenno.github.io/Estatistica/</a:t>
+            </a:r>
           </a:p>
         </p:txBody>
       </p:sp>

--- a/ppt/00Apres.pptx
+++ b/ppt/00Apres.pptx
@@ -5,7 +5,7 @@
     <p:sldMasterId id="2147483648" r:id="rId1"/>
   </p:sldMasterIdLst>
   <p:notesMasterIdLst>
-    <p:notesMasterId r:id="rId11"/>
+    <p:notesMasterId r:id="rId12"/>
   </p:notesMasterIdLst>
   <p:sldIdLst>
     <p:sldId id="345" r:id="rId2"/>
@@ -17,6 +17,7 @@
     <p:sldId id="377" r:id="rId8"/>
     <p:sldId id="394" r:id="rId9"/>
     <p:sldId id="395" r:id="rId10"/>
+    <p:sldId id="396" r:id="rId11"/>
   </p:sldIdLst>
   <p:sldSz cx="9144000" cy="6858000" type="screen4x3"/>
   <p:notesSz cx="6858000" cy="9144000"/>
@@ -167,7 +168,7 @@
 <file path=ppt/revisionInfo.xml><?xml version="1.0" encoding="utf-8"?>
 <p1510:revInfo xmlns:a="http://schemas.openxmlformats.org/drawingml/2006/main" xmlns:r="http://schemas.openxmlformats.org/officeDocument/2006/relationships" xmlns:p1510="http://schemas.microsoft.com/office/powerpoint/2015/10/main">
   <p1510:revLst>
-    <p1510:client id="{3426566D-49FA-4B81-9F00-F82D742F381B}" v="1" dt="2026-05-18T17:11:50.350"/>
+    <p1510:client id="{54BF3A95-57CA-4D98-9CFB-8B7B64EDDBBA}" v="2" dt="2026-06-13T20:43:58.813"/>
   </p1510:revLst>
 </p1510:revInfo>
 </file>
@@ -195,14 +196,264 @@
             <ac:spMk id="2" creationId="{8D55D100-C5A2-C7CD-7248-EB7E281A3234}"/>
           </ac:spMkLst>
         </pc:spChg>
-        <pc:spChg chg="del">
-          <ac:chgData name="Camilo Daleles Rennó" userId="eac9aab033b2f962" providerId="LiveId" clId="{2F84B5F6-56BC-4922-A3EF-887C69771227}" dt="2026-05-18T17:11:48.464" v="0" actId="478"/>
+      </pc:sldChg>
+    </pc:docChg>
+  </pc:docChgLst>
+  <pc:docChgLst>
+    <pc:chgData name="Camilo Daleles Rennó" userId="eac9aab033b2f962" providerId="LiveId" clId="{AF66D22B-69B9-4EF0-A235-CDDC9B91D6AB}"/>
+    <pc:docChg chg="custSel addSld delSld modSld sldOrd">
+      <pc:chgData name="Camilo Daleles Rennó" userId="eac9aab033b2f962" providerId="LiveId" clId="{AF66D22B-69B9-4EF0-A235-CDDC9B91D6AB}" dt="2026-06-13T20:47:30.672" v="88" actId="22"/>
+      <pc:docMkLst>
+        <pc:docMk/>
+      </pc:docMkLst>
+      <pc:sldChg chg="modSp mod">
+        <pc:chgData name="Camilo Daleles Rennó" userId="eac9aab033b2f962" providerId="LiveId" clId="{AF66D22B-69B9-4EF0-A235-CDDC9B91D6AB}" dt="2026-06-13T20:34:12.274" v="29" actId="20577"/>
+        <pc:sldMkLst>
+          <pc:docMk/>
+          <pc:sldMk cId="0" sldId="366"/>
+        </pc:sldMkLst>
+        <pc:spChg chg="mod">
+          <ac:chgData name="Camilo Daleles Rennó" userId="eac9aab033b2f962" providerId="LiveId" clId="{AF66D22B-69B9-4EF0-A235-CDDC9B91D6AB}" dt="2026-06-13T20:34:12.274" v="29" actId="20577"/>
           <ac:spMkLst>
             <pc:docMk/>
-            <pc:sldMk cId="0" sldId="345"/>
-            <ac:spMk id="3" creationId="{E6E7F81D-312B-50C8-5DBB-78A2CB6ECA06}"/>
+            <pc:sldMk cId="0" sldId="366"/>
+            <ac:spMk id="19459" creationId="{00000000-0000-0000-0000-000000000000}"/>
           </ac:spMkLst>
         </pc:spChg>
+      </pc:sldChg>
+      <pc:sldChg chg="modSp mod">
+        <pc:chgData name="Camilo Daleles Rennó" userId="eac9aab033b2f962" providerId="LiveId" clId="{AF66D22B-69B9-4EF0-A235-CDDC9B91D6AB}" dt="2026-06-13T20:33:06.109" v="10" actId="20577"/>
+        <pc:sldMkLst>
+          <pc:docMk/>
+          <pc:sldMk cId="33346296" sldId="374"/>
+        </pc:sldMkLst>
+        <pc:spChg chg="mod">
+          <ac:chgData name="Camilo Daleles Rennó" userId="eac9aab033b2f962" providerId="LiveId" clId="{AF66D22B-69B9-4EF0-A235-CDDC9B91D6AB}" dt="2026-06-13T20:33:06.109" v="10" actId="20577"/>
+          <ac:spMkLst>
+            <pc:docMk/>
+            <pc:sldMk cId="33346296" sldId="374"/>
+            <ac:spMk id="5" creationId="{00000000-0000-0000-0000-000000000000}"/>
+          </ac:spMkLst>
+        </pc:spChg>
+      </pc:sldChg>
+      <pc:sldChg chg="modSp mod">
+        <pc:chgData name="Camilo Daleles Rennó" userId="eac9aab033b2f962" providerId="LiveId" clId="{AF66D22B-69B9-4EF0-A235-CDDC9B91D6AB}" dt="2026-06-13T20:35:41.558" v="30" actId="20577"/>
+        <pc:sldMkLst>
+          <pc:docMk/>
+          <pc:sldMk cId="1877254047" sldId="393"/>
+        </pc:sldMkLst>
+        <pc:spChg chg="mod">
+          <ac:chgData name="Camilo Daleles Rennó" userId="eac9aab033b2f962" providerId="LiveId" clId="{AF66D22B-69B9-4EF0-A235-CDDC9B91D6AB}" dt="2026-06-13T20:35:41.558" v="30" actId="20577"/>
+          <ac:spMkLst>
+            <pc:docMk/>
+            <pc:sldMk cId="1877254047" sldId="393"/>
+            <ac:spMk id="3075" creationId="{00000000-0000-0000-0000-000000000000}"/>
+          </ac:spMkLst>
+        </pc:spChg>
+      </pc:sldChg>
+      <pc:sldChg chg="addSp delSp mod">
+        <pc:chgData name="Camilo Daleles Rennó" userId="eac9aab033b2f962" providerId="LiveId" clId="{AF66D22B-69B9-4EF0-A235-CDDC9B91D6AB}" dt="2026-06-13T20:38:09.771" v="32" actId="22"/>
+        <pc:sldMkLst>
+          <pc:docMk/>
+          <pc:sldMk cId="2956632756" sldId="394"/>
+        </pc:sldMkLst>
+        <pc:picChg chg="add">
+          <ac:chgData name="Camilo Daleles Rennó" userId="eac9aab033b2f962" providerId="LiveId" clId="{AF66D22B-69B9-4EF0-A235-CDDC9B91D6AB}" dt="2026-06-13T20:38:09.771" v="32" actId="22"/>
+          <ac:picMkLst>
+            <pc:docMk/>
+            <pc:sldMk cId="2956632756" sldId="394"/>
+            <ac:picMk id="3" creationId="{BB5D00E7-EF6A-407C-2951-2E03B734E3BB}"/>
+          </ac:picMkLst>
+        </pc:picChg>
+        <pc:picChg chg="del">
+          <ac:chgData name="Camilo Daleles Rennó" userId="eac9aab033b2f962" providerId="LiveId" clId="{AF66D22B-69B9-4EF0-A235-CDDC9B91D6AB}" dt="2026-06-13T20:38:05.006" v="31" actId="478"/>
+          <ac:picMkLst>
+            <pc:docMk/>
+            <pc:sldMk cId="2956632756" sldId="394"/>
+            <ac:picMk id="9" creationId="{4F03EC55-8767-F28F-A029-D73269292570}"/>
+          </ac:picMkLst>
+        </pc:picChg>
+      </pc:sldChg>
+      <pc:sldChg chg="addSp delSp modSp mod">
+        <pc:chgData name="Camilo Daleles Rennó" userId="eac9aab033b2f962" providerId="LiveId" clId="{AF66D22B-69B9-4EF0-A235-CDDC9B91D6AB}" dt="2026-06-13T20:45:51.957" v="82" actId="14100"/>
+        <pc:sldMkLst>
+          <pc:docMk/>
+          <pc:sldMk cId="3928394977" sldId="395"/>
+        </pc:sldMkLst>
+        <pc:spChg chg="mod">
+          <ac:chgData name="Camilo Daleles Rennó" userId="eac9aab033b2f962" providerId="LiveId" clId="{AF66D22B-69B9-4EF0-A235-CDDC9B91D6AB}" dt="2026-06-13T20:39:29.454" v="47" actId="1035"/>
+          <ac:spMkLst>
+            <pc:docMk/>
+            <pc:sldMk cId="3928394977" sldId="395"/>
+            <ac:spMk id="4" creationId="{00000000-0000-0000-0000-000000000000}"/>
+          </ac:spMkLst>
+        </pc:spChg>
+        <pc:spChg chg="mod">
+          <ac:chgData name="Camilo Daleles Rennó" userId="eac9aab033b2f962" providerId="LiveId" clId="{AF66D22B-69B9-4EF0-A235-CDDC9B91D6AB}" dt="2026-06-13T20:39:29.454" v="47" actId="1035"/>
+          <ac:spMkLst>
+            <pc:docMk/>
+            <pc:sldMk cId="3928394977" sldId="395"/>
+            <ac:spMk id="7" creationId="{4C6BF194-C996-C851-56D8-C4F059D6A25B}"/>
+          </ac:spMkLst>
+        </pc:spChg>
+        <pc:spChg chg="mod">
+          <ac:chgData name="Camilo Daleles Rennó" userId="eac9aab033b2f962" providerId="LiveId" clId="{AF66D22B-69B9-4EF0-A235-CDDC9B91D6AB}" dt="2026-06-13T20:39:29.454" v="47" actId="1035"/>
+          <ac:spMkLst>
+            <pc:docMk/>
+            <pc:sldMk cId="3928394977" sldId="395"/>
+            <ac:spMk id="9" creationId="{00000000-0000-0000-0000-000000000000}"/>
+          </ac:spMkLst>
+        </pc:spChg>
+        <pc:spChg chg="mod">
+          <ac:chgData name="Camilo Daleles Rennó" userId="eac9aab033b2f962" providerId="LiveId" clId="{AF66D22B-69B9-4EF0-A235-CDDC9B91D6AB}" dt="2026-06-13T20:45:51.957" v="82" actId="14100"/>
+          <ac:spMkLst>
+            <pc:docMk/>
+            <pc:sldMk cId="3928394977" sldId="395"/>
+            <ac:spMk id="10" creationId="{00000000-0000-0000-0000-000000000000}"/>
+          </ac:spMkLst>
+        </pc:spChg>
+        <pc:spChg chg="mod">
+          <ac:chgData name="Camilo Daleles Rennó" userId="eac9aab033b2f962" providerId="LiveId" clId="{AF66D22B-69B9-4EF0-A235-CDDC9B91D6AB}" dt="2026-06-13T20:39:29.454" v="47" actId="1035"/>
+          <ac:spMkLst>
+            <pc:docMk/>
+            <pc:sldMk cId="3928394977" sldId="395"/>
+            <ac:spMk id="11" creationId="{00000000-0000-0000-0000-000000000000}"/>
+          </ac:spMkLst>
+        </pc:spChg>
+        <pc:picChg chg="add ord">
+          <ac:chgData name="Camilo Daleles Rennó" userId="eac9aab033b2f962" providerId="LiveId" clId="{AF66D22B-69B9-4EF0-A235-CDDC9B91D6AB}" dt="2026-06-13T20:39:15.011" v="35" actId="167"/>
+          <ac:picMkLst>
+            <pc:docMk/>
+            <pc:sldMk cId="3928394977" sldId="395"/>
+            <ac:picMk id="3" creationId="{9EC61133-8F93-28B9-6E9E-CDDDC84685B7}"/>
+          </ac:picMkLst>
+        </pc:picChg>
+        <pc:picChg chg="del">
+          <ac:chgData name="Camilo Daleles Rennó" userId="eac9aab033b2f962" providerId="LiveId" clId="{AF66D22B-69B9-4EF0-A235-CDDC9B91D6AB}" dt="2026-06-13T20:39:04.665" v="33" actId="478"/>
+          <ac:picMkLst>
+            <pc:docMk/>
+            <pc:sldMk cId="3928394977" sldId="395"/>
+            <ac:picMk id="12" creationId="{029AA786-4420-9D8E-AEDB-4F8F7B19233C}"/>
+          </ac:picMkLst>
+        </pc:picChg>
+      </pc:sldChg>
+      <pc:sldChg chg="addSp delSp add mod delAnim">
+        <pc:chgData name="Camilo Daleles Rennó" userId="eac9aab033b2f962" providerId="LiveId" clId="{AF66D22B-69B9-4EF0-A235-CDDC9B91D6AB}" dt="2026-06-13T20:47:30.672" v="88" actId="22"/>
+        <pc:sldMkLst>
+          <pc:docMk/>
+          <pc:sldMk cId="2271998350" sldId="396"/>
+        </pc:sldMkLst>
+        <pc:spChg chg="del">
+          <ac:chgData name="Camilo Daleles Rennó" userId="eac9aab033b2f962" providerId="LiveId" clId="{AF66D22B-69B9-4EF0-A235-CDDC9B91D6AB}" dt="2026-06-13T20:47:25.404" v="85" actId="478"/>
+          <ac:spMkLst>
+            <pc:docMk/>
+            <pc:sldMk cId="2271998350" sldId="396"/>
+            <ac:spMk id="4" creationId="{D4D6D422-149B-9523-AEDF-0969129E0FC6}"/>
+          </ac:spMkLst>
+        </pc:spChg>
+        <pc:spChg chg="del">
+          <ac:chgData name="Camilo Daleles Rennó" userId="eac9aab033b2f962" providerId="LiveId" clId="{AF66D22B-69B9-4EF0-A235-CDDC9B91D6AB}" dt="2026-06-13T20:47:24.120" v="84" actId="478"/>
+          <ac:spMkLst>
+            <pc:docMk/>
+            <pc:sldMk cId="2271998350" sldId="396"/>
+            <ac:spMk id="7" creationId="{961C3E92-385E-1EAE-9266-7D25204A7C09}"/>
+          </ac:spMkLst>
+        </pc:spChg>
+        <pc:spChg chg="del">
+          <ac:chgData name="Camilo Daleles Rennó" userId="eac9aab033b2f962" providerId="LiveId" clId="{AF66D22B-69B9-4EF0-A235-CDDC9B91D6AB}" dt="2026-06-13T20:47:28.198" v="87" actId="478"/>
+          <ac:spMkLst>
+            <pc:docMk/>
+            <pc:sldMk cId="2271998350" sldId="396"/>
+            <ac:spMk id="9" creationId="{39C85FA7-9CFA-78F6-62BD-A28FFF183646}"/>
+          </ac:spMkLst>
+        </pc:spChg>
+        <pc:spChg chg="del">
+          <ac:chgData name="Camilo Daleles Rennó" userId="eac9aab033b2f962" providerId="LiveId" clId="{AF66D22B-69B9-4EF0-A235-CDDC9B91D6AB}" dt="2026-06-13T20:47:28.198" v="87" actId="478"/>
+          <ac:spMkLst>
+            <pc:docMk/>
+            <pc:sldMk cId="2271998350" sldId="396"/>
+            <ac:spMk id="10" creationId="{F445EF2F-E2D8-8D3F-39CA-7E8DE5EDC826}"/>
+          </ac:spMkLst>
+        </pc:spChg>
+        <pc:spChg chg="del">
+          <ac:chgData name="Camilo Daleles Rennó" userId="eac9aab033b2f962" providerId="LiveId" clId="{AF66D22B-69B9-4EF0-A235-CDDC9B91D6AB}" dt="2026-06-13T20:47:28.198" v="87" actId="478"/>
+          <ac:spMkLst>
+            <pc:docMk/>
+            <pc:sldMk cId="2271998350" sldId="396"/>
+            <ac:spMk id="11" creationId="{0E0A2725-CBA7-1F21-3D26-32B67D345DBA}"/>
+          </ac:spMkLst>
+        </pc:spChg>
+        <pc:picChg chg="del">
+          <ac:chgData name="Camilo Daleles Rennó" userId="eac9aab033b2f962" providerId="LiveId" clId="{AF66D22B-69B9-4EF0-A235-CDDC9B91D6AB}" dt="2026-06-13T20:47:26.147" v="86" actId="478"/>
+          <ac:picMkLst>
+            <pc:docMk/>
+            <pc:sldMk cId="2271998350" sldId="396"/>
+            <ac:picMk id="3" creationId="{8110BFC3-A4A6-5131-7EAD-BA5939FF2809}"/>
+          </ac:picMkLst>
+        </pc:picChg>
+        <pc:picChg chg="add">
+          <ac:chgData name="Camilo Daleles Rennó" userId="eac9aab033b2f962" providerId="LiveId" clId="{AF66D22B-69B9-4EF0-A235-CDDC9B91D6AB}" dt="2026-06-13T20:47:30.672" v="88" actId="22"/>
+          <ac:picMkLst>
+            <pc:docMk/>
+            <pc:sldMk cId="2271998350" sldId="396"/>
+            <ac:picMk id="6" creationId="{358369A1-B574-7C02-D761-5E53634274EC}"/>
+          </ac:picMkLst>
+        </pc:picChg>
+      </pc:sldChg>
+      <pc:sldChg chg="addSp delSp modSp add del mod ord modAnim">
+        <pc:chgData name="Camilo Daleles Rennó" userId="eac9aab033b2f962" providerId="LiveId" clId="{AF66D22B-69B9-4EF0-A235-CDDC9B91D6AB}" dt="2026-06-13T20:44:14.202" v="81" actId="47"/>
+        <pc:sldMkLst>
+          <pc:docMk/>
+          <pc:sldMk cId="3973806042" sldId="396"/>
+        </pc:sldMkLst>
+        <pc:spChg chg="add mod">
+          <ac:chgData name="Camilo Daleles Rennó" userId="eac9aab033b2f962" providerId="LiveId" clId="{AF66D22B-69B9-4EF0-A235-CDDC9B91D6AB}" dt="2026-06-13T20:44:03.280" v="80" actId="1035"/>
+          <ac:spMkLst>
+            <pc:docMk/>
+            <pc:sldMk cId="3973806042" sldId="396"/>
+            <ac:spMk id="11" creationId="{C461C4DC-E397-F2AD-8B85-978DD03B2C2E}"/>
+          </ac:spMkLst>
+        </pc:spChg>
+        <pc:picChg chg="del">
+          <ac:chgData name="Camilo Daleles Rennó" userId="eac9aab033b2f962" providerId="LiveId" clId="{AF66D22B-69B9-4EF0-A235-CDDC9B91D6AB}" dt="2026-06-13T20:39:44.041" v="49" actId="478"/>
+          <ac:picMkLst>
+            <pc:docMk/>
+            <pc:sldMk cId="3973806042" sldId="396"/>
+            <ac:picMk id="3" creationId="{D0BD8AF3-75A9-5225-2CF4-6AF5877CEB4A}"/>
+          </ac:picMkLst>
+        </pc:picChg>
+        <pc:picChg chg="add del mod modCrop">
+          <ac:chgData name="Camilo Daleles Rennó" userId="eac9aab033b2f962" providerId="LiveId" clId="{AF66D22B-69B9-4EF0-A235-CDDC9B91D6AB}" dt="2026-06-13T20:43:41.136" v="65" actId="478"/>
+          <ac:picMkLst>
+            <pc:docMk/>
+            <pc:sldMk cId="3973806042" sldId="396"/>
+            <ac:picMk id="4" creationId="{1A5838D9-6826-3F8E-A35F-1346F4570AE2}"/>
+          </ac:picMkLst>
+        </pc:picChg>
+        <pc:picChg chg="add del mod">
+          <ac:chgData name="Camilo Daleles Rennó" userId="eac9aab033b2f962" providerId="LiveId" clId="{AF66D22B-69B9-4EF0-A235-CDDC9B91D6AB}" dt="2026-06-13T20:42:45.137" v="58" actId="478"/>
+          <ac:picMkLst>
+            <pc:docMk/>
+            <pc:sldMk cId="3973806042" sldId="396"/>
+            <ac:picMk id="5" creationId="{86A98EA3-BF85-34AA-3754-314BC434C0B4}"/>
+          </ac:picMkLst>
+        </pc:picChg>
+        <pc:picChg chg="add del mod modCrop">
+          <ac:chgData name="Camilo Daleles Rennó" userId="eac9aab033b2f962" providerId="LiveId" clId="{AF66D22B-69B9-4EF0-A235-CDDC9B91D6AB}" dt="2026-06-13T20:43:41.136" v="65" actId="478"/>
+          <ac:picMkLst>
+            <pc:docMk/>
+            <pc:sldMk cId="3973806042" sldId="396"/>
+            <ac:picMk id="8" creationId="{121167FC-0E50-747E-B131-6E047C463BEA}"/>
+          </ac:picMkLst>
+        </pc:picChg>
+        <pc:picChg chg="add">
+          <ac:chgData name="Camilo Daleles Rennó" userId="eac9aab033b2f962" providerId="LiveId" clId="{AF66D22B-69B9-4EF0-A235-CDDC9B91D6AB}" dt="2026-06-13T20:43:43.558" v="66" actId="22"/>
+          <ac:picMkLst>
+            <pc:docMk/>
+            <pc:sldMk cId="3973806042" sldId="396"/>
+            <ac:picMk id="10" creationId="{34920F45-9B4A-B64F-D83F-00337A65E9DC}"/>
+          </ac:picMkLst>
+        </pc:picChg>
       </pc:sldChg>
     </pc:docChg>
   </pc:docChgLst>
@@ -307,7 +558,7 @@
               <a:pPr>
                 <a:defRPr/>
               </a:pPr>
-              <a:t>18/05/2026</a:t>
+              <a:t>13/06/2026</a:t>
             </a:fld>
             <a:endParaRPr lang="pt-BR" dirty="0"/>
           </a:p>
@@ -4240,6 +4491,111 @@
 </p:sld>
 </file>
 
+<file path=ppt/slides/slide10.xml><?xml version="1.0" encoding="utf-8"?>
+<p:sld xmlns:a="http://schemas.openxmlformats.org/drawingml/2006/main" xmlns:r="http://schemas.openxmlformats.org/officeDocument/2006/relationships" xmlns:p="http://schemas.openxmlformats.org/presentationml/2006/main" showMasterPhAnim="0">
+  <p:cSld>
+    <p:spTree>
+      <p:nvGrpSpPr>
+        <p:cNvPr id="1" name="">
+          <a:extLst>
+            <a:ext uri="{FF2B5EF4-FFF2-40B4-BE49-F238E27FC236}">
+              <a16:creationId xmlns:a16="http://schemas.microsoft.com/office/drawing/2014/main" id="{27C4FE5E-E7F3-5861-67C7-1137058EB97A}"/>
+            </a:ext>
+          </a:extLst>
+        </p:cNvPr>
+        <p:cNvGrpSpPr/>
+        <p:nvPr/>
+      </p:nvGrpSpPr>
+      <p:grpSpPr>
+        <a:xfrm>
+          <a:off x="0" y="0"/>
+          <a:ext cx="0" cy="0"/>
+          <a:chOff x="0" y="0"/>
+          <a:chExt cx="0" cy="0"/>
+        </a:xfrm>
+      </p:grpSpPr>
+      <p:sp>
+        <p:nvSpPr>
+          <p:cNvPr id="5" name="Espaço Reservado para Número de Slide 1">
+            <a:extLst>
+              <a:ext uri="{FF2B5EF4-FFF2-40B4-BE49-F238E27FC236}">
+                <a16:creationId xmlns:a16="http://schemas.microsoft.com/office/drawing/2014/main" id="{E8DA791C-81FE-7C11-EF2A-E59389709E7C}"/>
+              </a:ext>
+            </a:extLst>
+          </p:cNvPr>
+          <p:cNvSpPr>
+            <a:spLocks noGrp="1"/>
+          </p:cNvSpPr>
+          <p:nvPr>
+            <p:ph type="sldNum" sz="quarter" idx="12"/>
+          </p:nvPr>
+        </p:nvSpPr>
+        <p:spPr>
+          <a:xfrm>
+            <a:off x="7256463" y="6400800"/>
+            <a:ext cx="1905000" cy="457200"/>
+          </a:xfrm>
+        </p:spPr>
+        <p:txBody>
+          <a:bodyPr/>
+          <a:lstStyle/>
+          <a:p>
+            <a:pPr>
+              <a:defRPr/>
+            </a:pPr>
+            <a:r>
+              <a:rPr lang="pt-BR" dirty="0"/>
+              <a:t>9</a:t>
+            </a:r>
+          </a:p>
+        </p:txBody>
+      </p:sp>
+      <p:pic>
+        <p:nvPicPr>
+          <p:cNvPr id="6" name="Imagem 5">
+            <a:extLst>
+              <a:ext uri="{FF2B5EF4-FFF2-40B4-BE49-F238E27FC236}">
+                <a16:creationId xmlns:a16="http://schemas.microsoft.com/office/drawing/2014/main" id="{358369A1-B574-7C02-D761-5E53634274EC}"/>
+              </a:ext>
+            </a:extLst>
+          </p:cNvPr>
+          <p:cNvPicPr>
+            <a:picLocks noChangeAspect="1"/>
+          </p:cNvPicPr>
+          <p:nvPr/>
+        </p:nvPicPr>
+        <p:blipFill>
+          <a:blip r:embed="rId3"/>
+          <a:stretch>
+            <a:fillRect/>
+          </a:stretch>
+        </p:blipFill>
+        <p:spPr>
+          <a:xfrm>
+            <a:off x="0" y="412315"/>
+            <a:ext cx="9144000" cy="6033370"/>
+          </a:xfrm>
+          <a:prstGeom prst="rect">
+            <a:avLst/>
+          </a:prstGeom>
+        </p:spPr>
+      </p:pic>
+    </p:spTree>
+    <p:custDataLst>
+      <p:tags r:id="rId1"/>
+    </p:custDataLst>
+    <p:extLst>
+      <p:ext uri="{BB962C8B-B14F-4D97-AF65-F5344CB8AC3E}">
+        <p14:creationId xmlns:p14="http://schemas.microsoft.com/office/powerpoint/2010/main" val="2271998350"/>
+      </p:ext>
+    </p:extLst>
+  </p:cSld>
+  <p:clrMapOvr>
+    <a:masterClrMapping/>
+  </p:clrMapOvr>
+</p:sld>
+</file>
+
 <file path=ppt/slides/slide2.xml><?xml version="1.0" encoding="utf-8"?>
 <p:sld xmlns:a="http://schemas.openxmlformats.org/drawingml/2006/main" xmlns:r="http://schemas.openxmlformats.org/officeDocument/2006/relationships" xmlns:p="http://schemas.openxmlformats.org/presentationml/2006/main" showMasterPhAnim="0">
   <p:cSld>
@@ -4519,22 +4875,15 @@
               </a:rPr>
               <a:t>Todo o conteúdo da disciplina está disponível em:</a:t>
             </a:r>
-            <a:br>
-              <a:rPr lang="pt-BR" altLang="pt-BR" sz="2000" kern="0" dirty="0">
-                <a:latin typeface="Tahoma" panose="020B0604030504040204" pitchFamily="34" charset="0"/>
-              </a:rPr>
-            </a:br>
-            <a:br>
-              <a:rPr lang="pt-BR" altLang="pt-BR" sz="2000" kern="0" dirty="0">
-                <a:latin typeface="Tahoma" panose="020B0604030504040204" pitchFamily="34" charset="0"/>
-              </a:rPr>
-            </a:br>
-            <a:r>
-              <a:rPr lang="pt-BR" altLang="pt-BR" sz="2000" kern="0" dirty="0">
-                <a:latin typeface="Tahoma" panose="020B0604030504040204" pitchFamily="34" charset="0"/>
-              </a:rPr>
-              <a:t>							http://urlib.net/8JMKD2USNRW34T/4D6DMD2</a:t>
-            </a:r>
+          </a:p>
+          <a:p>
+            <a:pPr defTabSz="246063" eaLnBrk="1" hangingPunct="1">
+              <a:buFontTx/>
+              <a:buNone/>
+            </a:pPr>
+            <a:endParaRPr lang="pt-BR" altLang="pt-BR" sz="2000" kern="0" dirty="0">
+              <a:latin typeface="Tahoma" panose="020B0604030504040204" pitchFamily="34" charset="0"/>
+            </a:endParaRPr>
           </a:p>
           <a:p>
             <a:pPr defTabSz="246063" eaLnBrk="1" hangingPunct="1">
@@ -7411,7 +7760,17 @@
             </a:pPr>
             <a:r>
               <a:rPr lang="pt-BR" altLang="pt-BR" sz="2000" dirty="0"/>
-              <a:t>Análise de Variância e Regressão </a:t>
+              <a:t>Análise de Variância</a:t>
+            </a:r>
+          </a:p>
+          <a:p>
+            <a:pPr algn="just" eaLnBrk="1" hangingPunct="1">
+              <a:buFontTx/>
+              <a:buNone/>
+            </a:pPr>
+            <a:r>
+              <a:rPr lang="pt-BR" altLang="pt-BR" sz="2000" dirty="0"/>
+              <a:t>Análise de Regressão </a:t>
             </a:r>
           </a:p>
           <a:p>
@@ -7923,7 +8282,7 @@
                   </a:schemeClr>
                 </a:solidFill>
               </a:rPr>
-              <a:t>				Disponibilizados por tema, devendo ser resolvidos em grupos de 3							pessoas e enviadas para camilo.renno@inpe.br em data combinada</a:t>
+              <a:t>				Disponibilizados por tema, devendo ser resolvidos em grupos de 4							pessoas e enviadas para camilo.renno@inpe.br em data combinada</a:t>
             </a:r>
           </a:p>
           <a:p>
@@ -8419,10 +8778,10 @@
       </p:sp>
       <p:pic>
         <p:nvPicPr>
-          <p:cNvPr id="9" name="Imagem 8">
+          <p:cNvPr id="3" name="Imagem 2">
             <a:extLst>
               <a:ext uri="{FF2B5EF4-FFF2-40B4-BE49-F238E27FC236}">
-                <a16:creationId xmlns:a16="http://schemas.microsoft.com/office/drawing/2014/main" id="{4F03EC55-8767-F28F-A029-D73269292570}"/>
+                <a16:creationId xmlns:a16="http://schemas.microsoft.com/office/drawing/2014/main" id="{BB5D00E7-EF6A-407C-2951-2E03B734E3BB}"/>
               </a:ext>
             </a:extLst>
           </p:cNvPr>
@@ -8439,8 +8798,8 @@
         </p:blipFill>
         <p:spPr>
           <a:xfrm>
-            <a:off x="481012" y="1196752"/>
-            <a:ext cx="8181975" cy="3876675"/>
+            <a:off x="566737" y="1052512"/>
+            <a:ext cx="8010525" cy="4752975"/>
           </a:xfrm>
           <a:prstGeom prst="rect">
             <a:avLst/>
@@ -8479,10 +8838,10 @@
       </p:grpSpPr>
       <p:pic>
         <p:nvPicPr>
-          <p:cNvPr id="12" name="Imagem 11">
+          <p:cNvPr id="3" name="Imagem 2">
             <a:extLst>
               <a:ext uri="{FF2B5EF4-FFF2-40B4-BE49-F238E27FC236}">
-                <a16:creationId xmlns:a16="http://schemas.microsoft.com/office/drawing/2014/main" id="{029AA786-4420-9D8E-AEDB-4F8F7B19233C}"/>
+                <a16:creationId xmlns:a16="http://schemas.microsoft.com/office/drawing/2014/main" id="{9EC61133-8F93-28B9-6E9E-CDDDC84685B7}"/>
               </a:ext>
             </a:extLst>
           </p:cNvPr>
@@ -8499,8 +8858,8 @@
         </p:blipFill>
         <p:spPr>
           <a:xfrm>
-            <a:off x="557213" y="350093"/>
-            <a:ext cx="8181975" cy="6238875"/>
+            <a:off x="566737" y="1052512"/>
+            <a:ext cx="8010525" cy="4752975"/>
           </a:xfrm>
           <a:prstGeom prst="rect">
             <a:avLst/>
@@ -8545,7 +8904,7 @@
         </p:nvSpPr>
         <p:spPr>
           <a:xfrm>
-            <a:off x="2526748" y="1774807"/>
+            <a:off x="2526748" y="2492896"/>
             <a:ext cx="1728192" cy="570097"/>
           </a:xfrm>
           <a:prstGeom prst="ellipse">
@@ -8593,7 +8952,7 @@
         </p:nvSpPr>
         <p:spPr>
           <a:xfrm>
-            <a:off x="4499992" y="2501579"/>
+            <a:off x="4499992" y="3219668"/>
             <a:ext cx="936104" cy="448417"/>
           </a:xfrm>
           <a:prstGeom prst="ellipse">
@@ -8641,8 +9000,8 @@
         </p:nvSpPr>
         <p:spPr>
           <a:xfrm>
-            <a:off x="2555776" y="3670164"/>
-            <a:ext cx="2412268" cy="792000"/>
+            <a:off x="2555776" y="4388253"/>
+            <a:ext cx="2412268" cy="570097"/>
           </a:xfrm>
           <a:prstGeom prst="ellipse">
             <a:avLst/>
@@ -8689,7 +9048,7 @@
         </p:nvSpPr>
         <p:spPr>
           <a:xfrm>
-            <a:off x="2843808" y="3158534"/>
+            <a:off x="2843808" y="3876623"/>
             <a:ext cx="2592288" cy="468000"/>
           </a:xfrm>
           <a:prstGeom prst="ellipse">
@@ -8743,7 +9102,7 @@
         </p:nvSpPr>
         <p:spPr>
           <a:xfrm>
-            <a:off x="599034" y="2248672"/>
+            <a:off x="599034" y="2966761"/>
             <a:ext cx="936104" cy="570097"/>
           </a:xfrm>
           <a:prstGeom prst="ellipse">
@@ -9148,6 +9507,12 @@
 </file>
 
 <file path=ppt/tags/tag2.xml><?xml version="1.0" encoding="utf-8"?>
+<p:tagLst xmlns:a="http://schemas.openxmlformats.org/drawingml/2006/main" xmlns:r="http://schemas.openxmlformats.org/officeDocument/2006/relationships" xmlns:p="http://schemas.openxmlformats.org/presentationml/2006/main">
+  <p:tag name="TIMING" val="|0.5|0.6|0.3|0.2"/>
+</p:tagLst>
+</file>
+
+<file path=ppt/tags/tag3.xml><?xml version="1.0" encoding="utf-8"?>
 <p:tagLst xmlns:a="http://schemas.openxmlformats.org/drawingml/2006/main" xmlns:r="http://schemas.openxmlformats.org/officeDocument/2006/relationships" xmlns:p="http://schemas.openxmlformats.org/presentationml/2006/main">
   <p:tag name="TIMING" val="|0.5|0.6|0.3|0.2"/>
 </p:tagLst>
